--- a/Planning/Planning.pptx
+++ b/Planning/Planning.pptx
@@ -6,6 +6,9 @@
   </p:sldMasterIdLst>
   <p:sldIdLst>
     <p:sldId id="256" r:id="rId2"/>
+    <p:sldId id="257" r:id="rId3"/>
+    <p:sldId id="258" r:id="rId4"/>
+    <p:sldId id="259" r:id="rId5"/>
   </p:sldIdLst>
   <p:sldSz cx="12192000" cy="6858000"/>
   <p:notesSz cx="6858000" cy="9144000"/>
@@ -104,6 +107,11 @@
       </a:defRPr>
     </a:lvl9pPr>
   </p:defaultTextStyle>
+  <p:extLst>
+    <p:ext uri="{EFAFB233-063F-42B5-8137-9DF3F51BA10A}">
+      <p15:sldGuideLst xmlns:p15="http://schemas.microsoft.com/office/powerpoint/2012/main"/>
+    </p:ext>
+  </p:extLst>
 </p:presentation>
 </file>
 
@@ -256,7 +264,7 @@
           <a:p>
             <a:fld id="{6D2B2F1D-2A3F-1D4E-839C-7A968445D62F}" type="datetimeFigureOut">
               <a:rPr lang="en-CH" smtClean="0"/>
-              <a:t>05.12.2025</a:t>
+              <a:t>19.01.2026</a:t>
             </a:fld>
             <a:endParaRPr lang="en-CH"/>
           </a:p>
@@ -456,7 +464,7 @@
           <a:p>
             <a:fld id="{6D2B2F1D-2A3F-1D4E-839C-7A968445D62F}" type="datetimeFigureOut">
               <a:rPr lang="en-CH" smtClean="0"/>
-              <a:t>05.12.2025</a:t>
+              <a:t>19.01.2026</a:t>
             </a:fld>
             <a:endParaRPr lang="en-CH"/>
           </a:p>
@@ -666,7 +674,7 @@
           <a:p>
             <a:fld id="{6D2B2F1D-2A3F-1D4E-839C-7A968445D62F}" type="datetimeFigureOut">
               <a:rPr lang="en-CH" smtClean="0"/>
-              <a:t>05.12.2025</a:t>
+              <a:t>19.01.2026</a:t>
             </a:fld>
             <a:endParaRPr lang="en-CH"/>
           </a:p>
@@ -866,7 +874,7 @@
           <a:p>
             <a:fld id="{6D2B2F1D-2A3F-1D4E-839C-7A968445D62F}" type="datetimeFigureOut">
               <a:rPr lang="en-CH" smtClean="0"/>
-              <a:t>05.12.2025</a:t>
+              <a:t>19.01.2026</a:t>
             </a:fld>
             <a:endParaRPr lang="en-CH"/>
           </a:p>
@@ -1142,7 +1150,7 @@
           <a:p>
             <a:fld id="{6D2B2F1D-2A3F-1D4E-839C-7A968445D62F}" type="datetimeFigureOut">
               <a:rPr lang="en-CH" smtClean="0"/>
-              <a:t>05.12.2025</a:t>
+              <a:t>19.01.2026</a:t>
             </a:fld>
             <a:endParaRPr lang="en-CH"/>
           </a:p>
@@ -1410,7 +1418,7 @@
           <a:p>
             <a:fld id="{6D2B2F1D-2A3F-1D4E-839C-7A968445D62F}" type="datetimeFigureOut">
               <a:rPr lang="en-CH" smtClean="0"/>
-              <a:t>05.12.2025</a:t>
+              <a:t>19.01.2026</a:t>
             </a:fld>
             <a:endParaRPr lang="en-CH"/>
           </a:p>
@@ -1825,7 +1833,7 @@
           <a:p>
             <a:fld id="{6D2B2F1D-2A3F-1D4E-839C-7A968445D62F}" type="datetimeFigureOut">
               <a:rPr lang="en-CH" smtClean="0"/>
-              <a:t>05.12.2025</a:t>
+              <a:t>19.01.2026</a:t>
             </a:fld>
             <a:endParaRPr lang="en-CH"/>
           </a:p>
@@ -1967,7 +1975,7 @@
           <a:p>
             <a:fld id="{6D2B2F1D-2A3F-1D4E-839C-7A968445D62F}" type="datetimeFigureOut">
               <a:rPr lang="en-CH" smtClean="0"/>
-              <a:t>05.12.2025</a:t>
+              <a:t>19.01.2026</a:t>
             </a:fld>
             <a:endParaRPr lang="en-CH"/>
           </a:p>
@@ -2080,7 +2088,7 @@
           <a:p>
             <a:fld id="{6D2B2F1D-2A3F-1D4E-839C-7A968445D62F}" type="datetimeFigureOut">
               <a:rPr lang="en-CH" smtClean="0"/>
-              <a:t>05.12.2025</a:t>
+              <a:t>19.01.2026</a:t>
             </a:fld>
             <a:endParaRPr lang="en-CH"/>
           </a:p>
@@ -2393,7 +2401,7 @@
           <a:p>
             <a:fld id="{6D2B2F1D-2A3F-1D4E-839C-7A968445D62F}" type="datetimeFigureOut">
               <a:rPr lang="en-CH" smtClean="0"/>
-              <a:t>05.12.2025</a:t>
+              <a:t>19.01.2026</a:t>
             </a:fld>
             <a:endParaRPr lang="en-CH"/>
           </a:p>
@@ -2682,7 +2690,7 @@
           <a:p>
             <a:fld id="{6D2B2F1D-2A3F-1D4E-839C-7A968445D62F}" type="datetimeFigureOut">
               <a:rPr lang="en-CH" smtClean="0"/>
-              <a:t>05.12.2025</a:t>
+              <a:t>19.01.2026</a:t>
             </a:fld>
             <a:endParaRPr lang="en-CH"/>
           </a:p>
@@ -2925,7 +2933,7 @@
           <a:p>
             <a:fld id="{6D2B2F1D-2A3F-1D4E-839C-7A968445D62F}" type="datetimeFigureOut">
               <a:rPr lang="en-CH" smtClean="0"/>
-              <a:t>05.12.2025</a:t>
+              <a:t>19.01.2026</a:t>
             </a:fld>
             <a:endParaRPr lang="en-CH"/>
           </a:p>
@@ -3988,6 +3996,2564 @@
 </p:sld>
 </file>
 
+<file path=ppt/slides/slide2.xml><?xml version="1.0" encoding="utf-8"?>
+<p:sld xmlns:a="http://schemas.openxmlformats.org/drawingml/2006/main" xmlns:r="http://schemas.openxmlformats.org/officeDocument/2006/relationships" xmlns:p="http://schemas.openxmlformats.org/presentationml/2006/main">
+  <p:cSld>
+    <p:spTree>
+      <p:nvGrpSpPr>
+        <p:cNvPr id="1" name=""/>
+        <p:cNvGrpSpPr/>
+        <p:nvPr/>
+      </p:nvGrpSpPr>
+      <p:grpSpPr>
+        <a:xfrm>
+          <a:off x="0" y="0"/>
+          <a:ext cx="0" cy="0"/>
+          <a:chOff x="0" y="0"/>
+          <a:chExt cx="0" cy="0"/>
+        </a:xfrm>
+      </p:grpSpPr>
+      <p:sp>
+        <p:nvSpPr>
+          <p:cNvPr id="4" name="TextBox 3">
+            <a:extLst>
+              <a:ext uri="{FF2B5EF4-FFF2-40B4-BE49-F238E27FC236}">
+                <a16:creationId xmlns:a16="http://schemas.microsoft.com/office/drawing/2014/main" id="{498040F6-64D9-3587-50FD-40AA36936C1D}"/>
+              </a:ext>
+            </a:extLst>
+          </p:cNvPr>
+          <p:cNvSpPr txBox="1"/>
+          <p:nvPr/>
+        </p:nvSpPr>
+        <p:spPr>
+          <a:xfrm>
+            <a:off x="729344" y="794657"/>
+            <a:ext cx="5248124" cy="4093428"/>
+          </a:xfrm>
+          <a:prstGeom prst="rect">
+            <a:avLst/>
+          </a:prstGeom>
+          <a:noFill/>
+        </p:spPr>
+        <p:txBody>
+          <a:bodyPr wrap="square" rtlCol="0">
+            <a:spAutoFit/>
+          </a:bodyPr>
+          <a:lstStyle/>
+          <a:p>
+            <a:pPr marL="285750" indent="-285750">
+              <a:buFontTx/>
+              <a:buChar char="-"/>
+            </a:pPr>
+            <a:r>
+              <a:rPr lang="en-CH" sz="1000" strike="sngStrike" dirty="0"/>
+              <a:t>Mettre à jour GDD (0.5)</a:t>
+            </a:r>
+          </a:p>
+          <a:p>
+            <a:pPr marL="285750" indent="-285750">
+              <a:buFontTx/>
+              <a:buChar char="-"/>
+            </a:pPr>
+            <a:r>
+              <a:rPr lang="en-CH" sz="1000" strike="sngStrike" dirty="0"/>
+              <a:t>Finir d’attribuer toutes les rooms (narrative data) (1)</a:t>
+            </a:r>
+          </a:p>
+          <a:p>
+            <a:pPr marL="285750" indent="-285750">
+              <a:buFontTx/>
+              <a:buChar char="-"/>
+            </a:pPr>
+            <a:r>
+              <a:rPr lang="en-CH" sz="1000" strike="sngStrike" dirty="0"/>
+              <a:t>Attribuer mediums et scores aux infos dans les rooms du proto (2)</a:t>
+            </a:r>
+          </a:p>
+          <a:p>
+            <a:pPr marL="285750" indent="-285750">
+              <a:buFontTx/>
+              <a:buChar char="-"/>
+            </a:pPr>
+            <a:r>
+              <a:rPr lang="en-CH" sz="1000" dirty="0"/>
+              <a:t>Rassembler les archives (1)</a:t>
+            </a:r>
+          </a:p>
+          <a:p>
+            <a:pPr marL="285750" indent="-285750">
+              <a:buFontTx/>
+              <a:buChar char="-"/>
+            </a:pPr>
+            <a:r>
+              <a:rPr lang="en-CH" sz="1000" strike="sngStrike" dirty="0"/>
+              <a:t>Définir méthode de création/sélection données (0.5)</a:t>
+            </a:r>
+          </a:p>
+          <a:p>
+            <a:pPr marL="285750" indent="-285750">
+              <a:buFontTx/>
+              <a:buChar char="-"/>
+            </a:pPr>
+            <a:r>
+              <a:rPr lang="en-CH" sz="1000" strike="sngStrike" dirty="0"/>
+              <a:t>Faire liste des décisions prises jusque-là (1)</a:t>
+            </a:r>
+          </a:p>
+          <a:p>
+            <a:pPr marL="285750" indent="-285750">
+              <a:buFontTx/>
+              <a:buChar char="-"/>
+            </a:pPr>
+            <a:r>
+              <a:rPr lang="en-CH" sz="1000" strike="sngStrike" dirty="0"/>
+              <a:t>Finaliser décisions design (1)</a:t>
+            </a:r>
+          </a:p>
+          <a:p>
+            <a:pPr marL="285750" indent="-285750">
+              <a:buFontTx/>
+              <a:buChar char="-"/>
+            </a:pPr>
+            <a:r>
+              <a:rPr lang="en-CH" sz="1000" dirty="0"/>
+              <a:t>Finir tablette (pas bien, juste le faire !) (1)</a:t>
+            </a:r>
+          </a:p>
+          <a:p>
+            <a:pPr marL="285750" indent="-285750">
+              <a:buFontTx/>
+              <a:buChar char="-"/>
+            </a:pPr>
+            <a:r>
+              <a:rPr lang="en-CH" sz="1000" dirty="0"/>
+              <a:t>Écrire textes en toki pona (3)</a:t>
+            </a:r>
+          </a:p>
+          <a:p>
+            <a:pPr marL="285750" indent="-285750">
+              <a:buFontTx/>
+              <a:buChar char="-"/>
+            </a:pPr>
+            <a:r>
+              <a:rPr lang="en-CH" sz="1000" strike="sngStrike" dirty="0"/>
+              <a:t>Whiteboxing (11)</a:t>
+            </a:r>
+          </a:p>
+          <a:p>
+            <a:pPr marL="742950" lvl="1" indent="-285750">
+              <a:buFontTx/>
+              <a:buChar char="-"/>
+            </a:pPr>
+            <a:r>
+              <a:rPr lang="en-CH" sz="1000" strike="sngStrike" dirty="0"/>
+              <a:t>Waiting Room (2)</a:t>
+            </a:r>
+          </a:p>
+          <a:p>
+            <a:pPr marL="742950" lvl="1" indent="-285750">
+              <a:buFontTx/>
+              <a:buChar char="-"/>
+            </a:pPr>
+            <a:r>
+              <a:rPr lang="en-CH" sz="1000" strike="sngStrike" dirty="0"/>
+              <a:t>Crafting Room (3)</a:t>
+            </a:r>
+          </a:p>
+          <a:p>
+            <a:pPr marL="742950" lvl="1" indent="-285750">
+              <a:buFontTx/>
+              <a:buChar char="-"/>
+            </a:pPr>
+            <a:r>
+              <a:rPr lang="en-CH" sz="1000" strike="sngStrike" dirty="0"/>
+              <a:t>Balcony (2)</a:t>
+            </a:r>
+          </a:p>
+          <a:p>
+            <a:pPr marL="742950" lvl="1" indent="-285750">
+              <a:buFontTx/>
+              <a:buChar char="-"/>
+            </a:pPr>
+            <a:r>
+              <a:rPr lang="en-CH" sz="1000" dirty="0"/>
+              <a:t>Waterfall (1)</a:t>
+            </a:r>
+          </a:p>
+          <a:p>
+            <a:pPr marL="742950" lvl="1" indent="-285750">
+              <a:buFontTx/>
+              <a:buChar char="-"/>
+            </a:pPr>
+            <a:r>
+              <a:rPr lang="en-CH" sz="1000" strike="sngStrike" dirty="0"/>
+              <a:t>Sacred Resting Place (1)</a:t>
+            </a:r>
+          </a:p>
+          <a:p>
+            <a:pPr marL="742950" lvl="1" indent="-285750">
+              <a:buFontTx/>
+              <a:buChar char="-"/>
+            </a:pPr>
+            <a:r>
+              <a:rPr lang="en-CH" sz="1000" strike="sngStrike" dirty="0"/>
+              <a:t>Stairs (2)</a:t>
+            </a:r>
+          </a:p>
+          <a:p>
+            <a:pPr marL="285750" indent="-285750">
+              <a:buFontTx/>
+              <a:buChar char="-"/>
+            </a:pPr>
+            <a:r>
+              <a:rPr lang="en-CH" sz="1000" dirty="0"/>
+              <a:t>Assets (13)</a:t>
+            </a:r>
+          </a:p>
+          <a:p>
+            <a:pPr marL="742950" lvl="1" indent="-285750">
+              <a:buFontTx/>
+              <a:buChar char="-"/>
+            </a:pPr>
+            <a:r>
+              <a:rPr lang="en-CH" sz="1000" strike="sngStrike" dirty="0"/>
+              <a:t>Waiting Room (2)</a:t>
+            </a:r>
+          </a:p>
+          <a:p>
+            <a:pPr marL="742950" lvl="1" indent="-285750">
+              <a:buFontTx/>
+              <a:buChar char="-"/>
+            </a:pPr>
+            <a:r>
+              <a:rPr lang="en-CH" sz="1000" dirty="0"/>
+              <a:t>Crafting Room (2)</a:t>
+            </a:r>
+          </a:p>
+          <a:p>
+            <a:pPr marL="742950" lvl="1" indent="-285750">
+              <a:buFontTx/>
+              <a:buChar char="-"/>
+            </a:pPr>
+            <a:r>
+              <a:rPr lang="en-CH" sz="1000" dirty="0"/>
+              <a:t>Balcony (1)</a:t>
+            </a:r>
+          </a:p>
+          <a:p>
+            <a:pPr marL="742950" lvl="1" indent="-285750">
+              <a:buFontTx/>
+              <a:buChar char="-"/>
+            </a:pPr>
+            <a:r>
+              <a:rPr lang="en-CH" sz="1000" dirty="0"/>
+              <a:t>Waterfall (3)</a:t>
+            </a:r>
+          </a:p>
+          <a:p>
+            <a:pPr marL="742950" lvl="1" indent="-285750">
+              <a:buFontTx/>
+              <a:buChar char="-"/>
+            </a:pPr>
+            <a:r>
+              <a:rPr lang="en-CH" sz="1000" dirty="0"/>
+              <a:t>Sacred Resting Place (2)</a:t>
+            </a:r>
+          </a:p>
+          <a:p>
+            <a:pPr marL="742950" lvl="1" indent="-285750">
+              <a:buFontTx/>
+              <a:buChar char="-"/>
+            </a:pPr>
+            <a:r>
+              <a:rPr lang="en-CH" sz="1000" dirty="0"/>
+              <a:t>Stairs (2)</a:t>
+            </a:r>
+          </a:p>
+          <a:p>
+            <a:pPr marL="285750" indent="-285750">
+              <a:buFontTx/>
+              <a:buChar char="-"/>
+            </a:pPr>
+            <a:r>
+              <a:rPr lang="en-CH" sz="1000" dirty="0"/>
+              <a:t>Lumière + assemblage (1 j par pièce) (6)</a:t>
+            </a:r>
+          </a:p>
+          <a:p>
+            <a:pPr marL="285750" indent="-285750">
+              <a:buFontTx/>
+              <a:buChar char="-"/>
+            </a:pPr>
+            <a:endParaRPr lang="en-CH" sz="1000" dirty="0"/>
+          </a:p>
+          <a:p>
+            <a:pPr marL="285750" indent="-285750">
+              <a:buFontTx/>
+              <a:buChar char="-"/>
+            </a:pPr>
+            <a:r>
+              <a:rPr lang="en-CH" sz="1000" dirty="0"/>
+              <a:t>22</a:t>
+            </a:r>
+          </a:p>
+        </p:txBody>
+      </p:sp>
+      <p:sp>
+        <p:nvSpPr>
+          <p:cNvPr id="5" name="TextBox 4">
+            <a:extLst>
+              <a:ext uri="{FF2B5EF4-FFF2-40B4-BE49-F238E27FC236}">
+                <a16:creationId xmlns:a16="http://schemas.microsoft.com/office/drawing/2014/main" id="{DE90324E-FB8C-E327-388F-152DDE83A97C}"/>
+              </a:ext>
+            </a:extLst>
+          </p:cNvPr>
+          <p:cNvSpPr txBox="1"/>
+          <p:nvPr/>
+        </p:nvSpPr>
+        <p:spPr>
+          <a:xfrm>
+            <a:off x="6232678" y="879324"/>
+            <a:ext cx="5248124" cy="1477328"/>
+          </a:xfrm>
+          <a:prstGeom prst="rect">
+            <a:avLst/>
+          </a:prstGeom>
+          <a:noFill/>
+        </p:spPr>
+        <p:txBody>
+          <a:bodyPr wrap="square" rtlCol="0">
+            <a:spAutoFit/>
+          </a:bodyPr>
+          <a:lstStyle/>
+          <a:p>
+            <a:pPr marL="285750" indent="-285750">
+              <a:buFontTx/>
+              <a:buChar char="-"/>
+            </a:pPr>
+            <a:r>
+              <a:rPr lang="en-CH" sz="1000" dirty="0"/>
+              <a:t>Trouver et lire 2-3 articles recherche-création (se concentrer sur la forme et méthode) (1)</a:t>
+            </a:r>
+          </a:p>
+          <a:p>
+            <a:pPr marL="285750" indent="-285750">
+              <a:buFontTx/>
+              <a:buChar char="-"/>
+            </a:pPr>
+            <a:r>
+              <a:rPr lang="en-CH" sz="1000" dirty="0"/>
+              <a:t>Rassembler ludographie (0.5)</a:t>
+            </a:r>
+          </a:p>
+          <a:p>
+            <a:pPr marL="285750" indent="-285750">
+              <a:buFontTx/>
+              <a:buChar char="-"/>
+            </a:pPr>
+            <a:r>
+              <a:rPr lang="en-CH" sz="1000" dirty="0"/>
+              <a:t>Rassembler bibliographie (3)</a:t>
+            </a:r>
+          </a:p>
+          <a:p>
+            <a:pPr marL="285750" indent="-285750">
+              <a:buFontTx/>
+              <a:buChar char="-"/>
+            </a:pPr>
+            <a:r>
+              <a:rPr lang="en-CH" sz="1000" dirty="0"/>
+              <a:t>Définir structure du rapport (0.5)</a:t>
+            </a:r>
+          </a:p>
+          <a:p>
+            <a:pPr marL="285750" indent="-285750">
+              <a:buFontTx/>
+              <a:buChar char="-"/>
+            </a:pPr>
+            <a:r>
+              <a:rPr lang="en-CH" sz="1000" dirty="0"/>
+              <a:t>Écriture (5)</a:t>
+            </a:r>
+          </a:p>
+          <a:p>
+            <a:pPr marL="285750" indent="-285750">
+              <a:buFontTx/>
+              <a:buChar char="-"/>
+            </a:pPr>
+            <a:r>
+              <a:rPr lang="en-CH" sz="1000" dirty="0"/>
+              <a:t>Présentation (2)</a:t>
+            </a:r>
+          </a:p>
+          <a:p>
+            <a:pPr marL="285750" indent="-285750">
+              <a:buFontTx/>
+              <a:buChar char="-"/>
+            </a:pPr>
+            <a:endParaRPr lang="en-CH" sz="1000" dirty="0"/>
+          </a:p>
+          <a:p>
+            <a:pPr marL="285750" indent="-285750">
+              <a:buFontTx/>
+              <a:buChar char="-"/>
+            </a:pPr>
+            <a:r>
+              <a:rPr lang="en-CH" sz="1000" dirty="0"/>
+              <a:t>12</a:t>
+            </a:r>
+          </a:p>
+          <a:p>
+            <a:pPr marL="742950" lvl="1" indent="-285750">
+              <a:buFontTx/>
+              <a:buChar char="-"/>
+            </a:pPr>
+            <a:endParaRPr lang="en-CH" sz="1000" dirty="0"/>
+          </a:p>
+        </p:txBody>
+      </p:sp>
+      <p:sp>
+        <p:nvSpPr>
+          <p:cNvPr id="7" name="TextBox 6">
+            <a:extLst>
+              <a:ext uri="{FF2B5EF4-FFF2-40B4-BE49-F238E27FC236}">
+                <a16:creationId xmlns:a16="http://schemas.microsoft.com/office/drawing/2014/main" id="{A1F53F70-274A-1BA1-74D9-0CBC450FD083}"/>
+              </a:ext>
+            </a:extLst>
+          </p:cNvPr>
+          <p:cNvSpPr txBox="1"/>
+          <p:nvPr/>
+        </p:nvSpPr>
+        <p:spPr>
+          <a:xfrm>
+            <a:off x="688258" y="4984955"/>
+            <a:ext cx="1241045" cy="369332"/>
+          </a:xfrm>
+          <a:prstGeom prst="rect">
+            <a:avLst/>
+          </a:prstGeom>
+          <a:noFill/>
+        </p:spPr>
+        <p:txBody>
+          <a:bodyPr wrap="none" rtlCol="0">
+            <a:spAutoFit/>
+          </a:bodyPr>
+          <a:lstStyle/>
+          <a:p>
+            <a:r>
+              <a:rPr lang="en-CH" dirty="0"/>
+              <a:t>-&gt; 14.02.26</a:t>
+            </a:r>
+          </a:p>
+        </p:txBody>
+      </p:sp>
+      <p:sp>
+        <p:nvSpPr>
+          <p:cNvPr id="8" name="TextBox 7">
+            <a:extLst>
+              <a:ext uri="{FF2B5EF4-FFF2-40B4-BE49-F238E27FC236}">
+                <a16:creationId xmlns:a16="http://schemas.microsoft.com/office/drawing/2014/main" id="{BC0A1126-F081-F602-6033-ECC9EE66398F}"/>
+              </a:ext>
+            </a:extLst>
+          </p:cNvPr>
+          <p:cNvSpPr txBox="1"/>
+          <p:nvPr/>
+        </p:nvSpPr>
+        <p:spPr>
+          <a:xfrm>
+            <a:off x="6410632" y="2487561"/>
+            <a:ext cx="5227328" cy="369332"/>
+          </a:xfrm>
+          <a:prstGeom prst="rect">
+            <a:avLst/>
+          </a:prstGeom>
+          <a:noFill/>
+        </p:spPr>
+        <p:txBody>
+          <a:bodyPr wrap="none" rtlCol="0">
+            <a:spAutoFit/>
+          </a:bodyPr>
+          <a:lstStyle/>
+          <a:p>
+            <a:r>
+              <a:rPr lang="en-CH" dirty="0"/>
+              <a:t>5 sem avant présentation -&gt; 2 sem avant présentation</a:t>
+            </a:r>
+          </a:p>
+        </p:txBody>
+      </p:sp>
+      <p:sp>
+        <p:nvSpPr>
+          <p:cNvPr id="9" name="TextBox 8">
+            <a:extLst>
+              <a:ext uri="{FF2B5EF4-FFF2-40B4-BE49-F238E27FC236}">
+                <a16:creationId xmlns:a16="http://schemas.microsoft.com/office/drawing/2014/main" id="{30B300AF-61FC-3D7D-EFCE-23E62D88006F}"/>
+              </a:ext>
+            </a:extLst>
+          </p:cNvPr>
+          <p:cNvSpPr txBox="1"/>
+          <p:nvPr/>
+        </p:nvSpPr>
+        <p:spPr>
+          <a:xfrm>
+            <a:off x="4524195" y="4727959"/>
+            <a:ext cx="2333844" cy="646331"/>
+          </a:xfrm>
+          <a:prstGeom prst="rect">
+            <a:avLst/>
+          </a:prstGeom>
+          <a:noFill/>
+        </p:spPr>
+        <p:txBody>
+          <a:bodyPr wrap="none" rtlCol="0">
+            <a:spAutoFit/>
+          </a:bodyPr>
+          <a:lstStyle/>
+          <a:p>
+            <a:r>
+              <a:rPr lang="en-CH" dirty="0"/>
+              <a:t>Projet</a:t>
+            </a:r>
+          </a:p>
+          <a:p>
+            <a:r>
+              <a:rPr lang="en-CH" dirty="0"/>
+              <a:t>3 semaines osef quand</a:t>
+            </a:r>
+          </a:p>
+        </p:txBody>
+      </p:sp>
+      <p:sp>
+        <p:nvSpPr>
+          <p:cNvPr id="10" name="TextBox 9">
+            <a:extLst>
+              <a:ext uri="{FF2B5EF4-FFF2-40B4-BE49-F238E27FC236}">
+                <a16:creationId xmlns:a16="http://schemas.microsoft.com/office/drawing/2014/main" id="{4C94111C-A185-9F71-5F37-6446F586296E}"/>
+              </a:ext>
+            </a:extLst>
+          </p:cNvPr>
+          <p:cNvSpPr txBox="1"/>
+          <p:nvPr/>
+        </p:nvSpPr>
+        <p:spPr>
+          <a:xfrm>
+            <a:off x="7583721" y="4151925"/>
+            <a:ext cx="2450864" cy="646331"/>
+          </a:xfrm>
+          <a:prstGeom prst="rect">
+            <a:avLst/>
+          </a:prstGeom>
+          <a:noFill/>
+        </p:spPr>
+        <p:txBody>
+          <a:bodyPr wrap="none" rtlCol="0">
+            <a:spAutoFit/>
+          </a:bodyPr>
+          <a:lstStyle/>
+          <a:p>
+            <a:r>
+              <a:rPr lang="en-CH" dirty="0"/>
+              <a:t>Stages</a:t>
+            </a:r>
+          </a:p>
+          <a:p>
+            <a:r>
+              <a:rPr lang="en-CH" dirty="0"/>
+              <a:t>10 semaines osef quand</a:t>
+            </a:r>
+          </a:p>
+        </p:txBody>
+      </p:sp>
+      <p:sp>
+        <p:nvSpPr>
+          <p:cNvPr id="12" name="TextBox 11">
+            <a:extLst>
+              <a:ext uri="{FF2B5EF4-FFF2-40B4-BE49-F238E27FC236}">
+                <a16:creationId xmlns:a16="http://schemas.microsoft.com/office/drawing/2014/main" id="{716A8D47-29A7-2DD7-CC10-6AC3B1E34836}"/>
+              </a:ext>
+            </a:extLst>
+          </p:cNvPr>
+          <p:cNvSpPr txBox="1"/>
+          <p:nvPr/>
+        </p:nvSpPr>
+        <p:spPr>
+          <a:xfrm>
+            <a:off x="627231" y="5542003"/>
+            <a:ext cx="4708533" cy="646331"/>
+          </a:xfrm>
+          <a:prstGeom prst="rect">
+            <a:avLst/>
+          </a:prstGeom>
+          <a:noFill/>
+        </p:spPr>
+        <p:txBody>
+          <a:bodyPr wrap="none" rtlCol="0">
+            <a:spAutoFit/>
+          </a:bodyPr>
+          <a:lstStyle/>
+          <a:p>
+            <a:r>
+              <a:rPr lang="en-CH" dirty="0"/>
+              <a:t>Visu QUE SCATTERPLOT (avec cartes en dessous)</a:t>
+            </a:r>
+          </a:p>
+          <a:p>
+            <a:r>
+              <a:rPr lang="en-CH" dirty="0"/>
+              <a:t>3j osef quand</a:t>
+            </a:r>
+          </a:p>
+        </p:txBody>
+      </p:sp>
+      <p:sp>
+        <p:nvSpPr>
+          <p:cNvPr id="13" name="TextBox 12">
+            <a:extLst>
+              <a:ext uri="{FF2B5EF4-FFF2-40B4-BE49-F238E27FC236}">
+                <a16:creationId xmlns:a16="http://schemas.microsoft.com/office/drawing/2014/main" id="{0C900A3F-BCA3-440D-FF9C-BBA71BF74218}"/>
+              </a:ext>
+            </a:extLst>
+          </p:cNvPr>
+          <p:cNvSpPr txBox="1"/>
+          <p:nvPr/>
+        </p:nvSpPr>
+        <p:spPr>
+          <a:xfrm>
+            <a:off x="8227905" y="5266700"/>
+            <a:ext cx="1455398" cy="646331"/>
+          </a:xfrm>
+          <a:prstGeom prst="rect">
+            <a:avLst/>
+          </a:prstGeom>
+          <a:noFill/>
+        </p:spPr>
+        <p:txBody>
+          <a:bodyPr wrap="none" rtlCol="0">
+            <a:spAutoFit/>
+          </a:bodyPr>
+          <a:lstStyle/>
+          <a:p>
+            <a:r>
+              <a:rPr lang="en-CH" dirty="0"/>
+              <a:t>philo</a:t>
+            </a:r>
+          </a:p>
+          <a:p>
+            <a:r>
+              <a:rPr lang="en-CH" dirty="0"/>
+              <a:t>6j osef quand</a:t>
+            </a:r>
+          </a:p>
+        </p:txBody>
+      </p:sp>
+      <p:sp>
+        <p:nvSpPr>
+          <p:cNvPr id="2" name="TextBox 1">
+            <a:extLst>
+              <a:ext uri="{FF2B5EF4-FFF2-40B4-BE49-F238E27FC236}">
+                <a16:creationId xmlns:a16="http://schemas.microsoft.com/office/drawing/2014/main" id="{9FDB68A3-DFE7-38C8-1AE9-0B64D3E05AA2}"/>
+              </a:ext>
+            </a:extLst>
+          </p:cNvPr>
+          <p:cNvSpPr txBox="1"/>
+          <p:nvPr/>
+        </p:nvSpPr>
+        <p:spPr>
+          <a:xfrm>
+            <a:off x="1080655" y="213755"/>
+            <a:ext cx="2010487" cy="369332"/>
+          </a:xfrm>
+          <a:prstGeom prst="rect">
+            <a:avLst/>
+          </a:prstGeom>
+          <a:noFill/>
+        </p:spPr>
+        <p:txBody>
+          <a:bodyPr wrap="none" rtlCol="0">
+            <a:spAutoFit/>
+          </a:bodyPr>
+          <a:lstStyle/>
+          <a:p>
+            <a:r>
+              <a:rPr lang="en-CH" dirty="0"/>
+              <a:t>RÉVISION 25/01/26</a:t>
+            </a:r>
+          </a:p>
+        </p:txBody>
+      </p:sp>
+      <p:sp>
+        <p:nvSpPr>
+          <p:cNvPr id="3" name="TextBox 2">
+            <a:extLst>
+              <a:ext uri="{FF2B5EF4-FFF2-40B4-BE49-F238E27FC236}">
+                <a16:creationId xmlns:a16="http://schemas.microsoft.com/office/drawing/2014/main" id="{B6FBAD6F-3A6C-D2CA-1C72-4E7168838BA4}"/>
+              </a:ext>
+            </a:extLst>
+          </p:cNvPr>
+          <p:cNvSpPr txBox="1"/>
+          <p:nvPr/>
+        </p:nvSpPr>
+        <p:spPr>
+          <a:xfrm>
+            <a:off x="6863938" y="285008"/>
+            <a:ext cx="1649491" cy="369332"/>
+          </a:xfrm>
+          <a:prstGeom prst="rect">
+            <a:avLst/>
+          </a:prstGeom>
+          <a:noFill/>
+        </p:spPr>
+        <p:txBody>
+          <a:bodyPr wrap="none" rtlCol="0">
+            <a:spAutoFit/>
+          </a:bodyPr>
+          <a:lstStyle/>
+          <a:p>
+            <a:r>
+              <a:rPr lang="en-CH" dirty="0"/>
+              <a:t>FIN D’ÉTUDES : </a:t>
+            </a:r>
+          </a:p>
+        </p:txBody>
+      </p:sp>
+    </p:spTree>
+    <p:extLst>
+      <p:ext uri="{BB962C8B-B14F-4D97-AF65-F5344CB8AC3E}">
+        <p14:creationId xmlns:p14="http://schemas.microsoft.com/office/powerpoint/2010/main" val="3730087361"/>
+      </p:ext>
+    </p:extLst>
+  </p:cSld>
+  <p:clrMapOvr>
+    <a:masterClrMapping/>
+  </p:clrMapOvr>
+</p:sld>
+</file>
+
+<file path=ppt/slides/slide3.xml><?xml version="1.0" encoding="utf-8"?>
+<p:sld xmlns:a="http://schemas.openxmlformats.org/drawingml/2006/main" xmlns:r="http://schemas.openxmlformats.org/officeDocument/2006/relationships" xmlns:p="http://schemas.openxmlformats.org/presentationml/2006/main">
+  <p:cSld>
+    <p:spTree>
+      <p:nvGrpSpPr>
+        <p:cNvPr id="1" name=""/>
+        <p:cNvGrpSpPr/>
+        <p:nvPr/>
+      </p:nvGrpSpPr>
+      <p:grpSpPr>
+        <a:xfrm>
+          <a:off x="0" y="0"/>
+          <a:ext cx="0" cy="0"/>
+          <a:chOff x="0" y="0"/>
+          <a:chExt cx="0" cy="0"/>
+        </a:xfrm>
+      </p:grpSpPr>
+      <p:sp>
+        <p:nvSpPr>
+          <p:cNvPr id="2" name="Title 1">
+            <a:extLst>
+              <a:ext uri="{FF2B5EF4-FFF2-40B4-BE49-F238E27FC236}">
+                <a16:creationId xmlns:a16="http://schemas.microsoft.com/office/drawing/2014/main" id="{18D845CC-924C-66A5-FB8D-9E0D4EF1223C}"/>
+              </a:ext>
+            </a:extLst>
+          </p:cNvPr>
+          <p:cNvSpPr>
+            <a:spLocks noGrp="1"/>
+          </p:cNvSpPr>
+          <p:nvPr>
+            <p:ph type="title"/>
+          </p:nvPr>
+        </p:nvSpPr>
+        <p:spPr>
+          <a:xfrm>
+            <a:off x="-178130" y="0"/>
+            <a:ext cx="3527961" cy="822407"/>
+          </a:xfrm>
+        </p:spPr>
+        <p:txBody>
+          <a:bodyPr>
+            <a:normAutofit/>
+          </a:bodyPr>
+          <a:lstStyle/>
+          <a:p>
+            <a:pPr algn="ctr"/>
+            <a:r>
+              <a:rPr lang="en-CH" sz="2000" dirty="0"/>
+              <a:t>Reprise kanban 28/01/26</a:t>
+            </a:r>
+          </a:p>
+        </p:txBody>
+      </p:sp>
+      <p:sp>
+        <p:nvSpPr>
+          <p:cNvPr id="4" name="TextBox 3">
+            <a:extLst>
+              <a:ext uri="{FF2B5EF4-FFF2-40B4-BE49-F238E27FC236}">
+                <a16:creationId xmlns:a16="http://schemas.microsoft.com/office/drawing/2014/main" id="{CFF6B6CC-B0D2-D82B-EFD7-D2A880EF3856}"/>
+              </a:ext>
+            </a:extLst>
+          </p:cNvPr>
+          <p:cNvSpPr txBox="1"/>
+          <p:nvPr/>
+        </p:nvSpPr>
+        <p:spPr>
+          <a:xfrm>
+            <a:off x="665019" y="1496291"/>
+            <a:ext cx="2218877" cy="4893647"/>
+          </a:xfrm>
+          <a:prstGeom prst="rect">
+            <a:avLst/>
+          </a:prstGeom>
+          <a:noFill/>
+        </p:spPr>
+        <p:txBody>
+          <a:bodyPr wrap="none" rtlCol="0">
+            <a:spAutoFit/>
+          </a:bodyPr>
+          <a:lstStyle/>
+          <a:p>
+            <a:r>
+              <a:rPr lang="en-CH" sz="800" dirty="0"/>
+              <a:t>IJO MUSI – JEU – TOTAL = 24</a:t>
+            </a:r>
+          </a:p>
+          <a:p>
+            <a:pPr marL="285750" indent="-285750">
+              <a:buFontTx/>
+              <a:buChar char="-"/>
+            </a:pPr>
+            <a:r>
+              <a:rPr lang="en-CH" sz="800" dirty="0"/>
+              <a:t>Assets TOTAL =  11</a:t>
+            </a:r>
+          </a:p>
+          <a:p>
+            <a:pPr marL="742950" lvl="1" indent="-285750">
+              <a:buFontTx/>
+              <a:buChar char="-"/>
+            </a:pPr>
+            <a:r>
+              <a:rPr lang="en-CH" sz="800" dirty="0"/>
+              <a:t>Squelette : 1</a:t>
+            </a:r>
+          </a:p>
+          <a:p>
+            <a:pPr marL="742950" lvl="1" indent="-285750">
+              <a:buFontTx/>
+              <a:buChar char="-"/>
+            </a:pPr>
+            <a:r>
+              <a:rPr lang="en-CH" sz="800" dirty="0"/>
+              <a:t>Crafting Room : 2</a:t>
+            </a:r>
+          </a:p>
+          <a:p>
+            <a:pPr marL="742950" lvl="1" indent="-285750">
+              <a:buFontTx/>
+              <a:buChar char="-"/>
+            </a:pPr>
+            <a:r>
+              <a:rPr lang="en-CH" sz="800" dirty="0"/>
+              <a:t>Pond : 1</a:t>
+            </a:r>
+          </a:p>
+          <a:p>
+            <a:pPr marL="742950" lvl="1" indent="-285750">
+              <a:buFontTx/>
+              <a:buChar char="-"/>
+            </a:pPr>
+            <a:r>
+              <a:rPr lang="en-CH" sz="800" dirty="0"/>
+              <a:t>Balcony : 2</a:t>
+            </a:r>
+          </a:p>
+          <a:p>
+            <a:pPr marL="742950" lvl="1" indent="-285750">
+              <a:buFontTx/>
+              <a:buChar char="-"/>
+            </a:pPr>
+            <a:r>
+              <a:rPr lang="en-CH" sz="800" dirty="0"/>
+              <a:t>Water &amp; Waterfall : 2</a:t>
+            </a:r>
+          </a:p>
+          <a:p>
+            <a:pPr marL="742950" lvl="1" indent="-285750">
+              <a:buFontTx/>
+              <a:buChar char="-"/>
+            </a:pPr>
+            <a:r>
+              <a:rPr lang="en-CH" sz="800" dirty="0"/>
+              <a:t>Stairs : 2</a:t>
+            </a:r>
+          </a:p>
+          <a:p>
+            <a:pPr marL="742950" lvl="1" indent="-285750">
+              <a:buFontTx/>
+              <a:buChar char="-"/>
+            </a:pPr>
+            <a:r>
+              <a:rPr lang="en-CH" sz="800" dirty="0"/>
+              <a:t>Textures : 1</a:t>
+            </a:r>
+          </a:p>
+          <a:p>
+            <a:pPr marL="285750" indent="-285750">
+              <a:buFontTx/>
+              <a:buChar char="-"/>
+            </a:pPr>
+            <a:r>
+              <a:rPr lang="en-CH" sz="800" dirty="0"/>
+              <a:t>Écriture TOTAL = 3</a:t>
+            </a:r>
+          </a:p>
+          <a:p>
+            <a:pPr marL="742950" lvl="1" indent="-285750">
+              <a:buFontTx/>
+              <a:buChar char="-"/>
+            </a:pPr>
+            <a:r>
+              <a:rPr lang="en-CH" sz="800" dirty="0"/>
+              <a:t>awakening</a:t>
+            </a:r>
+          </a:p>
+          <a:p>
+            <a:pPr marL="742950" lvl="1" indent="-285750">
+              <a:buFontTx/>
+              <a:buChar char="-"/>
+            </a:pPr>
+            <a:r>
+              <a:rPr lang="en-CH" sz="800" dirty="0"/>
+              <a:t>blame</a:t>
+            </a:r>
+          </a:p>
+          <a:p>
+            <a:pPr marL="742950" lvl="1" indent="-285750">
+              <a:buFontTx/>
+              <a:buChar char="-"/>
+            </a:pPr>
+            <a:r>
+              <a:rPr lang="en-CH" sz="800" dirty="0"/>
+              <a:t>confession</a:t>
+            </a:r>
+          </a:p>
+          <a:p>
+            <a:pPr marL="742950" lvl="1" indent="-285750">
+              <a:buFontTx/>
+              <a:buChar char="-"/>
+            </a:pPr>
+            <a:r>
+              <a:rPr lang="en-CH" sz="800" dirty="0"/>
+              <a:t>last moments</a:t>
+            </a:r>
+          </a:p>
+          <a:p>
+            <a:pPr marL="742950" lvl="1" indent="-285750">
+              <a:buFontTx/>
+              <a:buChar char="-"/>
+            </a:pPr>
+            <a:r>
+              <a:rPr lang="en-CH" sz="800" dirty="0"/>
+              <a:t>playing</a:t>
+            </a:r>
+          </a:p>
+          <a:p>
+            <a:pPr marL="742950" lvl="1" indent="-285750">
+              <a:buFontTx/>
+              <a:buChar char="-"/>
+            </a:pPr>
+            <a:r>
+              <a:rPr lang="en-CH" sz="800" dirty="0"/>
+              <a:t>plants</a:t>
+            </a:r>
+          </a:p>
+          <a:p>
+            <a:pPr marL="742950" lvl="1" indent="-285750">
+              <a:buFontTx/>
+              <a:buChar char="-"/>
+            </a:pPr>
+            <a:r>
+              <a:rPr lang="en-CH" sz="800" dirty="0"/>
+              <a:t>death</a:t>
+            </a:r>
+          </a:p>
+          <a:p>
+            <a:pPr marL="742950" lvl="1" indent="-285750">
+              <a:buFontTx/>
+              <a:buChar char="-"/>
+            </a:pPr>
+            <a:r>
+              <a:rPr lang="en-CH" sz="800" dirty="0"/>
+              <a:t>mural</a:t>
+            </a:r>
+          </a:p>
+          <a:p>
+            <a:pPr marL="285750" indent="-285750">
+              <a:buFontTx/>
+              <a:buChar char="-"/>
+            </a:pPr>
+            <a:r>
+              <a:rPr lang="en-CH" sz="800" dirty="0"/>
+              <a:t>Voix TOTAL = 4</a:t>
+            </a:r>
+          </a:p>
+          <a:p>
+            <a:pPr marL="742950" lvl="1" indent="-285750">
+              <a:buFontTx/>
+              <a:buChar char="-"/>
+            </a:pPr>
+            <a:r>
+              <a:rPr lang="en-CH" sz="800" dirty="0"/>
+              <a:t>awakening</a:t>
+            </a:r>
+          </a:p>
+          <a:p>
+            <a:pPr marL="742950" lvl="1" indent="-285750">
+              <a:buFontTx/>
+              <a:buChar char="-"/>
+            </a:pPr>
+            <a:r>
+              <a:rPr lang="en-CH" sz="800" dirty="0"/>
+              <a:t>blame</a:t>
+            </a:r>
+          </a:p>
+          <a:p>
+            <a:pPr marL="742950" lvl="1" indent="-285750">
+              <a:buFontTx/>
+              <a:buChar char="-"/>
+            </a:pPr>
+            <a:r>
+              <a:rPr lang="en-CH" sz="800" dirty="0"/>
+              <a:t>confession</a:t>
+            </a:r>
+          </a:p>
+          <a:p>
+            <a:pPr marL="742950" lvl="1" indent="-285750">
+              <a:buFontTx/>
+              <a:buChar char="-"/>
+            </a:pPr>
+            <a:r>
+              <a:rPr lang="en-CH" sz="800" dirty="0"/>
+              <a:t>last moments</a:t>
+            </a:r>
+          </a:p>
+          <a:p>
+            <a:pPr marL="742950" lvl="1" indent="-285750">
+              <a:buFontTx/>
+              <a:buChar char="-"/>
+            </a:pPr>
+            <a:r>
+              <a:rPr lang="en-CH" sz="800" dirty="0"/>
+              <a:t>playing</a:t>
+            </a:r>
+          </a:p>
+          <a:p>
+            <a:pPr marL="742950" lvl="1" indent="-285750">
+              <a:buFontTx/>
+              <a:buChar char="-"/>
+            </a:pPr>
+            <a:r>
+              <a:rPr lang="en-CH" sz="800" dirty="0"/>
+              <a:t>plants</a:t>
+            </a:r>
+          </a:p>
+          <a:p>
+            <a:pPr marL="742950" lvl="1" indent="-285750">
+              <a:buFontTx/>
+              <a:buChar char="-"/>
+            </a:pPr>
+            <a:r>
+              <a:rPr lang="en-CH" sz="800" dirty="0"/>
+              <a:t>death</a:t>
+            </a:r>
+          </a:p>
+          <a:p>
+            <a:pPr marL="742950" lvl="1" indent="-285750">
+              <a:buFontTx/>
+              <a:buChar char="-"/>
+            </a:pPr>
+            <a:r>
+              <a:rPr lang="en-CH" sz="800" dirty="0"/>
+              <a:t>mural</a:t>
+            </a:r>
+          </a:p>
+          <a:p>
+            <a:pPr marL="285750" indent="-285750">
+              <a:buFontTx/>
+              <a:buChar char="-"/>
+            </a:pPr>
+            <a:r>
+              <a:rPr lang="en-CH" sz="800" dirty="0"/>
+              <a:t>Sons TOTAL = 2</a:t>
+            </a:r>
+          </a:p>
+          <a:p>
+            <a:pPr marL="742950" lvl="1" indent="-285750">
+              <a:buFontTx/>
+              <a:buChar char="-"/>
+            </a:pPr>
+            <a:r>
+              <a:rPr lang="en-CH" sz="800" dirty="0"/>
+              <a:t>Pas</a:t>
+            </a:r>
+          </a:p>
+          <a:p>
+            <a:pPr marL="742950" lvl="1" indent="-285750">
+              <a:buFontTx/>
+              <a:buChar char="-"/>
+            </a:pPr>
+            <a:r>
+              <a:rPr lang="en-CH" sz="800" dirty="0"/>
+              <a:t>Eau</a:t>
+            </a:r>
+          </a:p>
+          <a:p>
+            <a:pPr marL="742950" lvl="1" indent="-285750">
+              <a:buFontTx/>
+              <a:buChar char="-"/>
+            </a:pPr>
+            <a:r>
+              <a:rPr lang="en-CH" sz="800" dirty="0"/>
+              <a:t>Toggle tablette</a:t>
+            </a:r>
+          </a:p>
+          <a:p>
+            <a:pPr marL="742950" lvl="1" indent="-285750">
+              <a:buFontTx/>
+              <a:buChar char="-"/>
+            </a:pPr>
+            <a:r>
+              <a:rPr lang="en-CH" sz="800" dirty="0"/>
+              <a:t>Feu</a:t>
+            </a:r>
+          </a:p>
+          <a:p>
+            <a:pPr marL="742950" lvl="1" indent="-285750">
+              <a:buFontTx/>
+              <a:buChar char="-"/>
+            </a:pPr>
+            <a:r>
+              <a:rPr lang="en-CH" sz="800" dirty="0"/>
+              <a:t>Ambiance (cf grotte minecraft)</a:t>
+            </a:r>
+          </a:p>
+          <a:p>
+            <a:pPr marL="742950" lvl="1" indent="-285750">
+              <a:buFontTx/>
+              <a:buChar char="-"/>
+            </a:pPr>
+            <a:r>
+              <a:rPr lang="en-CH" sz="800" dirty="0"/>
+              <a:t>Musiques</a:t>
+            </a:r>
+          </a:p>
+          <a:p>
+            <a:pPr marL="285750" indent="-285750">
+              <a:buFontTx/>
+              <a:buChar char="-"/>
+            </a:pPr>
+            <a:r>
+              <a:rPr lang="en-CH" sz="800" dirty="0"/>
+              <a:t>Tablette TOTAL = 2</a:t>
+            </a:r>
+          </a:p>
+          <a:p>
+            <a:pPr marL="742950" lvl="1" indent="-285750">
+              <a:buFontTx/>
+              <a:buChar char="-"/>
+            </a:pPr>
+            <a:r>
+              <a:rPr lang="en-CH" sz="800" dirty="0"/>
+              <a:t>Yellow</a:t>
+            </a:r>
+          </a:p>
+          <a:p>
+            <a:pPr marL="742950" lvl="1" indent="-285750">
+              <a:buFontTx/>
+              <a:buChar char="-"/>
+            </a:pPr>
+            <a:r>
+              <a:rPr lang="en-CH" sz="800" dirty="0"/>
+              <a:t>Red</a:t>
+            </a:r>
+          </a:p>
+          <a:p>
+            <a:pPr marL="742950" lvl="1" indent="-285750">
+              <a:buFontTx/>
+              <a:buChar char="-"/>
+            </a:pPr>
+            <a:r>
+              <a:rPr lang="en-CH" sz="800" dirty="0"/>
+              <a:t>Blue</a:t>
+            </a:r>
+          </a:p>
+          <a:p>
+            <a:pPr marL="285750" indent="-285750">
+              <a:buFontTx/>
+              <a:buChar char="-"/>
+            </a:pPr>
+            <a:r>
+              <a:rPr lang="en-CH" sz="800" dirty="0"/>
+              <a:t>Assemblage TOTAL = 2</a:t>
+            </a:r>
+          </a:p>
+        </p:txBody>
+      </p:sp>
+      <p:sp>
+        <p:nvSpPr>
+          <p:cNvPr id="5" name="TextBox 4">
+            <a:extLst>
+              <a:ext uri="{FF2B5EF4-FFF2-40B4-BE49-F238E27FC236}">
+                <a16:creationId xmlns:a16="http://schemas.microsoft.com/office/drawing/2014/main" id="{1FA91067-1903-72C9-5AEA-612EF3CE495E}"/>
+              </a:ext>
+            </a:extLst>
+          </p:cNvPr>
+          <p:cNvSpPr txBox="1"/>
+          <p:nvPr/>
+        </p:nvSpPr>
+        <p:spPr>
+          <a:xfrm>
+            <a:off x="6341424" y="468154"/>
+            <a:ext cx="1476686" cy="830997"/>
+          </a:xfrm>
+          <a:prstGeom prst="rect">
+            <a:avLst/>
+          </a:prstGeom>
+          <a:noFill/>
+        </p:spPr>
+        <p:txBody>
+          <a:bodyPr wrap="none" rtlCol="0">
+            <a:spAutoFit/>
+          </a:bodyPr>
+          <a:lstStyle/>
+          <a:p>
+            <a:r>
+              <a:rPr lang="en-CH" sz="800" dirty="0"/>
+              <a:t>AUTRES</a:t>
+            </a:r>
+          </a:p>
+          <a:p>
+            <a:pPr marL="285750" indent="-285750">
+              <a:buFontTx/>
+              <a:buChar char="-"/>
+            </a:pPr>
+            <a:r>
+              <a:rPr lang="en-CH" sz="800" dirty="0"/>
+              <a:t>Excel miam</a:t>
+            </a:r>
+          </a:p>
+          <a:p>
+            <a:pPr marL="285750" indent="-285750">
+              <a:buFontTx/>
+              <a:buChar char="-"/>
+            </a:pPr>
+            <a:r>
+              <a:rPr lang="en-CH" sz="800" dirty="0"/>
+              <a:t>Abo gare</a:t>
+            </a:r>
+          </a:p>
+          <a:p>
+            <a:pPr marL="285750" indent="-285750">
+              <a:buFontTx/>
+              <a:buChar char="-"/>
+            </a:pPr>
+            <a:r>
+              <a:rPr lang="en-CH" sz="800" dirty="0"/>
+              <a:t>Call banque – carte</a:t>
+            </a:r>
+          </a:p>
+          <a:p>
+            <a:pPr marL="285750" indent="-285750">
+              <a:buFontTx/>
+              <a:buChar char="-"/>
+            </a:pPr>
+            <a:r>
+              <a:rPr lang="en-CH" sz="800" dirty="0"/>
+              <a:t>Call banque – E-banking</a:t>
+            </a:r>
+          </a:p>
+          <a:p>
+            <a:pPr marL="285750" indent="-285750">
+              <a:buFontTx/>
+              <a:buChar char="-"/>
+            </a:pPr>
+            <a:endParaRPr lang="en-CH" sz="800" dirty="0"/>
+          </a:p>
+        </p:txBody>
+      </p:sp>
+      <p:sp>
+        <p:nvSpPr>
+          <p:cNvPr id="6" name="TextBox 5">
+            <a:extLst>
+              <a:ext uri="{FF2B5EF4-FFF2-40B4-BE49-F238E27FC236}">
+                <a16:creationId xmlns:a16="http://schemas.microsoft.com/office/drawing/2014/main" id="{3B04AFDD-DE59-BEF0-B01D-62624B365562}"/>
+              </a:ext>
+            </a:extLst>
+          </p:cNvPr>
+          <p:cNvSpPr txBox="1"/>
+          <p:nvPr/>
+        </p:nvSpPr>
+        <p:spPr>
+          <a:xfrm>
+            <a:off x="7666531" y="486889"/>
+            <a:ext cx="2316660" cy="707886"/>
+          </a:xfrm>
+          <a:prstGeom prst="rect">
+            <a:avLst/>
+          </a:prstGeom>
+          <a:noFill/>
+        </p:spPr>
+        <p:txBody>
+          <a:bodyPr wrap="none" rtlCol="0">
+            <a:spAutoFit/>
+          </a:bodyPr>
+          <a:lstStyle/>
+          <a:p>
+            <a:r>
+              <a:rPr lang="en-CH" sz="800" dirty="0"/>
+              <a:t>STAGES</a:t>
+            </a:r>
+          </a:p>
+          <a:p>
+            <a:pPr marL="285750" indent="-285750">
+              <a:buFontTx/>
+              <a:buChar char="-"/>
+            </a:pPr>
+            <a:r>
+              <a:rPr lang="en-CH" sz="800" dirty="0"/>
+              <a:t>Mail Yannick</a:t>
+            </a:r>
+          </a:p>
+          <a:p>
+            <a:pPr marL="742950" lvl="1" indent="-285750">
+              <a:buFontTx/>
+              <a:buChar char="-"/>
+            </a:pPr>
+            <a:r>
+              <a:rPr lang="en-CH" sz="800" dirty="0"/>
+              <a:t>Donner infos sur mes stages</a:t>
+            </a:r>
+          </a:p>
+          <a:p>
+            <a:pPr marL="742950" lvl="1" indent="-285750">
+              <a:buFontTx/>
+              <a:buChar char="-"/>
+            </a:pPr>
+            <a:r>
+              <a:rPr lang="en-CH" sz="800" dirty="0"/>
+              <a:t>Demander infos rapport de stage</a:t>
+            </a:r>
+          </a:p>
+          <a:p>
+            <a:pPr marL="742950" lvl="1" indent="-285750">
+              <a:buFontTx/>
+              <a:buChar char="-"/>
+            </a:pPr>
+            <a:r>
+              <a:rPr lang="en-CH" sz="800" dirty="0"/>
+              <a:t>Vérifier que tout est ok</a:t>
+            </a:r>
+          </a:p>
+        </p:txBody>
+      </p:sp>
+      <p:sp>
+        <p:nvSpPr>
+          <p:cNvPr id="7" name="TextBox 6">
+            <a:extLst>
+              <a:ext uri="{FF2B5EF4-FFF2-40B4-BE49-F238E27FC236}">
+                <a16:creationId xmlns:a16="http://schemas.microsoft.com/office/drawing/2014/main" id="{183D89C7-CFDC-3281-DED7-623E6797CED2}"/>
+              </a:ext>
+            </a:extLst>
+          </p:cNvPr>
+          <p:cNvSpPr txBox="1"/>
+          <p:nvPr/>
+        </p:nvSpPr>
+        <p:spPr>
+          <a:xfrm>
+            <a:off x="9999023" y="581892"/>
+            <a:ext cx="1117614" cy="461665"/>
+          </a:xfrm>
+          <a:prstGeom prst="rect">
+            <a:avLst/>
+          </a:prstGeom>
+          <a:noFill/>
+        </p:spPr>
+        <p:txBody>
+          <a:bodyPr wrap="none" rtlCol="0">
+            <a:spAutoFit/>
+          </a:bodyPr>
+          <a:lstStyle/>
+          <a:p>
+            <a:r>
+              <a:rPr lang="en-CH" sz="800" dirty="0"/>
+              <a:t>WEEKLY</a:t>
+            </a:r>
+          </a:p>
+          <a:p>
+            <a:pPr marL="285750" indent="-285750">
+              <a:buFontTx/>
+              <a:buChar char="-"/>
+            </a:pPr>
+            <a:r>
+              <a:rPr lang="en-CH" sz="800" dirty="0"/>
+              <a:t>Orga parent.e.s</a:t>
+            </a:r>
+          </a:p>
+          <a:p>
+            <a:pPr marL="285750" indent="-285750">
+              <a:buFontTx/>
+              <a:buChar char="-"/>
+            </a:pPr>
+            <a:r>
+              <a:rPr lang="en-CH" sz="800" dirty="0"/>
+              <a:t>Orga potes</a:t>
+            </a:r>
+          </a:p>
+        </p:txBody>
+      </p:sp>
+      <p:sp>
+        <p:nvSpPr>
+          <p:cNvPr id="8" name="TextBox 7">
+            <a:extLst>
+              <a:ext uri="{FF2B5EF4-FFF2-40B4-BE49-F238E27FC236}">
+                <a16:creationId xmlns:a16="http://schemas.microsoft.com/office/drawing/2014/main" id="{51156AC8-7F2B-DD8A-6E01-DCB51EFBF87B}"/>
+              </a:ext>
+            </a:extLst>
+          </p:cNvPr>
+          <p:cNvSpPr txBox="1"/>
+          <p:nvPr/>
+        </p:nvSpPr>
+        <p:spPr>
+          <a:xfrm>
+            <a:off x="2695699" y="1496290"/>
+            <a:ext cx="2624446" cy="1323439"/>
+          </a:xfrm>
+          <a:prstGeom prst="rect">
+            <a:avLst/>
+          </a:prstGeom>
+          <a:noFill/>
+        </p:spPr>
+        <p:txBody>
+          <a:bodyPr wrap="square" rtlCol="0">
+            <a:spAutoFit/>
+          </a:bodyPr>
+          <a:lstStyle/>
+          <a:p>
+            <a:r>
+              <a:rPr lang="en-CH" sz="800" dirty="0"/>
+              <a:t>IJO MUSI – RAPPORT – TOTAL = 12</a:t>
+            </a:r>
+          </a:p>
+          <a:p>
+            <a:pPr marL="285750" indent="-285750">
+              <a:buFontTx/>
+              <a:buChar char="-"/>
+            </a:pPr>
+            <a:r>
+              <a:rPr lang="en-CH" sz="800" dirty="0"/>
+              <a:t>Rassembler mes archives - 0</a:t>
+            </a:r>
+          </a:p>
+          <a:p>
+            <a:pPr marL="285750" indent="-285750">
+              <a:buFontTx/>
+              <a:buChar char="-"/>
+            </a:pPr>
+            <a:r>
+              <a:rPr lang="en-CH" sz="800" dirty="0"/>
+              <a:t>Trouver et lire 2-3 articles recherche-création (se concentrer sur la forme et méthode) (1)</a:t>
+            </a:r>
+          </a:p>
+          <a:p>
+            <a:pPr marL="285750" indent="-285750">
+              <a:buFontTx/>
+              <a:buChar char="-"/>
+            </a:pPr>
+            <a:r>
+              <a:rPr lang="en-CH" sz="800" dirty="0"/>
+              <a:t>Rassembler ludographie (0.5)</a:t>
+            </a:r>
+          </a:p>
+          <a:p>
+            <a:pPr marL="285750" indent="-285750">
+              <a:buFontTx/>
+              <a:buChar char="-"/>
+            </a:pPr>
+            <a:r>
+              <a:rPr lang="en-CH" sz="800" dirty="0"/>
+              <a:t>Rassembler bibliographie (3)</a:t>
+            </a:r>
+          </a:p>
+          <a:p>
+            <a:pPr marL="285750" indent="-285750">
+              <a:buFontTx/>
+              <a:buChar char="-"/>
+            </a:pPr>
+            <a:r>
+              <a:rPr lang="en-CH" sz="800" dirty="0"/>
+              <a:t>Définir structure du rapport (0.5)</a:t>
+            </a:r>
+          </a:p>
+          <a:p>
+            <a:pPr marL="285750" indent="-285750">
+              <a:buFontTx/>
+              <a:buChar char="-"/>
+            </a:pPr>
+            <a:r>
+              <a:rPr lang="en-CH" sz="800" dirty="0"/>
+              <a:t>Écriture (5)</a:t>
+            </a:r>
+          </a:p>
+          <a:p>
+            <a:pPr marL="285750" indent="-285750">
+              <a:buFontTx/>
+              <a:buChar char="-"/>
+            </a:pPr>
+            <a:r>
+              <a:rPr lang="en-CH" sz="800" dirty="0"/>
+              <a:t>Présentation (2)</a:t>
+            </a:r>
+          </a:p>
+          <a:p>
+            <a:endParaRPr lang="en-CH" sz="800" dirty="0"/>
+          </a:p>
+        </p:txBody>
+      </p:sp>
+      <p:sp>
+        <p:nvSpPr>
+          <p:cNvPr id="9" name="TextBox 8">
+            <a:extLst>
+              <a:ext uri="{FF2B5EF4-FFF2-40B4-BE49-F238E27FC236}">
+                <a16:creationId xmlns:a16="http://schemas.microsoft.com/office/drawing/2014/main" id="{4B37C839-BE49-89D9-3829-9A59E7C27625}"/>
+              </a:ext>
+            </a:extLst>
+          </p:cNvPr>
+          <p:cNvSpPr txBox="1"/>
+          <p:nvPr/>
+        </p:nvSpPr>
+        <p:spPr>
+          <a:xfrm>
+            <a:off x="7600209" y="0"/>
+            <a:ext cx="4475777" cy="369332"/>
+          </a:xfrm>
+          <a:prstGeom prst="rect">
+            <a:avLst/>
+          </a:prstGeom>
+          <a:noFill/>
+        </p:spPr>
+        <p:txBody>
+          <a:bodyPr wrap="none" rtlCol="0">
+            <a:spAutoFit/>
+          </a:bodyPr>
+          <a:lstStyle/>
+          <a:p>
+            <a:r>
+              <a:rPr lang="en-CH" dirty="0"/>
+              <a:t>Trucs à mettre sur kanban mais pas à planifier</a:t>
+            </a:r>
+          </a:p>
+        </p:txBody>
+      </p:sp>
+      <p:sp>
+        <p:nvSpPr>
+          <p:cNvPr id="10" name="TextBox 9">
+            <a:extLst>
+              <a:ext uri="{FF2B5EF4-FFF2-40B4-BE49-F238E27FC236}">
+                <a16:creationId xmlns:a16="http://schemas.microsoft.com/office/drawing/2014/main" id="{541BA0F0-A9C9-1EA7-0840-5E5E8F74146F}"/>
+              </a:ext>
+            </a:extLst>
+          </p:cNvPr>
+          <p:cNvSpPr txBox="1"/>
+          <p:nvPr/>
+        </p:nvSpPr>
+        <p:spPr>
+          <a:xfrm>
+            <a:off x="2624446" y="3087584"/>
+            <a:ext cx="4540858" cy="369332"/>
+          </a:xfrm>
+          <a:prstGeom prst="rect">
+            <a:avLst/>
+          </a:prstGeom>
+          <a:noFill/>
+        </p:spPr>
+        <p:txBody>
+          <a:bodyPr wrap="none" rtlCol="0">
+            <a:spAutoFit/>
+          </a:bodyPr>
+          <a:lstStyle/>
+          <a:p>
+            <a:r>
+              <a:rPr lang="en-CH" dirty="0"/>
+              <a:t>VISU – SCATERPLOT UNIQUEMENT – TOTAL = 3</a:t>
+            </a:r>
+          </a:p>
+        </p:txBody>
+      </p:sp>
+      <p:sp>
+        <p:nvSpPr>
+          <p:cNvPr id="11" name="TextBox 10">
+            <a:extLst>
+              <a:ext uri="{FF2B5EF4-FFF2-40B4-BE49-F238E27FC236}">
+                <a16:creationId xmlns:a16="http://schemas.microsoft.com/office/drawing/2014/main" id="{7253A949-CCB5-97BA-857F-C49CA81616F9}"/>
+              </a:ext>
+            </a:extLst>
+          </p:cNvPr>
+          <p:cNvSpPr txBox="1"/>
+          <p:nvPr/>
+        </p:nvSpPr>
+        <p:spPr>
+          <a:xfrm>
+            <a:off x="2743200" y="3633850"/>
+            <a:ext cx="1886478" cy="369332"/>
+          </a:xfrm>
+          <a:prstGeom prst="rect">
+            <a:avLst/>
+          </a:prstGeom>
+          <a:noFill/>
+        </p:spPr>
+        <p:txBody>
+          <a:bodyPr wrap="none" rtlCol="0">
+            <a:spAutoFit/>
+          </a:bodyPr>
+          <a:lstStyle/>
+          <a:p>
+            <a:r>
+              <a:rPr lang="en-CH" dirty="0"/>
+              <a:t>PHILO – TOTAL = 6</a:t>
+            </a:r>
+          </a:p>
+        </p:txBody>
+      </p:sp>
+      <p:sp>
+        <p:nvSpPr>
+          <p:cNvPr id="12" name="TextBox 11">
+            <a:extLst>
+              <a:ext uri="{FF2B5EF4-FFF2-40B4-BE49-F238E27FC236}">
+                <a16:creationId xmlns:a16="http://schemas.microsoft.com/office/drawing/2014/main" id="{9F5350B9-AF69-F0A0-0583-3DBA0C34439E}"/>
+              </a:ext>
+            </a:extLst>
+          </p:cNvPr>
+          <p:cNvSpPr txBox="1"/>
+          <p:nvPr/>
+        </p:nvSpPr>
+        <p:spPr>
+          <a:xfrm>
+            <a:off x="3408218" y="4595750"/>
+            <a:ext cx="3059556" cy="1477328"/>
+          </a:xfrm>
+          <a:prstGeom prst="rect">
+            <a:avLst/>
+          </a:prstGeom>
+          <a:noFill/>
+        </p:spPr>
+        <p:txBody>
+          <a:bodyPr wrap="none" rtlCol="0">
+            <a:spAutoFit/>
+          </a:bodyPr>
+          <a:lstStyle/>
+          <a:p>
+            <a:r>
+              <a:rPr lang="en-CH" dirty="0"/>
+              <a:t>MÉMOIRE – 1 semestre</a:t>
+            </a:r>
+          </a:p>
+          <a:p>
+            <a:r>
+              <a:rPr lang="en-CH" dirty="0"/>
+              <a:t>début : 14 septembre 26</a:t>
+            </a:r>
+          </a:p>
+          <a:p>
+            <a:r>
+              <a:rPr lang="en-CH" dirty="0"/>
+              <a:t>fin des cours : 18 décembre 26</a:t>
+            </a:r>
+          </a:p>
+          <a:p>
+            <a:r>
+              <a:rPr lang="en-CH" dirty="0"/>
+              <a:t>début examens : 15 janvier 26</a:t>
+            </a:r>
+          </a:p>
+          <a:p>
+            <a:r>
+              <a:rPr lang="en-CH" dirty="0"/>
+              <a:t> fin examnes : 6 février 26</a:t>
+            </a:r>
+          </a:p>
+        </p:txBody>
+      </p:sp>
+      <p:sp>
+        <p:nvSpPr>
+          <p:cNvPr id="13" name="TextBox 12">
+            <a:extLst>
+              <a:ext uri="{FF2B5EF4-FFF2-40B4-BE49-F238E27FC236}">
+                <a16:creationId xmlns:a16="http://schemas.microsoft.com/office/drawing/2014/main" id="{C313FFE6-3F73-118D-1960-82049E609467}"/>
+              </a:ext>
+            </a:extLst>
+          </p:cNvPr>
+          <p:cNvSpPr txBox="1"/>
+          <p:nvPr/>
+        </p:nvSpPr>
+        <p:spPr>
+          <a:xfrm>
+            <a:off x="8348353" y="2553195"/>
+            <a:ext cx="2510816" cy="369332"/>
+          </a:xfrm>
+          <a:prstGeom prst="rect">
+            <a:avLst/>
+          </a:prstGeom>
+          <a:noFill/>
+        </p:spPr>
+        <p:txBody>
+          <a:bodyPr wrap="none" rtlCol="0">
+            <a:spAutoFit/>
+          </a:bodyPr>
+          <a:lstStyle/>
+          <a:p>
+            <a:r>
+              <a:rPr lang="en-CH" dirty="0"/>
+              <a:t>SPEC – CIRA - TOTAL = 30</a:t>
+            </a:r>
+          </a:p>
+        </p:txBody>
+      </p:sp>
+      <p:sp>
+        <p:nvSpPr>
+          <p:cNvPr id="14" name="TextBox 13">
+            <a:extLst>
+              <a:ext uri="{FF2B5EF4-FFF2-40B4-BE49-F238E27FC236}">
+                <a16:creationId xmlns:a16="http://schemas.microsoft.com/office/drawing/2014/main" id="{79E51229-0B9D-991A-48BB-42DD54AA332F}"/>
+              </a:ext>
+            </a:extLst>
+          </p:cNvPr>
+          <p:cNvSpPr txBox="1"/>
+          <p:nvPr/>
+        </p:nvSpPr>
+        <p:spPr>
+          <a:xfrm>
+            <a:off x="8170224" y="3301340"/>
+            <a:ext cx="3446969" cy="369332"/>
+          </a:xfrm>
+          <a:prstGeom prst="rect">
+            <a:avLst/>
+          </a:prstGeom>
+          <a:noFill/>
+        </p:spPr>
+        <p:txBody>
+          <a:bodyPr wrap="none" rtlCol="0">
+            <a:spAutoFit/>
+          </a:bodyPr>
+          <a:lstStyle/>
+          <a:p>
+            <a:r>
+              <a:rPr lang="en-CH" dirty="0"/>
+              <a:t>STAGES – DamaDama – TOTAL = 15</a:t>
+            </a:r>
+          </a:p>
+        </p:txBody>
+      </p:sp>
+      <p:sp>
+        <p:nvSpPr>
+          <p:cNvPr id="15" name="TextBox 14">
+            <a:extLst>
+              <a:ext uri="{FF2B5EF4-FFF2-40B4-BE49-F238E27FC236}">
+                <a16:creationId xmlns:a16="http://schemas.microsoft.com/office/drawing/2014/main" id="{831E5750-3A96-13A8-4A01-8C221B068534}"/>
+              </a:ext>
+            </a:extLst>
+          </p:cNvPr>
+          <p:cNvSpPr txBox="1"/>
+          <p:nvPr/>
+        </p:nvSpPr>
+        <p:spPr>
+          <a:xfrm>
+            <a:off x="8156370" y="3928753"/>
+            <a:ext cx="3131563" cy="369332"/>
+          </a:xfrm>
+          <a:prstGeom prst="rect">
+            <a:avLst/>
+          </a:prstGeom>
+          <a:noFill/>
+        </p:spPr>
+        <p:txBody>
+          <a:bodyPr wrap="none" rtlCol="0">
+            <a:spAutoFit/>
+          </a:bodyPr>
+          <a:lstStyle/>
+          <a:p>
+            <a:r>
+              <a:rPr lang="en-CH" dirty="0"/>
+              <a:t>STAGES – Naraven – TOTAL = 15</a:t>
+            </a:r>
+          </a:p>
+        </p:txBody>
+      </p:sp>
+      <p:sp>
+        <p:nvSpPr>
+          <p:cNvPr id="16" name="TextBox 15">
+            <a:extLst>
+              <a:ext uri="{FF2B5EF4-FFF2-40B4-BE49-F238E27FC236}">
+                <a16:creationId xmlns:a16="http://schemas.microsoft.com/office/drawing/2014/main" id="{9D7B72F6-2CAE-A18F-1EF6-79EB2D94581F}"/>
+              </a:ext>
+            </a:extLst>
+          </p:cNvPr>
+          <p:cNvSpPr txBox="1"/>
+          <p:nvPr/>
+        </p:nvSpPr>
+        <p:spPr>
+          <a:xfrm>
+            <a:off x="8154391" y="4520540"/>
+            <a:ext cx="3424720" cy="369332"/>
+          </a:xfrm>
+          <a:prstGeom prst="rect">
+            <a:avLst/>
+          </a:prstGeom>
+          <a:noFill/>
+        </p:spPr>
+        <p:txBody>
+          <a:bodyPr wrap="none" rtlCol="0">
+            <a:spAutoFit/>
+          </a:bodyPr>
+          <a:lstStyle/>
+          <a:p>
+            <a:r>
+              <a:rPr lang="en-CH" dirty="0"/>
+              <a:t>STAGES – Sémaphore – TOTAL = 20</a:t>
+            </a:r>
+          </a:p>
+        </p:txBody>
+      </p:sp>
+      <p:sp>
+        <p:nvSpPr>
+          <p:cNvPr id="17" name="TextBox 16">
+            <a:extLst>
+              <a:ext uri="{FF2B5EF4-FFF2-40B4-BE49-F238E27FC236}">
+                <a16:creationId xmlns:a16="http://schemas.microsoft.com/office/drawing/2014/main" id="{D373D3DA-FDCC-C74A-7C9B-685F25ACDD05}"/>
+              </a:ext>
+            </a:extLst>
+          </p:cNvPr>
+          <p:cNvSpPr txBox="1"/>
+          <p:nvPr/>
+        </p:nvSpPr>
+        <p:spPr>
+          <a:xfrm>
+            <a:off x="7872413" y="1843088"/>
+            <a:ext cx="2956194" cy="369332"/>
+          </a:xfrm>
+          <a:prstGeom prst="rect">
+            <a:avLst/>
+          </a:prstGeom>
+          <a:noFill/>
+        </p:spPr>
+        <p:txBody>
+          <a:bodyPr wrap="none" rtlCol="0">
+            <a:spAutoFit/>
+          </a:bodyPr>
+          <a:lstStyle/>
+          <a:p>
+            <a:r>
+              <a:rPr lang="en-CH" dirty="0"/>
+              <a:t>SPEC – “COURS” – TOTAL = 17</a:t>
+            </a:r>
+          </a:p>
+        </p:txBody>
+      </p:sp>
+    </p:spTree>
+    <p:extLst>
+      <p:ext uri="{BB962C8B-B14F-4D97-AF65-F5344CB8AC3E}">
+        <p14:creationId xmlns:p14="http://schemas.microsoft.com/office/powerpoint/2010/main" val="3950103843"/>
+      </p:ext>
+    </p:extLst>
+  </p:cSld>
+  <p:clrMapOvr>
+    <a:masterClrMapping/>
+  </p:clrMapOvr>
+</p:sld>
+</file>
+
+<file path=ppt/slides/slide4.xml><?xml version="1.0" encoding="utf-8"?>
+<p:sld xmlns:a="http://schemas.openxmlformats.org/drawingml/2006/main" xmlns:r="http://schemas.openxmlformats.org/officeDocument/2006/relationships" xmlns:p="http://schemas.openxmlformats.org/presentationml/2006/main">
+  <p:cSld>
+    <p:spTree>
+      <p:nvGrpSpPr>
+        <p:cNvPr id="1" name=""/>
+        <p:cNvGrpSpPr/>
+        <p:nvPr/>
+      </p:nvGrpSpPr>
+      <p:grpSpPr>
+        <a:xfrm>
+          <a:off x="0" y="0"/>
+          <a:ext cx="0" cy="0"/>
+          <a:chOff x="0" y="0"/>
+          <a:chExt cx="0" cy="0"/>
+        </a:xfrm>
+      </p:grpSpPr>
+      <p:graphicFrame>
+        <p:nvGraphicFramePr>
+          <p:cNvPr id="4" name="Table 4">
+            <a:extLst>
+              <a:ext uri="{FF2B5EF4-FFF2-40B4-BE49-F238E27FC236}">
+                <a16:creationId xmlns:a16="http://schemas.microsoft.com/office/drawing/2014/main" id="{0CBEBCE2-FDE3-8B49-FE37-6FFC8AD24F62}"/>
+              </a:ext>
+            </a:extLst>
+          </p:cNvPr>
+          <p:cNvGraphicFramePr>
+            <a:graphicFrameLocks noGrp="1"/>
+          </p:cNvGraphicFramePr>
+          <p:nvPr>
+            <p:ph idx="1"/>
+            <p:extLst>
+              <p:ext uri="{D42A27DB-BD31-4B8C-83A1-F6EECF244321}">
+                <p14:modId xmlns:p14="http://schemas.microsoft.com/office/powerpoint/2010/main" val="1840187752"/>
+              </p:ext>
+            </p:extLst>
+          </p:nvPr>
+        </p:nvGraphicFramePr>
+        <p:xfrm>
+          <a:off x="128587" y="1868487"/>
+          <a:ext cx="11849103" cy="1752600"/>
+        </p:xfrm>
+        <a:graphic>
+          <a:graphicData uri="http://schemas.openxmlformats.org/drawingml/2006/table">
+            <a:tbl>
+              <a:tblPr firstRow="1" bandRow="1">
+                <a:tableStyleId>{5C22544A-7EE6-4342-B048-85BDC9FD1C3A}</a:tableStyleId>
+              </a:tblPr>
+              <a:tblGrid>
+                <a:gridCol w="1316567">
+                  <a:extLst>
+                    <a:ext uri="{9D8B030D-6E8A-4147-A177-3AD203B41FA5}">
+                      <a16:colId xmlns:a16="http://schemas.microsoft.com/office/drawing/2014/main" val="4059797125"/>
+                    </a:ext>
+                  </a:extLst>
+                </a:gridCol>
+                <a:gridCol w="1316567">
+                  <a:extLst>
+                    <a:ext uri="{9D8B030D-6E8A-4147-A177-3AD203B41FA5}">
+                      <a16:colId xmlns:a16="http://schemas.microsoft.com/office/drawing/2014/main" val="3886050130"/>
+                    </a:ext>
+                  </a:extLst>
+                </a:gridCol>
+                <a:gridCol w="1316567">
+                  <a:extLst>
+                    <a:ext uri="{9D8B030D-6E8A-4147-A177-3AD203B41FA5}">
+                      <a16:colId xmlns:a16="http://schemas.microsoft.com/office/drawing/2014/main" val="1508651909"/>
+                    </a:ext>
+                  </a:extLst>
+                </a:gridCol>
+                <a:gridCol w="1316567">
+                  <a:extLst>
+                    <a:ext uri="{9D8B030D-6E8A-4147-A177-3AD203B41FA5}">
+                      <a16:colId xmlns:a16="http://schemas.microsoft.com/office/drawing/2014/main" val="2062040089"/>
+                    </a:ext>
+                  </a:extLst>
+                </a:gridCol>
+                <a:gridCol w="1316567">
+                  <a:extLst>
+                    <a:ext uri="{9D8B030D-6E8A-4147-A177-3AD203B41FA5}">
+                      <a16:colId xmlns:a16="http://schemas.microsoft.com/office/drawing/2014/main" val="2737023149"/>
+                    </a:ext>
+                  </a:extLst>
+                </a:gridCol>
+                <a:gridCol w="1316567">
+                  <a:extLst>
+                    <a:ext uri="{9D8B030D-6E8A-4147-A177-3AD203B41FA5}">
+                      <a16:colId xmlns:a16="http://schemas.microsoft.com/office/drawing/2014/main" val="3887682633"/>
+                    </a:ext>
+                  </a:extLst>
+                </a:gridCol>
+                <a:gridCol w="1316567">
+                  <a:extLst>
+                    <a:ext uri="{9D8B030D-6E8A-4147-A177-3AD203B41FA5}">
+                      <a16:colId xmlns:a16="http://schemas.microsoft.com/office/drawing/2014/main" val="5628773"/>
+                    </a:ext>
+                  </a:extLst>
+                </a:gridCol>
+                <a:gridCol w="1316567">
+                  <a:extLst>
+                    <a:ext uri="{9D8B030D-6E8A-4147-A177-3AD203B41FA5}">
+                      <a16:colId xmlns:a16="http://schemas.microsoft.com/office/drawing/2014/main" val="1453961281"/>
+                    </a:ext>
+                  </a:extLst>
+                </a:gridCol>
+                <a:gridCol w="1316567">
+                  <a:extLst>
+                    <a:ext uri="{9D8B030D-6E8A-4147-A177-3AD203B41FA5}">
+                      <a16:colId xmlns:a16="http://schemas.microsoft.com/office/drawing/2014/main" val="1068511216"/>
+                    </a:ext>
+                  </a:extLst>
+                </a:gridCol>
+              </a:tblGrid>
+              <a:tr h="370840">
+                <a:tc>
+                  <a:txBody>
+                    <a:bodyPr/>
+                    <a:lstStyle/>
+                    <a:p>
+                      <a:pPr algn="ctr"/>
+                      <a:r>
+                        <a:rPr lang="en-CH" dirty="0"/>
+                        <a:t>JANVIER</a:t>
+                      </a:r>
+                    </a:p>
+                  </a:txBody>
+                  <a:tcPr/>
+                </a:tc>
+                <a:tc>
+                  <a:txBody>
+                    <a:bodyPr/>
+                    <a:lstStyle/>
+                    <a:p>
+                      <a:pPr algn="ctr"/>
+                      <a:r>
+                        <a:rPr lang="en-CH" dirty="0"/>
+                        <a:t>FÉVRIER</a:t>
+                      </a:r>
+                    </a:p>
+                  </a:txBody>
+                  <a:tcPr/>
+                </a:tc>
+                <a:tc>
+                  <a:txBody>
+                    <a:bodyPr/>
+                    <a:lstStyle/>
+                    <a:p>
+                      <a:pPr algn="ctr"/>
+                      <a:r>
+                        <a:rPr lang="en-CH" dirty="0"/>
+                        <a:t>MARS</a:t>
+                      </a:r>
+                    </a:p>
+                  </a:txBody>
+                  <a:tcPr/>
+                </a:tc>
+                <a:tc>
+                  <a:txBody>
+                    <a:bodyPr/>
+                    <a:lstStyle/>
+                    <a:p>
+                      <a:pPr algn="ctr"/>
+                      <a:r>
+                        <a:rPr lang="en-CH" dirty="0"/>
+                        <a:t>AVRIL</a:t>
+                      </a:r>
+                    </a:p>
+                  </a:txBody>
+                  <a:tcPr/>
+                </a:tc>
+                <a:tc>
+                  <a:txBody>
+                    <a:bodyPr/>
+                    <a:lstStyle/>
+                    <a:p>
+                      <a:pPr algn="ctr"/>
+                      <a:r>
+                        <a:rPr lang="en-CH" dirty="0"/>
+                        <a:t>MAI</a:t>
+                      </a:r>
+                    </a:p>
+                  </a:txBody>
+                  <a:tcPr/>
+                </a:tc>
+                <a:tc>
+                  <a:txBody>
+                    <a:bodyPr/>
+                    <a:lstStyle/>
+                    <a:p>
+                      <a:pPr algn="ctr"/>
+                      <a:r>
+                        <a:rPr lang="en-CH" dirty="0"/>
+                        <a:t>JUIN</a:t>
+                      </a:r>
+                    </a:p>
+                  </a:txBody>
+                  <a:tcPr/>
+                </a:tc>
+                <a:tc>
+                  <a:txBody>
+                    <a:bodyPr/>
+                    <a:lstStyle/>
+                    <a:p>
+                      <a:pPr algn="ctr"/>
+                      <a:r>
+                        <a:rPr lang="en-CH" dirty="0"/>
+                        <a:t>JUILLET</a:t>
+                      </a:r>
+                    </a:p>
+                  </a:txBody>
+                  <a:tcPr/>
+                </a:tc>
+                <a:tc>
+                  <a:txBody>
+                    <a:bodyPr/>
+                    <a:lstStyle/>
+                    <a:p>
+                      <a:pPr algn="ctr"/>
+                      <a:r>
+                        <a:rPr lang="en-CH" dirty="0"/>
+                        <a:t>AOÛT</a:t>
+                      </a:r>
+                    </a:p>
+                  </a:txBody>
+                  <a:tcPr/>
+                </a:tc>
+                <a:tc>
+                  <a:txBody>
+                    <a:bodyPr/>
+                    <a:lstStyle/>
+                    <a:p>
+                      <a:pPr algn="ctr"/>
+                      <a:r>
+                        <a:rPr lang="en-CH" dirty="0"/>
+                        <a:t>SEPTEMBRE</a:t>
+                      </a:r>
+                    </a:p>
+                  </a:txBody>
+                  <a:tcPr/>
+                </a:tc>
+                <a:extLst>
+                  <a:ext uri="{0D108BD9-81ED-4DB2-BD59-A6C34878D82A}">
+                    <a16:rowId xmlns:a16="http://schemas.microsoft.com/office/drawing/2014/main" val="1345547146"/>
+                  </a:ext>
+                </a:extLst>
+              </a:tr>
+              <a:tr h="370840">
+                <a:tc>
+                  <a:txBody>
+                    <a:bodyPr/>
+                    <a:lstStyle/>
+                    <a:p>
+                      <a:pPr algn="ctr"/>
+                      <a:r>
+                        <a:rPr lang="en-CH" dirty="0"/>
+                        <a:t>2</a:t>
+                      </a:r>
+                    </a:p>
+                  </a:txBody>
+                  <a:tcPr/>
+                </a:tc>
+                <a:tc>
+                  <a:txBody>
+                    <a:bodyPr/>
+                    <a:lstStyle/>
+                    <a:p>
+                      <a:pPr algn="ctr"/>
+                      <a:r>
+                        <a:rPr lang="en-CH" dirty="0"/>
+                        <a:t>10</a:t>
+                      </a:r>
+                    </a:p>
+                  </a:txBody>
+                  <a:tcPr/>
+                </a:tc>
+                <a:tc>
+                  <a:txBody>
+                    <a:bodyPr/>
+                    <a:lstStyle/>
+                    <a:p>
+                      <a:pPr algn="ctr"/>
+                      <a:r>
+                        <a:rPr lang="en-CH" dirty="0"/>
+                        <a:t>17</a:t>
+                      </a:r>
+                    </a:p>
+                  </a:txBody>
+                  <a:tcPr/>
+                </a:tc>
+                <a:tc>
+                  <a:txBody>
+                    <a:bodyPr/>
+                    <a:lstStyle/>
+                    <a:p>
+                      <a:pPr algn="ctr"/>
+                      <a:r>
+                        <a:rPr lang="en-CH" dirty="0"/>
+                        <a:t>22</a:t>
+                      </a:r>
+                    </a:p>
+                  </a:txBody>
+                  <a:tcPr/>
+                </a:tc>
+                <a:tc>
+                  <a:txBody>
+                    <a:bodyPr/>
+                    <a:lstStyle/>
+                    <a:p>
+                      <a:pPr algn="ctr"/>
+                      <a:r>
+                        <a:rPr lang="en-CH" dirty="0"/>
+                        <a:t>21</a:t>
+                      </a:r>
+                    </a:p>
+                  </a:txBody>
+                  <a:tcPr/>
+                </a:tc>
+                <a:tc>
+                  <a:txBody>
+                    <a:bodyPr/>
+                    <a:lstStyle/>
+                    <a:p>
+                      <a:pPr algn="ctr"/>
+                      <a:r>
+                        <a:rPr lang="en-CH" dirty="0"/>
+                        <a:t>18</a:t>
+                      </a:r>
+                    </a:p>
+                  </a:txBody>
+                  <a:tcPr/>
+                </a:tc>
+                <a:tc>
+                  <a:txBody>
+                    <a:bodyPr/>
+                    <a:lstStyle/>
+                    <a:p>
+                      <a:pPr algn="ctr"/>
+                      <a:r>
+                        <a:rPr lang="en-CH" dirty="0"/>
+                        <a:t>18</a:t>
+                      </a:r>
+                    </a:p>
+                  </a:txBody>
+                  <a:tcPr/>
+                </a:tc>
+                <a:tc>
+                  <a:txBody>
+                    <a:bodyPr/>
+                    <a:lstStyle/>
+                    <a:p>
+                      <a:pPr algn="ctr"/>
+                      <a:r>
+                        <a:rPr lang="en-CH" dirty="0"/>
+                        <a:t>17</a:t>
+                      </a:r>
+                    </a:p>
+                  </a:txBody>
+                  <a:tcPr/>
+                </a:tc>
+                <a:tc>
+                  <a:txBody>
+                    <a:bodyPr/>
+                    <a:lstStyle/>
+                    <a:p>
+                      <a:pPr algn="ctr"/>
+                      <a:r>
+                        <a:rPr lang="en-CH" dirty="0"/>
+                        <a:t>7</a:t>
+                      </a:r>
+                    </a:p>
+                  </a:txBody>
+                  <a:tcPr/>
+                </a:tc>
+                <a:extLst>
+                  <a:ext uri="{0D108BD9-81ED-4DB2-BD59-A6C34878D82A}">
+                    <a16:rowId xmlns:a16="http://schemas.microsoft.com/office/drawing/2014/main" val="1502607584"/>
+                  </a:ext>
+                </a:extLst>
+              </a:tr>
+              <a:tr h="370840">
+                <a:tc>
+                  <a:txBody>
+                    <a:bodyPr/>
+                    <a:lstStyle/>
+                    <a:p>
+                      <a:pPr algn="ctr"/>
+                      <a:r>
+                        <a:rPr lang="en-CH" dirty="0"/>
+                        <a:t>0</a:t>
+                      </a:r>
+                    </a:p>
+                  </a:txBody>
+                  <a:tcPr/>
+                </a:tc>
+                <a:tc>
+                  <a:txBody>
+                    <a:bodyPr/>
+                    <a:lstStyle/>
+                    <a:p>
+                      <a:pPr algn="ctr"/>
+                      <a:r>
+                        <a:rPr lang="en-CH" dirty="0"/>
+                        <a:t>0</a:t>
+                      </a:r>
+                    </a:p>
+                  </a:txBody>
+                  <a:tcPr/>
+                </a:tc>
+                <a:tc>
+                  <a:txBody>
+                    <a:bodyPr/>
+                    <a:lstStyle/>
+                    <a:p>
+                      <a:pPr algn="ctr"/>
+                      <a:r>
+                        <a:rPr lang="en-CH" dirty="0"/>
+                        <a:t>0</a:t>
+                      </a:r>
+                    </a:p>
+                  </a:txBody>
+                  <a:tcPr/>
+                </a:tc>
+                <a:tc>
+                  <a:txBody>
+                    <a:bodyPr/>
+                    <a:lstStyle/>
+                    <a:p>
+                      <a:pPr algn="ctr"/>
+                      <a:r>
+                        <a:rPr lang="en-CH" dirty="0"/>
+                        <a:t>15</a:t>
+                      </a:r>
+                    </a:p>
+                  </a:txBody>
+                  <a:tcPr/>
+                </a:tc>
+                <a:tc>
+                  <a:txBody>
+                    <a:bodyPr/>
+                    <a:lstStyle/>
+                    <a:p>
+                      <a:pPr algn="ctr"/>
+                      <a:r>
+                        <a:rPr lang="en-CH" dirty="0"/>
+                        <a:t>21</a:t>
+                      </a:r>
+                    </a:p>
+                  </a:txBody>
+                  <a:tcPr/>
+                </a:tc>
+                <a:tc>
+                  <a:txBody>
+                    <a:bodyPr/>
+                    <a:lstStyle/>
+                    <a:p>
+                      <a:pPr algn="ctr"/>
+                      <a:r>
+                        <a:rPr lang="en-CH" dirty="0"/>
+                        <a:t>18</a:t>
+                      </a:r>
+                    </a:p>
+                  </a:txBody>
+                  <a:tcPr/>
+                </a:tc>
+                <a:tc>
+                  <a:txBody>
+                    <a:bodyPr/>
+                    <a:lstStyle/>
+                    <a:p>
+                      <a:pPr algn="ctr"/>
+                      <a:r>
+                        <a:rPr lang="en-CH" dirty="0"/>
+                        <a:t>18</a:t>
+                      </a:r>
+                    </a:p>
+                  </a:txBody>
+                  <a:tcPr/>
+                </a:tc>
+                <a:tc>
+                  <a:txBody>
+                    <a:bodyPr/>
+                    <a:lstStyle/>
+                    <a:p>
+                      <a:pPr algn="ctr"/>
+                      <a:r>
+                        <a:rPr lang="en-CH" dirty="0"/>
+                        <a:t>17</a:t>
+                      </a:r>
+                    </a:p>
+                  </a:txBody>
+                  <a:tcPr/>
+                </a:tc>
+                <a:tc>
+                  <a:txBody>
+                    <a:bodyPr/>
+                    <a:lstStyle/>
+                    <a:p>
+                      <a:pPr algn="ctr"/>
+                      <a:r>
+                        <a:rPr lang="en-CH" dirty="0"/>
+                        <a:t>7</a:t>
+                      </a:r>
+                    </a:p>
+                  </a:txBody>
+                  <a:tcPr/>
+                </a:tc>
+                <a:extLst>
+                  <a:ext uri="{0D108BD9-81ED-4DB2-BD59-A6C34878D82A}">
+                    <a16:rowId xmlns:a16="http://schemas.microsoft.com/office/drawing/2014/main" val="577881736"/>
+                  </a:ext>
+                </a:extLst>
+              </a:tr>
+              <a:tr h="370840">
+                <a:tc>
+                  <a:txBody>
+                    <a:bodyPr/>
+                    <a:lstStyle/>
+                    <a:p>
+                      <a:pPr algn="ctr"/>
+                      <a:r>
+                        <a:rPr lang="fr-CH" dirty="0"/>
+                        <a:t>IJO MUSI (2)</a:t>
+                      </a:r>
+                      <a:endParaRPr lang="en-CH" dirty="0"/>
+                    </a:p>
+                  </a:txBody>
+                  <a:tcPr/>
+                </a:tc>
+                <a:tc>
+                  <a:txBody>
+                    <a:bodyPr/>
+                    <a:lstStyle/>
+                    <a:p>
+                      <a:pPr algn="ctr"/>
+                      <a:r>
+                        <a:rPr lang="fr-CH" dirty="0"/>
+                        <a:t>IJO MUSI (10)</a:t>
+                      </a:r>
+                      <a:endParaRPr lang="en-CH" dirty="0"/>
+                    </a:p>
+                  </a:txBody>
+                  <a:tcPr/>
+                </a:tc>
+                <a:tc>
+                  <a:txBody>
+                    <a:bodyPr/>
+                    <a:lstStyle/>
+                    <a:p>
+                      <a:pPr algn="ctr"/>
+                      <a:r>
+                        <a:rPr lang="fr-CH" dirty="0"/>
+                        <a:t>IJO MUSI (17)</a:t>
+                      </a:r>
+                      <a:endParaRPr lang="en-CH" dirty="0"/>
+                    </a:p>
+                  </a:txBody>
+                  <a:tcPr/>
+                </a:tc>
+                <a:tc>
+                  <a:txBody>
+                    <a:bodyPr/>
+                    <a:lstStyle/>
+                    <a:p>
+                      <a:pPr algn="ctr"/>
+                      <a:r>
+                        <a:rPr lang="en-CH" dirty="0"/>
+                        <a:t>IJO MUSI (7)</a:t>
+                      </a:r>
+                    </a:p>
+                  </a:txBody>
+                  <a:tcPr/>
+                </a:tc>
+                <a:tc>
+                  <a:txBody>
+                    <a:bodyPr/>
+                    <a:lstStyle/>
+                    <a:p>
+                      <a:pPr algn="ctr"/>
+                      <a:endParaRPr lang="en-CH" dirty="0"/>
+                    </a:p>
+                  </a:txBody>
+                  <a:tcPr/>
+                </a:tc>
+                <a:tc>
+                  <a:txBody>
+                    <a:bodyPr/>
+                    <a:lstStyle/>
+                    <a:p>
+                      <a:pPr algn="ctr"/>
+                      <a:endParaRPr lang="en-CH" dirty="0"/>
+                    </a:p>
+                  </a:txBody>
+                  <a:tcPr/>
+                </a:tc>
+                <a:tc>
+                  <a:txBody>
+                    <a:bodyPr/>
+                    <a:lstStyle/>
+                    <a:p>
+                      <a:pPr algn="ctr"/>
+                      <a:endParaRPr lang="en-CH" dirty="0"/>
+                    </a:p>
+                  </a:txBody>
+                  <a:tcPr/>
+                </a:tc>
+                <a:tc>
+                  <a:txBody>
+                    <a:bodyPr/>
+                    <a:lstStyle/>
+                    <a:p>
+                      <a:pPr algn="ctr"/>
+                      <a:endParaRPr lang="en-CH" dirty="0"/>
+                    </a:p>
+                  </a:txBody>
+                  <a:tcPr/>
+                </a:tc>
+                <a:tc>
+                  <a:txBody>
+                    <a:bodyPr/>
+                    <a:lstStyle/>
+                    <a:p>
+                      <a:pPr algn="ctr"/>
+                      <a:endParaRPr lang="en-CH" dirty="0"/>
+                    </a:p>
+                  </a:txBody>
+                  <a:tcPr/>
+                </a:tc>
+                <a:extLst>
+                  <a:ext uri="{0D108BD9-81ED-4DB2-BD59-A6C34878D82A}">
+                    <a16:rowId xmlns:a16="http://schemas.microsoft.com/office/drawing/2014/main" val="2217367681"/>
+                  </a:ext>
+                </a:extLst>
+              </a:tr>
+            </a:tbl>
+          </a:graphicData>
+        </a:graphic>
+      </p:graphicFrame>
+      <p:sp>
+        <p:nvSpPr>
+          <p:cNvPr id="6" name="TextBox 5">
+            <a:extLst>
+              <a:ext uri="{FF2B5EF4-FFF2-40B4-BE49-F238E27FC236}">
+                <a16:creationId xmlns:a16="http://schemas.microsoft.com/office/drawing/2014/main" id="{9AEDAF53-4A96-CF91-4D5D-7DD7B9C51327}"/>
+              </a:ext>
+            </a:extLst>
+          </p:cNvPr>
+          <p:cNvSpPr txBox="1"/>
+          <p:nvPr/>
+        </p:nvSpPr>
+        <p:spPr>
+          <a:xfrm>
+            <a:off x="4857750" y="771526"/>
+            <a:ext cx="3575851" cy="369332"/>
+          </a:xfrm>
+          <a:prstGeom prst="rect">
+            <a:avLst/>
+          </a:prstGeom>
+          <a:noFill/>
+        </p:spPr>
+        <p:txBody>
+          <a:bodyPr wrap="none" rtlCol="0">
+            <a:spAutoFit/>
+          </a:bodyPr>
+          <a:lstStyle/>
+          <a:p>
+            <a:r>
+              <a:rPr lang="en-CH" dirty="0"/>
+              <a:t>Total (stages déjà attrribués) = 132 ?</a:t>
+            </a:r>
+          </a:p>
+        </p:txBody>
+      </p:sp>
+    </p:spTree>
+    <p:extLst>
+      <p:ext uri="{BB962C8B-B14F-4D97-AF65-F5344CB8AC3E}">
+        <p14:creationId xmlns:p14="http://schemas.microsoft.com/office/powerpoint/2010/main" val="1947291370"/>
+      </p:ext>
+    </p:extLst>
+  </p:cSld>
+  <p:clrMapOvr>
+    <a:masterClrMapping/>
+  </p:clrMapOvr>
+</p:sld>
+</file>
+
 <file path=ppt/theme/theme1.xml><?xml version="1.0" encoding="utf-8"?>
 <a:theme xmlns:a="http://schemas.openxmlformats.org/drawingml/2006/main" name="Office Theme">
   <a:themeElements>

--- a/Planning/Planning.pptx
+++ b/Planning/Planning.pptx
@@ -9,6 +9,10 @@
     <p:sldId id="257" r:id="rId3"/>
     <p:sldId id="258" r:id="rId4"/>
     <p:sldId id="259" r:id="rId5"/>
+    <p:sldId id="260" r:id="rId6"/>
+    <p:sldId id="261" r:id="rId7"/>
+    <p:sldId id="262" r:id="rId8"/>
+    <p:sldId id="263" r:id="rId9"/>
   </p:sldIdLst>
   <p:sldSz cx="12192000" cy="6858000"/>
   <p:notesSz cx="6858000" cy="9144000"/>
@@ -264,7 +268,7 @@
           <a:p>
             <a:fld id="{6D2B2F1D-2A3F-1D4E-839C-7A968445D62F}" type="datetimeFigureOut">
               <a:rPr lang="en-CH" smtClean="0"/>
-              <a:t>19.01.2026</a:t>
+              <a:t>03.04.2026</a:t>
             </a:fld>
             <a:endParaRPr lang="en-CH"/>
           </a:p>
@@ -464,7 +468,7 @@
           <a:p>
             <a:fld id="{6D2B2F1D-2A3F-1D4E-839C-7A968445D62F}" type="datetimeFigureOut">
               <a:rPr lang="en-CH" smtClean="0"/>
-              <a:t>19.01.2026</a:t>
+              <a:t>03.04.2026</a:t>
             </a:fld>
             <a:endParaRPr lang="en-CH"/>
           </a:p>
@@ -674,7 +678,7 @@
           <a:p>
             <a:fld id="{6D2B2F1D-2A3F-1D4E-839C-7A968445D62F}" type="datetimeFigureOut">
               <a:rPr lang="en-CH" smtClean="0"/>
-              <a:t>19.01.2026</a:t>
+              <a:t>03.04.2026</a:t>
             </a:fld>
             <a:endParaRPr lang="en-CH"/>
           </a:p>
@@ -874,7 +878,7 @@
           <a:p>
             <a:fld id="{6D2B2F1D-2A3F-1D4E-839C-7A968445D62F}" type="datetimeFigureOut">
               <a:rPr lang="en-CH" smtClean="0"/>
-              <a:t>19.01.2026</a:t>
+              <a:t>03.04.2026</a:t>
             </a:fld>
             <a:endParaRPr lang="en-CH"/>
           </a:p>
@@ -1150,7 +1154,7 @@
           <a:p>
             <a:fld id="{6D2B2F1D-2A3F-1D4E-839C-7A968445D62F}" type="datetimeFigureOut">
               <a:rPr lang="en-CH" smtClean="0"/>
-              <a:t>19.01.2026</a:t>
+              <a:t>03.04.2026</a:t>
             </a:fld>
             <a:endParaRPr lang="en-CH"/>
           </a:p>
@@ -1418,7 +1422,7 @@
           <a:p>
             <a:fld id="{6D2B2F1D-2A3F-1D4E-839C-7A968445D62F}" type="datetimeFigureOut">
               <a:rPr lang="en-CH" smtClean="0"/>
-              <a:t>19.01.2026</a:t>
+              <a:t>03.04.2026</a:t>
             </a:fld>
             <a:endParaRPr lang="en-CH"/>
           </a:p>
@@ -1833,7 +1837,7 @@
           <a:p>
             <a:fld id="{6D2B2F1D-2A3F-1D4E-839C-7A968445D62F}" type="datetimeFigureOut">
               <a:rPr lang="en-CH" smtClean="0"/>
-              <a:t>19.01.2026</a:t>
+              <a:t>03.04.2026</a:t>
             </a:fld>
             <a:endParaRPr lang="en-CH"/>
           </a:p>
@@ -1975,7 +1979,7 @@
           <a:p>
             <a:fld id="{6D2B2F1D-2A3F-1D4E-839C-7A968445D62F}" type="datetimeFigureOut">
               <a:rPr lang="en-CH" smtClean="0"/>
-              <a:t>19.01.2026</a:t>
+              <a:t>03.04.2026</a:t>
             </a:fld>
             <a:endParaRPr lang="en-CH"/>
           </a:p>
@@ -2088,7 +2092,7 @@
           <a:p>
             <a:fld id="{6D2B2F1D-2A3F-1D4E-839C-7A968445D62F}" type="datetimeFigureOut">
               <a:rPr lang="en-CH" smtClean="0"/>
-              <a:t>19.01.2026</a:t>
+              <a:t>03.04.2026</a:t>
             </a:fld>
             <a:endParaRPr lang="en-CH"/>
           </a:p>
@@ -2401,7 +2405,7 @@
           <a:p>
             <a:fld id="{6D2B2F1D-2A3F-1D4E-839C-7A968445D62F}" type="datetimeFigureOut">
               <a:rPr lang="en-CH" smtClean="0"/>
-              <a:t>19.01.2026</a:t>
+              <a:t>03.04.2026</a:t>
             </a:fld>
             <a:endParaRPr lang="en-CH"/>
           </a:p>
@@ -2690,7 +2694,7 @@
           <a:p>
             <a:fld id="{6D2B2F1D-2A3F-1D4E-839C-7A968445D62F}" type="datetimeFigureOut">
               <a:rPr lang="en-CH" smtClean="0"/>
-              <a:t>19.01.2026</a:t>
+              <a:t>03.04.2026</a:t>
             </a:fld>
             <a:endParaRPr lang="en-CH"/>
           </a:p>
@@ -2933,7 +2937,7 @@
           <a:p>
             <a:fld id="{6D2B2F1D-2A3F-1D4E-839C-7A968445D62F}" type="datetimeFigureOut">
               <a:rPr lang="en-CH" smtClean="0"/>
-              <a:t>19.01.2026</a:t>
+              <a:t>03.04.2026</a:t>
             </a:fld>
             <a:endParaRPr lang="en-CH"/>
           </a:p>
@@ -4811,7 +4815,13 @@
           <a:lstStyle/>
           <a:p>
             <a:r>
-              <a:rPr lang="en-CH" sz="800" dirty="0"/>
+              <a:rPr lang="en-CH" sz="800" dirty="0">
+                <a:solidFill>
+                  <a:schemeClr val="accent6">
+                    <a:lumMod val="75000"/>
+                  </a:schemeClr>
+                </a:solidFill>
+              </a:rPr>
               <a:t>IJO MUSI – JEU – TOTAL = 24</a:t>
             </a:r>
           </a:p>
@@ -4821,7 +4831,13 @@
               <a:buChar char="-"/>
             </a:pPr>
             <a:r>
-              <a:rPr lang="en-CH" sz="800" dirty="0"/>
+              <a:rPr lang="en-CH" sz="800" dirty="0">
+                <a:solidFill>
+                  <a:schemeClr val="accent6">
+                    <a:lumMod val="75000"/>
+                  </a:schemeClr>
+                </a:solidFill>
+              </a:rPr>
               <a:t>Assets TOTAL =  11</a:t>
             </a:r>
           </a:p>
@@ -4831,7 +4847,13 @@
               <a:buChar char="-"/>
             </a:pPr>
             <a:r>
-              <a:rPr lang="en-CH" sz="800" dirty="0"/>
+              <a:rPr lang="en-CH" sz="800" dirty="0">
+                <a:solidFill>
+                  <a:schemeClr val="accent6">
+                    <a:lumMod val="75000"/>
+                  </a:schemeClr>
+                </a:solidFill>
+              </a:rPr>
               <a:t>Squelette : 1</a:t>
             </a:r>
           </a:p>
@@ -4841,7 +4863,13 @@
               <a:buChar char="-"/>
             </a:pPr>
             <a:r>
-              <a:rPr lang="en-CH" sz="800" dirty="0"/>
+              <a:rPr lang="en-CH" sz="800" dirty="0">
+                <a:solidFill>
+                  <a:schemeClr val="accent6">
+                    <a:lumMod val="75000"/>
+                  </a:schemeClr>
+                </a:solidFill>
+              </a:rPr>
               <a:t>Crafting Room : 2</a:t>
             </a:r>
           </a:p>
@@ -4851,7 +4879,13 @@
               <a:buChar char="-"/>
             </a:pPr>
             <a:r>
-              <a:rPr lang="en-CH" sz="800" dirty="0"/>
+              <a:rPr lang="en-CH" sz="800" dirty="0">
+                <a:solidFill>
+                  <a:schemeClr val="accent6">
+                    <a:lumMod val="75000"/>
+                  </a:schemeClr>
+                </a:solidFill>
+              </a:rPr>
               <a:t>Pond : 1</a:t>
             </a:r>
           </a:p>
@@ -4861,7 +4895,13 @@
               <a:buChar char="-"/>
             </a:pPr>
             <a:r>
-              <a:rPr lang="en-CH" sz="800" dirty="0"/>
+              <a:rPr lang="en-CH" sz="800" dirty="0">
+                <a:solidFill>
+                  <a:schemeClr val="accent6">
+                    <a:lumMod val="75000"/>
+                  </a:schemeClr>
+                </a:solidFill>
+              </a:rPr>
               <a:t>Balcony : 2</a:t>
             </a:r>
           </a:p>
@@ -4871,7 +4911,13 @@
               <a:buChar char="-"/>
             </a:pPr>
             <a:r>
-              <a:rPr lang="en-CH" sz="800" dirty="0"/>
+              <a:rPr lang="en-CH" sz="800" dirty="0">
+                <a:solidFill>
+                  <a:schemeClr val="accent6">
+                    <a:lumMod val="75000"/>
+                  </a:schemeClr>
+                </a:solidFill>
+              </a:rPr>
               <a:t>Water &amp; Waterfall : 2</a:t>
             </a:r>
           </a:p>
@@ -4881,7 +4927,13 @@
               <a:buChar char="-"/>
             </a:pPr>
             <a:r>
-              <a:rPr lang="en-CH" sz="800" dirty="0"/>
+              <a:rPr lang="en-CH" sz="800" dirty="0">
+                <a:solidFill>
+                  <a:schemeClr val="accent6">
+                    <a:lumMod val="75000"/>
+                  </a:schemeClr>
+                </a:solidFill>
+              </a:rPr>
               <a:t>Stairs : 2</a:t>
             </a:r>
           </a:p>
@@ -4891,7 +4943,13 @@
               <a:buChar char="-"/>
             </a:pPr>
             <a:r>
-              <a:rPr lang="en-CH" sz="800" dirty="0"/>
+              <a:rPr lang="en-CH" sz="800" dirty="0">
+                <a:solidFill>
+                  <a:schemeClr val="accent6">
+                    <a:lumMod val="75000"/>
+                  </a:schemeClr>
+                </a:solidFill>
+              </a:rPr>
               <a:t>Textures : 1</a:t>
             </a:r>
           </a:p>
@@ -4901,7 +4959,13 @@
               <a:buChar char="-"/>
             </a:pPr>
             <a:r>
-              <a:rPr lang="en-CH" sz="800" dirty="0"/>
+              <a:rPr lang="en-CH" sz="800" dirty="0">
+                <a:solidFill>
+                  <a:schemeClr val="accent6">
+                    <a:lumMod val="75000"/>
+                  </a:schemeClr>
+                </a:solidFill>
+              </a:rPr>
               <a:t>Écriture TOTAL = 3</a:t>
             </a:r>
           </a:p>
@@ -4911,7 +4975,13 @@
               <a:buChar char="-"/>
             </a:pPr>
             <a:r>
-              <a:rPr lang="en-CH" sz="800" dirty="0"/>
+              <a:rPr lang="en-CH" sz="800" dirty="0">
+                <a:solidFill>
+                  <a:schemeClr val="accent6">
+                    <a:lumMod val="75000"/>
+                  </a:schemeClr>
+                </a:solidFill>
+              </a:rPr>
               <a:t>awakening</a:t>
             </a:r>
           </a:p>
@@ -4921,7 +4991,13 @@
               <a:buChar char="-"/>
             </a:pPr>
             <a:r>
-              <a:rPr lang="en-CH" sz="800" dirty="0"/>
+              <a:rPr lang="en-CH" sz="800" dirty="0">
+                <a:solidFill>
+                  <a:schemeClr val="accent6">
+                    <a:lumMod val="75000"/>
+                  </a:schemeClr>
+                </a:solidFill>
+              </a:rPr>
               <a:t>blame</a:t>
             </a:r>
           </a:p>
@@ -4931,7 +5007,13 @@
               <a:buChar char="-"/>
             </a:pPr>
             <a:r>
-              <a:rPr lang="en-CH" sz="800" dirty="0"/>
+              <a:rPr lang="en-CH" sz="800" dirty="0">
+                <a:solidFill>
+                  <a:schemeClr val="accent6">
+                    <a:lumMod val="75000"/>
+                  </a:schemeClr>
+                </a:solidFill>
+              </a:rPr>
               <a:t>confession</a:t>
             </a:r>
           </a:p>
@@ -4941,7 +5023,13 @@
               <a:buChar char="-"/>
             </a:pPr>
             <a:r>
-              <a:rPr lang="en-CH" sz="800" dirty="0"/>
+              <a:rPr lang="en-CH" sz="800" dirty="0">
+                <a:solidFill>
+                  <a:schemeClr val="accent6">
+                    <a:lumMod val="75000"/>
+                  </a:schemeClr>
+                </a:solidFill>
+              </a:rPr>
               <a:t>last moments</a:t>
             </a:r>
           </a:p>
@@ -4951,7 +5039,13 @@
               <a:buChar char="-"/>
             </a:pPr>
             <a:r>
-              <a:rPr lang="en-CH" sz="800" dirty="0"/>
+              <a:rPr lang="en-CH" sz="800" dirty="0">
+                <a:solidFill>
+                  <a:schemeClr val="accent6">
+                    <a:lumMod val="75000"/>
+                  </a:schemeClr>
+                </a:solidFill>
+              </a:rPr>
               <a:t>playing</a:t>
             </a:r>
           </a:p>
@@ -4961,7 +5055,13 @@
               <a:buChar char="-"/>
             </a:pPr>
             <a:r>
-              <a:rPr lang="en-CH" sz="800" dirty="0"/>
+              <a:rPr lang="en-CH" sz="800" dirty="0">
+                <a:solidFill>
+                  <a:schemeClr val="accent6">
+                    <a:lumMod val="75000"/>
+                  </a:schemeClr>
+                </a:solidFill>
+              </a:rPr>
               <a:t>plants</a:t>
             </a:r>
           </a:p>
@@ -4971,7 +5071,13 @@
               <a:buChar char="-"/>
             </a:pPr>
             <a:r>
-              <a:rPr lang="en-CH" sz="800" dirty="0"/>
+              <a:rPr lang="en-CH" sz="800" dirty="0">
+                <a:solidFill>
+                  <a:schemeClr val="accent6">
+                    <a:lumMod val="75000"/>
+                  </a:schemeClr>
+                </a:solidFill>
+              </a:rPr>
               <a:t>death</a:t>
             </a:r>
           </a:p>
@@ -4981,7 +5087,13 @@
               <a:buChar char="-"/>
             </a:pPr>
             <a:r>
-              <a:rPr lang="en-CH" sz="800" dirty="0"/>
+              <a:rPr lang="en-CH" sz="800" dirty="0">
+                <a:solidFill>
+                  <a:schemeClr val="accent6">
+                    <a:lumMod val="75000"/>
+                  </a:schemeClr>
+                </a:solidFill>
+              </a:rPr>
               <a:t>mural</a:t>
             </a:r>
           </a:p>
@@ -4991,7 +5103,13 @@
               <a:buChar char="-"/>
             </a:pPr>
             <a:r>
-              <a:rPr lang="en-CH" sz="800" dirty="0"/>
+              <a:rPr lang="en-CH" sz="800" dirty="0">
+                <a:solidFill>
+                  <a:schemeClr val="accent6">
+                    <a:lumMod val="75000"/>
+                  </a:schemeClr>
+                </a:solidFill>
+              </a:rPr>
               <a:t>Voix TOTAL = 4</a:t>
             </a:r>
           </a:p>
@@ -5001,7 +5119,13 @@
               <a:buChar char="-"/>
             </a:pPr>
             <a:r>
-              <a:rPr lang="en-CH" sz="800" dirty="0"/>
+              <a:rPr lang="en-CH" sz="800" dirty="0">
+                <a:solidFill>
+                  <a:schemeClr val="accent6">
+                    <a:lumMod val="75000"/>
+                  </a:schemeClr>
+                </a:solidFill>
+              </a:rPr>
               <a:t>awakening</a:t>
             </a:r>
           </a:p>
@@ -5011,7 +5135,13 @@
               <a:buChar char="-"/>
             </a:pPr>
             <a:r>
-              <a:rPr lang="en-CH" sz="800" dirty="0"/>
+              <a:rPr lang="en-CH" sz="800" dirty="0">
+                <a:solidFill>
+                  <a:schemeClr val="accent6">
+                    <a:lumMod val="75000"/>
+                  </a:schemeClr>
+                </a:solidFill>
+              </a:rPr>
               <a:t>blame</a:t>
             </a:r>
           </a:p>
@@ -5021,7 +5151,13 @@
               <a:buChar char="-"/>
             </a:pPr>
             <a:r>
-              <a:rPr lang="en-CH" sz="800" dirty="0"/>
+              <a:rPr lang="en-CH" sz="800" dirty="0">
+                <a:solidFill>
+                  <a:schemeClr val="accent6">
+                    <a:lumMod val="75000"/>
+                  </a:schemeClr>
+                </a:solidFill>
+              </a:rPr>
               <a:t>confession</a:t>
             </a:r>
           </a:p>
@@ -5031,7 +5167,13 @@
               <a:buChar char="-"/>
             </a:pPr>
             <a:r>
-              <a:rPr lang="en-CH" sz="800" dirty="0"/>
+              <a:rPr lang="en-CH" sz="800" dirty="0">
+                <a:solidFill>
+                  <a:schemeClr val="accent6">
+                    <a:lumMod val="75000"/>
+                  </a:schemeClr>
+                </a:solidFill>
+              </a:rPr>
               <a:t>last moments</a:t>
             </a:r>
           </a:p>
@@ -5041,7 +5183,13 @@
               <a:buChar char="-"/>
             </a:pPr>
             <a:r>
-              <a:rPr lang="en-CH" sz="800" dirty="0"/>
+              <a:rPr lang="en-CH" sz="800" dirty="0">
+                <a:solidFill>
+                  <a:schemeClr val="accent6">
+                    <a:lumMod val="75000"/>
+                  </a:schemeClr>
+                </a:solidFill>
+              </a:rPr>
               <a:t>playing</a:t>
             </a:r>
           </a:p>
@@ -5051,7 +5199,13 @@
               <a:buChar char="-"/>
             </a:pPr>
             <a:r>
-              <a:rPr lang="en-CH" sz="800" dirty="0"/>
+              <a:rPr lang="en-CH" sz="800" dirty="0">
+                <a:solidFill>
+                  <a:schemeClr val="accent6">
+                    <a:lumMod val="75000"/>
+                  </a:schemeClr>
+                </a:solidFill>
+              </a:rPr>
               <a:t>plants</a:t>
             </a:r>
           </a:p>
@@ -5061,7 +5215,13 @@
               <a:buChar char="-"/>
             </a:pPr>
             <a:r>
-              <a:rPr lang="en-CH" sz="800" dirty="0"/>
+              <a:rPr lang="en-CH" sz="800" dirty="0">
+                <a:solidFill>
+                  <a:schemeClr val="accent6">
+                    <a:lumMod val="75000"/>
+                  </a:schemeClr>
+                </a:solidFill>
+              </a:rPr>
               <a:t>death</a:t>
             </a:r>
           </a:p>
@@ -5071,7 +5231,13 @@
               <a:buChar char="-"/>
             </a:pPr>
             <a:r>
-              <a:rPr lang="en-CH" sz="800" dirty="0"/>
+              <a:rPr lang="en-CH" sz="800" dirty="0">
+                <a:solidFill>
+                  <a:schemeClr val="accent6">
+                    <a:lumMod val="75000"/>
+                  </a:schemeClr>
+                </a:solidFill>
+              </a:rPr>
               <a:t>mural</a:t>
             </a:r>
           </a:p>
@@ -5081,7 +5247,13 @@
               <a:buChar char="-"/>
             </a:pPr>
             <a:r>
-              <a:rPr lang="en-CH" sz="800" dirty="0"/>
+              <a:rPr lang="en-CH" sz="800" dirty="0">
+                <a:solidFill>
+                  <a:schemeClr val="accent6">
+                    <a:lumMod val="75000"/>
+                  </a:schemeClr>
+                </a:solidFill>
+              </a:rPr>
               <a:t>Sons TOTAL = 2</a:t>
             </a:r>
           </a:p>
@@ -5091,7 +5263,13 @@
               <a:buChar char="-"/>
             </a:pPr>
             <a:r>
-              <a:rPr lang="en-CH" sz="800" dirty="0"/>
+              <a:rPr lang="en-CH" sz="800" dirty="0">
+                <a:solidFill>
+                  <a:schemeClr val="accent6">
+                    <a:lumMod val="75000"/>
+                  </a:schemeClr>
+                </a:solidFill>
+              </a:rPr>
               <a:t>Pas</a:t>
             </a:r>
           </a:p>
@@ -5101,7 +5279,13 @@
               <a:buChar char="-"/>
             </a:pPr>
             <a:r>
-              <a:rPr lang="en-CH" sz="800" dirty="0"/>
+              <a:rPr lang="en-CH" sz="800" dirty="0">
+                <a:solidFill>
+                  <a:schemeClr val="accent6">
+                    <a:lumMod val="75000"/>
+                  </a:schemeClr>
+                </a:solidFill>
+              </a:rPr>
               <a:t>Eau</a:t>
             </a:r>
           </a:p>
@@ -5111,7 +5295,13 @@
               <a:buChar char="-"/>
             </a:pPr>
             <a:r>
-              <a:rPr lang="en-CH" sz="800" dirty="0"/>
+              <a:rPr lang="en-CH" sz="800" dirty="0">
+                <a:solidFill>
+                  <a:schemeClr val="accent6">
+                    <a:lumMod val="75000"/>
+                  </a:schemeClr>
+                </a:solidFill>
+              </a:rPr>
               <a:t>Toggle tablette</a:t>
             </a:r>
           </a:p>
@@ -5121,7 +5311,13 @@
               <a:buChar char="-"/>
             </a:pPr>
             <a:r>
-              <a:rPr lang="en-CH" sz="800" dirty="0"/>
+              <a:rPr lang="en-CH" sz="800" dirty="0">
+                <a:solidFill>
+                  <a:schemeClr val="accent6">
+                    <a:lumMod val="75000"/>
+                  </a:schemeClr>
+                </a:solidFill>
+              </a:rPr>
               <a:t>Feu</a:t>
             </a:r>
           </a:p>
@@ -5131,7 +5327,13 @@
               <a:buChar char="-"/>
             </a:pPr>
             <a:r>
-              <a:rPr lang="en-CH" sz="800" dirty="0"/>
+              <a:rPr lang="en-CH" sz="800" dirty="0">
+                <a:solidFill>
+                  <a:schemeClr val="accent6">
+                    <a:lumMod val="75000"/>
+                  </a:schemeClr>
+                </a:solidFill>
+              </a:rPr>
               <a:t>Ambiance (cf grotte minecraft)</a:t>
             </a:r>
           </a:p>
@@ -5141,7 +5343,13 @@
               <a:buChar char="-"/>
             </a:pPr>
             <a:r>
-              <a:rPr lang="en-CH" sz="800" dirty="0"/>
+              <a:rPr lang="en-CH" sz="800" dirty="0">
+                <a:solidFill>
+                  <a:schemeClr val="accent6">
+                    <a:lumMod val="75000"/>
+                  </a:schemeClr>
+                </a:solidFill>
+              </a:rPr>
               <a:t>Musiques</a:t>
             </a:r>
           </a:p>
@@ -5151,7 +5359,13 @@
               <a:buChar char="-"/>
             </a:pPr>
             <a:r>
-              <a:rPr lang="en-CH" sz="800" dirty="0"/>
+              <a:rPr lang="en-CH" sz="800" dirty="0">
+                <a:solidFill>
+                  <a:schemeClr val="accent6">
+                    <a:lumMod val="75000"/>
+                  </a:schemeClr>
+                </a:solidFill>
+              </a:rPr>
               <a:t>Tablette TOTAL = 2</a:t>
             </a:r>
           </a:p>
@@ -5161,7 +5375,13 @@
               <a:buChar char="-"/>
             </a:pPr>
             <a:r>
-              <a:rPr lang="en-CH" sz="800" dirty="0"/>
+              <a:rPr lang="en-CH" sz="800" dirty="0">
+                <a:solidFill>
+                  <a:schemeClr val="accent6">
+                    <a:lumMod val="75000"/>
+                  </a:schemeClr>
+                </a:solidFill>
+              </a:rPr>
               <a:t>Yellow</a:t>
             </a:r>
           </a:p>
@@ -5171,7 +5391,13 @@
               <a:buChar char="-"/>
             </a:pPr>
             <a:r>
-              <a:rPr lang="en-CH" sz="800" dirty="0"/>
+              <a:rPr lang="en-CH" sz="800" dirty="0">
+                <a:solidFill>
+                  <a:schemeClr val="accent6">
+                    <a:lumMod val="75000"/>
+                  </a:schemeClr>
+                </a:solidFill>
+              </a:rPr>
               <a:t>Red</a:t>
             </a:r>
           </a:p>
@@ -5181,7 +5407,13 @@
               <a:buChar char="-"/>
             </a:pPr>
             <a:r>
-              <a:rPr lang="en-CH" sz="800" dirty="0"/>
+              <a:rPr lang="en-CH" sz="800" dirty="0">
+                <a:solidFill>
+                  <a:schemeClr val="accent6">
+                    <a:lumMod val="75000"/>
+                  </a:schemeClr>
+                </a:solidFill>
+              </a:rPr>
               <a:t>Blue</a:t>
             </a:r>
           </a:p>
@@ -5191,7 +5423,13 @@
               <a:buChar char="-"/>
             </a:pPr>
             <a:r>
-              <a:rPr lang="en-CH" sz="800" dirty="0"/>
+              <a:rPr lang="en-CH" sz="800" dirty="0">
+                <a:solidFill>
+                  <a:schemeClr val="accent6">
+                    <a:lumMod val="75000"/>
+                  </a:schemeClr>
+                </a:solidFill>
+              </a:rPr>
               <a:t>Assemblage TOTAL = 2</a:t>
             </a:r>
           </a:p>
@@ -5212,7 +5450,7 @@
         <p:spPr>
           <a:xfrm>
             <a:off x="6341424" y="468154"/>
-            <a:ext cx="1476686" cy="830997"/>
+            <a:ext cx="1476686" cy="954107"/>
           </a:xfrm>
           <a:prstGeom prst="rect">
             <a:avLst/>
@@ -5268,6 +5506,16 @@
             <a:r>
               <a:rPr lang="en-CH" sz="800" dirty="0"/>
               <a:t>Call banque – E-banking</a:t>
+            </a:r>
+          </a:p>
+          <a:p>
+            <a:pPr marL="285750" indent="-285750">
+              <a:buFontTx/>
+              <a:buChar char="-"/>
+            </a:pPr>
+            <a:r>
+              <a:rPr lang="en-CH" sz="800" dirty="0"/>
+              <a:t>Impôts</a:t>
             </a:r>
           </a:p>
           <a:p>
@@ -5438,7 +5686,13 @@
           <a:lstStyle/>
           <a:p>
             <a:r>
-              <a:rPr lang="en-CH" sz="800" dirty="0"/>
+              <a:rPr lang="en-CH" sz="800" dirty="0">
+                <a:solidFill>
+                  <a:schemeClr val="accent6">
+                    <a:lumMod val="75000"/>
+                  </a:schemeClr>
+                </a:solidFill>
+              </a:rPr>
               <a:t>IJO MUSI – RAPPORT – TOTAL = 12</a:t>
             </a:r>
           </a:p>
@@ -5448,7 +5702,13 @@
               <a:buChar char="-"/>
             </a:pPr>
             <a:r>
-              <a:rPr lang="en-CH" sz="800" dirty="0"/>
+              <a:rPr lang="en-CH" sz="800" dirty="0">
+                <a:solidFill>
+                  <a:schemeClr val="accent6">
+                    <a:lumMod val="75000"/>
+                  </a:schemeClr>
+                </a:solidFill>
+              </a:rPr>
               <a:t>Rassembler mes archives - 0</a:t>
             </a:r>
           </a:p>
@@ -5458,7 +5718,13 @@
               <a:buChar char="-"/>
             </a:pPr>
             <a:r>
-              <a:rPr lang="en-CH" sz="800" dirty="0"/>
+              <a:rPr lang="en-CH" sz="800" dirty="0">
+                <a:solidFill>
+                  <a:schemeClr val="accent6">
+                    <a:lumMod val="75000"/>
+                  </a:schemeClr>
+                </a:solidFill>
+              </a:rPr>
               <a:t>Trouver et lire 2-3 articles recherche-création (se concentrer sur la forme et méthode) (1)</a:t>
             </a:r>
           </a:p>
@@ -5468,7 +5734,13 @@
               <a:buChar char="-"/>
             </a:pPr>
             <a:r>
-              <a:rPr lang="en-CH" sz="800" dirty="0"/>
+              <a:rPr lang="en-CH" sz="800" dirty="0">
+                <a:solidFill>
+                  <a:schemeClr val="accent6">
+                    <a:lumMod val="75000"/>
+                  </a:schemeClr>
+                </a:solidFill>
+              </a:rPr>
               <a:t>Rassembler ludographie (0.5)</a:t>
             </a:r>
           </a:p>
@@ -5478,7 +5750,13 @@
               <a:buChar char="-"/>
             </a:pPr>
             <a:r>
-              <a:rPr lang="en-CH" sz="800" dirty="0"/>
+              <a:rPr lang="en-CH" sz="800" dirty="0">
+                <a:solidFill>
+                  <a:schemeClr val="accent6">
+                    <a:lumMod val="75000"/>
+                  </a:schemeClr>
+                </a:solidFill>
+              </a:rPr>
               <a:t>Rassembler bibliographie (3)</a:t>
             </a:r>
           </a:p>
@@ -5488,7 +5766,13 @@
               <a:buChar char="-"/>
             </a:pPr>
             <a:r>
-              <a:rPr lang="en-CH" sz="800" dirty="0"/>
+              <a:rPr lang="en-CH" sz="800" dirty="0">
+                <a:solidFill>
+                  <a:schemeClr val="accent6">
+                    <a:lumMod val="75000"/>
+                  </a:schemeClr>
+                </a:solidFill>
+              </a:rPr>
               <a:t>Définir structure du rapport (0.5)</a:t>
             </a:r>
           </a:p>
@@ -5498,7 +5782,13 @@
               <a:buChar char="-"/>
             </a:pPr>
             <a:r>
-              <a:rPr lang="en-CH" sz="800" dirty="0"/>
+              <a:rPr lang="en-CH" sz="800" dirty="0">
+                <a:solidFill>
+                  <a:schemeClr val="accent6">
+                    <a:lumMod val="75000"/>
+                  </a:schemeClr>
+                </a:solidFill>
+              </a:rPr>
               <a:t>Écriture (5)</a:t>
             </a:r>
           </a:p>
@@ -5508,12 +5798,24 @@
               <a:buChar char="-"/>
             </a:pPr>
             <a:r>
-              <a:rPr lang="en-CH" sz="800" dirty="0"/>
+              <a:rPr lang="en-CH" sz="800" dirty="0">
+                <a:solidFill>
+                  <a:schemeClr val="accent6">
+                    <a:lumMod val="75000"/>
+                  </a:schemeClr>
+                </a:solidFill>
+              </a:rPr>
               <a:t>Présentation (2)</a:t>
             </a:r>
           </a:p>
           <a:p>
-            <a:endParaRPr lang="en-CH" sz="800" dirty="0"/>
+            <a:endParaRPr lang="en-CH" sz="800" dirty="0">
+              <a:solidFill>
+                <a:schemeClr val="accent6">
+                  <a:lumMod val="75000"/>
+                </a:schemeClr>
+              </a:solidFill>
+            </a:endParaRPr>
           </a:p>
         </p:txBody>
       </p:sp>
@@ -5581,7 +5883,13 @@
           <a:lstStyle/>
           <a:p>
             <a:r>
-              <a:rPr lang="en-CH" dirty="0"/>
+              <a:rPr lang="en-CH" dirty="0">
+                <a:solidFill>
+                  <a:schemeClr val="accent6">
+                    <a:lumMod val="75000"/>
+                  </a:schemeClr>
+                </a:solidFill>
+              </a:rPr>
               <a:t>VISU – SCATERPLOT UNIQUEMENT – TOTAL = 3</a:t>
             </a:r>
           </a:p>
@@ -5616,7 +5924,13 @@
           <a:lstStyle/>
           <a:p>
             <a:r>
-              <a:rPr lang="en-CH" dirty="0"/>
+              <a:rPr lang="en-CH" dirty="0">
+                <a:solidFill>
+                  <a:schemeClr val="accent6">
+                    <a:lumMod val="75000"/>
+                  </a:schemeClr>
+                </a:solidFill>
+              </a:rPr>
               <a:t>PHILO – TOTAL = 6</a:t>
             </a:r>
           </a:p>
@@ -5651,31 +5965,61 @@
           <a:lstStyle/>
           <a:p>
             <a:r>
-              <a:rPr lang="en-CH" dirty="0"/>
+              <a:rPr lang="en-CH" dirty="0">
+                <a:solidFill>
+                  <a:schemeClr val="accent6">
+                    <a:lumMod val="75000"/>
+                  </a:schemeClr>
+                </a:solidFill>
+              </a:rPr>
               <a:t>MÉMOIRE – 1 semestre</a:t>
             </a:r>
           </a:p>
           <a:p>
             <a:r>
-              <a:rPr lang="en-CH" dirty="0"/>
+              <a:rPr lang="en-CH" dirty="0">
+                <a:solidFill>
+                  <a:schemeClr val="accent6">
+                    <a:lumMod val="75000"/>
+                  </a:schemeClr>
+                </a:solidFill>
+              </a:rPr>
               <a:t>début : 14 septembre 26</a:t>
             </a:r>
           </a:p>
           <a:p>
             <a:r>
-              <a:rPr lang="en-CH" dirty="0"/>
+              <a:rPr lang="en-CH" dirty="0">
+                <a:solidFill>
+                  <a:schemeClr val="accent6">
+                    <a:lumMod val="75000"/>
+                  </a:schemeClr>
+                </a:solidFill>
+              </a:rPr>
               <a:t>fin des cours : 18 décembre 26</a:t>
             </a:r>
           </a:p>
           <a:p>
             <a:r>
-              <a:rPr lang="en-CH" dirty="0"/>
+              <a:rPr lang="en-CH" dirty="0">
+                <a:solidFill>
+                  <a:schemeClr val="accent6">
+                    <a:lumMod val="75000"/>
+                  </a:schemeClr>
+                </a:solidFill>
+              </a:rPr>
               <a:t>début examens : 15 janvier 26</a:t>
             </a:r>
           </a:p>
           <a:p>
             <a:r>
-              <a:rPr lang="en-CH" dirty="0"/>
+              <a:rPr lang="en-CH" dirty="0">
+                <a:solidFill>
+                  <a:schemeClr val="accent6">
+                    <a:lumMod val="75000"/>
+                  </a:schemeClr>
+                </a:solidFill>
+              </a:rPr>
               <a:t> fin examnes : 6 février 26</a:t>
             </a:r>
           </a:p>
@@ -5745,7 +6089,13 @@
           <a:lstStyle/>
           <a:p>
             <a:r>
-              <a:rPr lang="en-CH" dirty="0"/>
+              <a:rPr lang="en-CH" dirty="0">
+                <a:solidFill>
+                  <a:schemeClr val="accent6">
+                    <a:lumMod val="75000"/>
+                  </a:schemeClr>
+                </a:solidFill>
+              </a:rPr>
               <a:t>STAGES – DamaDama – TOTAL = 15</a:t>
             </a:r>
           </a:p>
@@ -5780,7 +6130,13 @@
           <a:lstStyle/>
           <a:p>
             <a:r>
-              <a:rPr lang="en-CH" dirty="0"/>
+              <a:rPr lang="en-CH" dirty="0">
+                <a:solidFill>
+                  <a:schemeClr val="accent6">
+                    <a:lumMod val="75000"/>
+                  </a:schemeClr>
+                </a:solidFill>
+              </a:rPr>
               <a:t>STAGES – Naraven – TOTAL = 15</a:t>
             </a:r>
           </a:p>
@@ -5815,7 +6171,13 @@
           <a:lstStyle/>
           <a:p>
             <a:r>
-              <a:rPr lang="en-CH" dirty="0"/>
+              <a:rPr lang="en-CH" dirty="0">
+                <a:solidFill>
+                  <a:schemeClr val="accent6">
+                    <a:lumMod val="75000"/>
+                  </a:schemeClr>
+                </a:solidFill>
+              </a:rPr>
               <a:t>STAGES – Sémaphore – TOTAL = 20</a:t>
             </a:r>
           </a:p>
@@ -5836,7 +6198,7 @@
         <p:spPr>
           <a:xfrm>
             <a:off x="7872413" y="1843088"/>
-            <a:ext cx="2956194" cy="369332"/>
+            <a:ext cx="3818096" cy="369332"/>
           </a:xfrm>
           <a:prstGeom prst="rect">
             <a:avLst/>
@@ -5850,8 +6212,14 @@
           <a:lstStyle/>
           <a:p>
             <a:r>
-              <a:rPr lang="en-CH" dirty="0"/>
-              <a:t>SPEC – “COURS” – TOTAL = 17</a:t>
+              <a:rPr lang="en-CH" dirty="0">
+                <a:solidFill>
+                  <a:schemeClr val="accent6">
+                    <a:lumMod val="75000"/>
+                  </a:schemeClr>
+                </a:solidFill>
+              </a:rPr>
+              <a:t>SPEC – “COURS” – TOTAL = 17 (16 mtn)</a:t>
             </a:r>
           </a:p>
         </p:txBody>
@@ -5902,14 +6270,14 @@
             <p:ph idx="1"/>
             <p:extLst>
               <p:ext uri="{D42A27DB-BD31-4B8C-83A1-F6EECF244321}">
-                <p14:modId xmlns:p14="http://schemas.microsoft.com/office/powerpoint/2010/main" val="1840187752"/>
+                <p14:modId xmlns:p14="http://schemas.microsoft.com/office/powerpoint/2010/main" val="350542488"/>
               </p:ext>
             </p:extLst>
           </p:nvPr>
         </p:nvGraphicFramePr>
         <p:xfrm>
           <a:off x="128587" y="1868487"/>
-          <a:ext cx="11849103" cy="1752600"/>
+          <a:ext cx="11849103" cy="2301240"/>
         </p:xfrm>
         <a:graphic>
           <a:graphicData uri="http://schemas.openxmlformats.org/drawingml/2006/table">
@@ -6299,7 +6667,7 @@
                       <a:pPr algn="ctr"/>
                       <a:r>
                         <a:rPr lang="en-CH" dirty="0"/>
-                        <a:t>15</a:t>
+                        <a:t>6</a:t>
                       </a:r>
                     </a:p>
                   </a:txBody>
@@ -6327,7 +6695,7 @@
                       <a:pPr algn="ctr"/>
                       <a:r>
                         <a:rPr lang="en-CH" dirty="0"/>
-                        <a:t>18</a:t>
+                        <a:t>3</a:t>
                       </a:r>
                     </a:p>
                   </a:txBody>
@@ -6341,21 +6709,7 @@
                       <a:pPr algn="ctr"/>
                       <a:r>
                         <a:rPr lang="en-CH" dirty="0"/>
-                        <a:t>18</a:t>
-                      </a:r>
-                    </a:p>
-                  </a:txBody>
-                  <a:tcPr/>
-                </a:tc>
-                <a:tc>
-                  <a:txBody>
-                    <a:bodyPr/>
-                    <a:lstStyle/>
-                    <a:p>
-                      <a:pPr algn="ctr"/>
-                      <a:r>
-                        <a:rPr lang="en-CH" dirty="0"/>
-                        <a:t>17</a:t>
+                        <a:t>3</a:t>
                       </a:r>
                     </a:p>
                   </a:txBody>
@@ -6370,6 +6724,20 @@
                       <a:r>
                         <a:rPr lang="en-CH" dirty="0"/>
                         <a:t>7</a:t>
+                      </a:r>
+                    </a:p>
+                  </a:txBody>
+                  <a:tcPr/>
+                </a:tc>
+                <a:tc>
+                  <a:txBody>
+                    <a:bodyPr/>
+                    <a:lstStyle/>
+                    <a:p>
+                      <a:pPr algn="ctr"/>
+                      <a:r>
+                        <a:rPr lang="en-CH" dirty="0"/>
+                        <a:t>0</a:t>
                       </a:r>
                     </a:p>
                   </a:txBody>
@@ -6435,8 +6803,1855 @@
                       <a:pPr algn="ctr"/>
                       <a:r>
                         <a:rPr lang="en-CH" dirty="0"/>
-                        <a:t>IJO MUSI (7)</a:t>
+                        <a:t>IJO MUSI (7), VISU (3), PHILO (6)</a:t>
                       </a:r>
+                    </a:p>
+                  </a:txBody>
+                  <a:tcPr/>
+                </a:tc>
+                <a:tc>
+                  <a:txBody>
+                    <a:bodyPr/>
+                    <a:lstStyle/>
+                    <a:p>
+                      <a:pPr algn="ctr"/>
+                      <a:endParaRPr lang="en-CH" dirty="0"/>
+                    </a:p>
+                  </a:txBody>
+                  <a:tcPr/>
+                </a:tc>
+                <a:tc>
+                  <a:txBody>
+                    <a:bodyPr/>
+                    <a:lstStyle/>
+                    <a:p>
+                      <a:pPr algn="ctr"/>
+                      <a:r>
+                        <a:rPr lang="en-CH" dirty="0"/>
+                        <a:t>Projet (15)</a:t>
+                      </a:r>
+                    </a:p>
+                  </a:txBody>
+                  <a:tcPr/>
+                </a:tc>
+                <a:tc>
+                  <a:txBody>
+                    <a:bodyPr/>
+                    <a:lstStyle/>
+                    <a:p>
+                      <a:pPr algn="ctr"/>
+                      <a:r>
+                        <a:rPr lang="en-CH" dirty="0"/>
+                        <a:t>Projet (15)</a:t>
+                      </a:r>
+                    </a:p>
+                  </a:txBody>
+                  <a:tcPr/>
+                </a:tc>
+                <a:tc>
+                  <a:txBody>
+                    <a:bodyPr/>
+                    <a:lstStyle/>
+                    <a:p>
+                      <a:pPr algn="ctr"/>
+                      <a:r>
+                        <a:rPr lang="en-CH" dirty="0"/>
+                        <a:t>SPEC (10)</a:t>
+                      </a:r>
+                    </a:p>
+                  </a:txBody>
+                  <a:tcPr/>
+                </a:tc>
+                <a:tc>
+                  <a:txBody>
+                    <a:bodyPr/>
+                    <a:lstStyle/>
+                    <a:p>
+                      <a:pPr algn="ctr"/>
+                      <a:r>
+                        <a:rPr lang="en-CH" dirty="0"/>
+                        <a:t>SPEC (7)</a:t>
+                      </a:r>
+                    </a:p>
+                  </a:txBody>
+                  <a:tcPr/>
+                </a:tc>
+                <a:extLst>
+                  <a:ext uri="{0D108BD9-81ED-4DB2-BD59-A6C34878D82A}">
+                    <a16:rowId xmlns:a16="http://schemas.microsoft.com/office/drawing/2014/main" val="2217367681"/>
+                  </a:ext>
+                </a:extLst>
+              </a:tr>
+            </a:tbl>
+          </a:graphicData>
+        </a:graphic>
+      </p:graphicFrame>
+      <p:sp>
+        <p:nvSpPr>
+          <p:cNvPr id="6" name="TextBox 5">
+            <a:extLst>
+              <a:ext uri="{FF2B5EF4-FFF2-40B4-BE49-F238E27FC236}">
+                <a16:creationId xmlns:a16="http://schemas.microsoft.com/office/drawing/2014/main" id="{9AEDAF53-4A96-CF91-4D5D-7DD7B9C51327}"/>
+              </a:ext>
+            </a:extLst>
+          </p:cNvPr>
+          <p:cNvSpPr txBox="1"/>
+          <p:nvPr/>
+        </p:nvSpPr>
+        <p:spPr>
+          <a:xfrm>
+            <a:off x="4857750" y="771526"/>
+            <a:ext cx="3575851" cy="369332"/>
+          </a:xfrm>
+          <a:prstGeom prst="rect">
+            <a:avLst/>
+          </a:prstGeom>
+          <a:noFill/>
+        </p:spPr>
+        <p:txBody>
+          <a:bodyPr wrap="none" rtlCol="0">
+            <a:spAutoFit/>
+          </a:bodyPr>
+          <a:lstStyle/>
+          <a:p>
+            <a:r>
+              <a:rPr lang="en-CH" dirty="0"/>
+              <a:t>Total (stages déjà attrribués) = 132 ?</a:t>
+            </a:r>
+          </a:p>
+        </p:txBody>
+      </p:sp>
+    </p:spTree>
+    <p:extLst>
+      <p:ext uri="{BB962C8B-B14F-4D97-AF65-F5344CB8AC3E}">
+        <p14:creationId xmlns:p14="http://schemas.microsoft.com/office/powerpoint/2010/main" val="1947291370"/>
+      </p:ext>
+    </p:extLst>
+  </p:cSld>
+  <p:clrMapOvr>
+    <a:masterClrMapping/>
+  </p:clrMapOvr>
+</p:sld>
+</file>
+
+<file path=ppt/slides/slide5.xml><?xml version="1.0" encoding="utf-8"?>
+<p:sld xmlns:a="http://schemas.openxmlformats.org/drawingml/2006/main" xmlns:r="http://schemas.openxmlformats.org/officeDocument/2006/relationships" xmlns:p="http://schemas.openxmlformats.org/presentationml/2006/main">
+  <p:cSld>
+    <p:spTree>
+      <p:nvGrpSpPr>
+        <p:cNvPr id="1" name=""/>
+        <p:cNvGrpSpPr/>
+        <p:nvPr/>
+      </p:nvGrpSpPr>
+      <p:grpSpPr>
+        <a:xfrm>
+          <a:off x="0" y="0"/>
+          <a:ext cx="0" cy="0"/>
+          <a:chOff x="0" y="0"/>
+          <a:chExt cx="0" cy="0"/>
+        </a:xfrm>
+      </p:grpSpPr>
+      <p:sp>
+        <p:nvSpPr>
+          <p:cNvPr id="2" name="Title 1">
+            <a:extLst>
+              <a:ext uri="{FF2B5EF4-FFF2-40B4-BE49-F238E27FC236}">
+                <a16:creationId xmlns:a16="http://schemas.microsoft.com/office/drawing/2014/main" id="{18D845CC-924C-66A5-FB8D-9E0D4EF1223C}"/>
+              </a:ext>
+            </a:extLst>
+          </p:cNvPr>
+          <p:cNvSpPr>
+            <a:spLocks noGrp="1"/>
+          </p:cNvSpPr>
+          <p:nvPr>
+            <p:ph type="title"/>
+          </p:nvPr>
+        </p:nvSpPr>
+        <p:spPr>
+          <a:xfrm>
+            <a:off x="-178130" y="0"/>
+            <a:ext cx="3527961" cy="822407"/>
+          </a:xfrm>
+        </p:spPr>
+        <p:txBody>
+          <a:bodyPr>
+            <a:normAutofit/>
+          </a:bodyPr>
+          <a:lstStyle/>
+          <a:p>
+            <a:pPr algn="ctr"/>
+            <a:r>
+              <a:rPr lang="en-CH" sz="2000" dirty="0"/>
+              <a:t>Reprise kanban 11/02/26</a:t>
+            </a:r>
+          </a:p>
+        </p:txBody>
+      </p:sp>
+      <p:sp>
+        <p:nvSpPr>
+          <p:cNvPr id="4" name="TextBox 3">
+            <a:extLst>
+              <a:ext uri="{FF2B5EF4-FFF2-40B4-BE49-F238E27FC236}">
+                <a16:creationId xmlns:a16="http://schemas.microsoft.com/office/drawing/2014/main" id="{CFF6B6CC-B0D2-D82B-EFD7-D2A880EF3856}"/>
+              </a:ext>
+            </a:extLst>
+          </p:cNvPr>
+          <p:cNvSpPr txBox="1"/>
+          <p:nvPr/>
+        </p:nvSpPr>
+        <p:spPr>
+          <a:xfrm>
+            <a:off x="665019" y="1496291"/>
+            <a:ext cx="2218877" cy="4893647"/>
+          </a:xfrm>
+          <a:prstGeom prst="rect">
+            <a:avLst/>
+          </a:prstGeom>
+          <a:noFill/>
+        </p:spPr>
+        <p:txBody>
+          <a:bodyPr wrap="none" rtlCol="0">
+            <a:spAutoFit/>
+          </a:bodyPr>
+          <a:lstStyle/>
+          <a:p>
+            <a:r>
+              <a:rPr lang="en-CH" sz="800" dirty="0"/>
+              <a:t>IJO MUSI – JEU – TOTAL = 22</a:t>
+            </a:r>
+          </a:p>
+          <a:p>
+            <a:pPr marL="285750" indent="-285750">
+              <a:buFontTx/>
+              <a:buChar char="-"/>
+            </a:pPr>
+            <a:r>
+              <a:rPr lang="en-CH" sz="800" dirty="0"/>
+              <a:t>Assets TOTAL =  11</a:t>
+            </a:r>
+          </a:p>
+          <a:p>
+            <a:pPr marL="742950" lvl="1" indent="-285750">
+              <a:buFontTx/>
+              <a:buChar char="-"/>
+            </a:pPr>
+            <a:r>
+              <a:rPr lang="en-CH" sz="800" dirty="0"/>
+              <a:t>Squelette : 1</a:t>
+            </a:r>
+          </a:p>
+          <a:p>
+            <a:pPr marL="742950" lvl="1" indent="-285750">
+              <a:buFontTx/>
+              <a:buChar char="-"/>
+            </a:pPr>
+            <a:r>
+              <a:rPr lang="en-CH" sz="800" dirty="0"/>
+              <a:t>Crafting Room : 2</a:t>
+            </a:r>
+          </a:p>
+          <a:p>
+            <a:pPr marL="742950" lvl="1" indent="-285750">
+              <a:buFontTx/>
+              <a:buChar char="-"/>
+            </a:pPr>
+            <a:r>
+              <a:rPr lang="en-CH" sz="800" dirty="0"/>
+              <a:t>Pond : 1</a:t>
+            </a:r>
+          </a:p>
+          <a:p>
+            <a:pPr marL="742950" lvl="1" indent="-285750">
+              <a:buFontTx/>
+              <a:buChar char="-"/>
+            </a:pPr>
+            <a:r>
+              <a:rPr lang="en-CH" sz="800" dirty="0"/>
+              <a:t>Balcony : 2</a:t>
+            </a:r>
+          </a:p>
+          <a:p>
+            <a:pPr marL="742950" lvl="1" indent="-285750">
+              <a:buFontTx/>
+              <a:buChar char="-"/>
+            </a:pPr>
+            <a:r>
+              <a:rPr lang="en-CH" sz="800" dirty="0"/>
+              <a:t>Water &amp; Waterfall : 2</a:t>
+            </a:r>
+          </a:p>
+          <a:p>
+            <a:pPr marL="742950" lvl="1" indent="-285750">
+              <a:buFontTx/>
+              <a:buChar char="-"/>
+            </a:pPr>
+            <a:r>
+              <a:rPr lang="en-CH" sz="800" dirty="0"/>
+              <a:t>Stairs : 2</a:t>
+            </a:r>
+          </a:p>
+          <a:p>
+            <a:pPr marL="742950" lvl="1" indent="-285750">
+              <a:buFontTx/>
+              <a:buChar char="-"/>
+            </a:pPr>
+            <a:r>
+              <a:rPr lang="en-CH" sz="800" dirty="0"/>
+              <a:t>Textures : 1</a:t>
+            </a:r>
+          </a:p>
+          <a:p>
+            <a:pPr marL="285750" indent="-285750">
+              <a:buFontTx/>
+              <a:buChar char="-"/>
+            </a:pPr>
+            <a:r>
+              <a:rPr lang="en-CH" sz="800" dirty="0"/>
+              <a:t>Écriture TOTAL = 1</a:t>
+            </a:r>
+          </a:p>
+          <a:p>
+            <a:pPr marL="742950" lvl="1" indent="-285750">
+              <a:buFontTx/>
+              <a:buChar char="-"/>
+            </a:pPr>
+            <a:r>
+              <a:rPr lang="en-CH" sz="800" strike="sngStrike" dirty="0"/>
+              <a:t>awakening</a:t>
+            </a:r>
+          </a:p>
+          <a:p>
+            <a:pPr marL="742950" lvl="1" indent="-285750">
+              <a:buFontTx/>
+              <a:buChar char="-"/>
+            </a:pPr>
+            <a:r>
+              <a:rPr lang="en-CH" sz="800" dirty="0"/>
+              <a:t>blame</a:t>
+            </a:r>
+          </a:p>
+          <a:p>
+            <a:pPr marL="742950" lvl="1" indent="-285750">
+              <a:buFontTx/>
+              <a:buChar char="-"/>
+            </a:pPr>
+            <a:r>
+              <a:rPr lang="en-CH" sz="800" strike="sngStrike" dirty="0"/>
+              <a:t>confession</a:t>
+            </a:r>
+          </a:p>
+          <a:p>
+            <a:pPr marL="742950" lvl="1" indent="-285750">
+              <a:buFontTx/>
+              <a:buChar char="-"/>
+            </a:pPr>
+            <a:r>
+              <a:rPr lang="en-CH" sz="800" strike="sngStrike" dirty="0"/>
+              <a:t>last moments</a:t>
+            </a:r>
+          </a:p>
+          <a:p>
+            <a:pPr marL="742950" lvl="1" indent="-285750">
+              <a:buFontTx/>
+              <a:buChar char="-"/>
+            </a:pPr>
+            <a:r>
+              <a:rPr lang="en-CH" sz="800" dirty="0"/>
+              <a:t>playing</a:t>
+            </a:r>
+          </a:p>
+          <a:p>
+            <a:pPr marL="742950" lvl="1" indent="-285750">
+              <a:buFontTx/>
+              <a:buChar char="-"/>
+            </a:pPr>
+            <a:r>
+              <a:rPr lang="en-CH" sz="800" dirty="0"/>
+              <a:t>plants</a:t>
+            </a:r>
+          </a:p>
+          <a:p>
+            <a:pPr marL="742950" lvl="1" indent="-285750">
+              <a:buFontTx/>
+              <a:buChar char="-"/>
+            </a:pPr>
+            <a:r>
+              <a:rPr lang="en-CH" sz="800" strike="sngStrike" dirty="0"/>
+              <a:t>death</a:t>
+            </a:r>
+          </a:p>
+          <a:p>
+            <a:pPr marL="742950" lvl="1" indent="-285750">
+              <a:buFontTx/>
+              <a:buChar char="-"/>
+            </a:pPr>
+            <a:r>
+              <a:rPr lang="en-CH" sz="800" dirty="0"/>
+              <a:t>mural</a:t>
+            </a:r>
+          </a:p>
+          <a:p>
+            <a:pPr marL="285750" indent="-285750">
+              <a:buFontTx/>
+              <a:buChar char="-"/>
+            </a:pPr>
+            <a:r>
+              <a:rPr lang="en-CH" sz="800" dirty="0"/>
+              <a:t>Voix TOTAL = 4</a:t>
+            </a:r>
+          </a:p>
+          <a:p>
+            <a:pPr marL="742950" lvl="1" indent="-285750">
+              <a:buFontTx/>
+              <a:buChar char="-"/>
+            </a:pPr>
+            <a:r>
+              <a:rPr lang="en-CH" sz="800" dirty="0"/>
+              <a:t>awakening</a:t>
+            </a:r>
+          </a:p>
+          <a:p>
+            <a:pPr marL="742950" lvl="1" indent="-285750">
+              <a:buFontTx/>
+              <a:buChar char="-"/>
+            </a:pPr>
+            <a:r>
+              <a:rPr lang="en-CH" sz="800" dirty="0"/>
+              <a:t>blame</a:t>
+            </a:r>
+          </a:p>
+          <a:p>
+            <a:pPr marL="742950" lvl="1" indent="-285750">
+              <a:buFontTx/>
+              <a:buChar char="-"/>
+            </a:pPr>
+            <a:r>
+              <a:rPr lang="en-CH" sz="800" dirty="0"/>
+              <a:t>confession</a:t>
+            </a:r>
+          </a:p>
+          <a:p>
+            <a:pPr marL="742950" lvl="1" indent="-285750">
+              <a:buFontTx/>
+              <a:buChar char="-"/>
+            </a:pPr>
+            <a:r>
+              <a:rPr lang="en-CH" sz="800" dirty="0"/>
+              <a:t>last moments</a:t>
+            </a:r>
+          </a:p>
+          <a:p>
+            <a:pPr marL="742950" lvl="1" indent="-285750">
+              <a:buFontTx/>
+              <a:buChar char="-"/>
+            </a:pPr>
+            <a:r>
+              <a:rPr lang="en-CH" sz="800" dirty="0"/>
+              <a:t>playing</a:t>
+            </a:r>
+          </a:p>
+          <a:p>
+            <a:pPr marL="742950" lvl="1" indent="-285750">
+              <a:buFontTx/>
+              <a:buChar char="-"/>
+            </a:pPr>
+            <a:r>
+              <a:rPr lang="en-CH" sz="800" dirty="0"/>
+              <a:t>plants</a:t>
+            </a:r>
+          </a:p>
+          <a:p>
+            <a:pPr marL="742950" lvl="1" indent="-285750">
+              <a:buFontTx/>
+              <a:buChar char="-"/>
+            </a:pPr>
+            <a:r>
+              <a:rPr lang="en-CH" sz="800" dirty="0"/>
+              <a:t>death</a:t>
+            </a:r>
+          </a:p>
+          <a:p>
+            <a:pPr marL="742950" lvl="1" indent="-285750">
+              <a:buFontTx/>
+              <a:buChar char="-"/>
+            </a:pPr>
+            <a:r>
+              <a:rPr lang="en-CH" sz="800" dirty="0"/>
+              <a:t>mural</a:t>
+            </a:r>
+          </a:p>
+          <a:p>
+            <a:pPr marL="285750" indent="-285750">
+              <a:buFontTx/>
+              <a:buChar char="-"/>
+            </a:pPr>
+            <a:r>
+              <a:rPr lang="en-CH" sz="800" dirty="0"/>
+              <a:t>Sons TOTAL = 2</a:t>
+            </a:r>
+          </a:p>
+          <a:p>
+            <a:pPr marL="742950" lvl="1" indent="-285750">
+              <a:buFontTx/>
+              <a:buChar char="-"/>
+            </a:pPr>
+            <a:r>
+              <a:rPr lang="en-CH" sz="800" dirty="0"/>
+              <a:t>Pas</a:t>
+            </a:r>
+          </a:p>
+          <a:p>
+            <a:pPr marL="742950" lvl="1" indent="-285750">
+              <a:buFontTx/>
+              <a:buChar char="-"/>
+            </a:pPr>
+            <a:r>
+              <a:rPr lang="en-CH" sz="800" dirty="0"/>
+              <a:t>Eau</a:t>
+            </a:r>
+          </a:p>
+          <a:p>
+            <a:pPr marL="742950" lvl="1" indent="-285750">
+              <a:buFontTx/>
+              <a:buChar char="-"/>
+            </a:pPr>
+            <a:r>
+              <a:rPr lang="en-CH" sz="800" dirty="0"/>
+              <a:t>Toggle tablette</a:t>
+            </a:r>
+          </a:p>
+          <a:p>
+            <a:pPr marL="742950" lvl="1" indent="-285750">
+              <a:buFontTx/>
+              <a:buChar char="-"/>
+            </a:pPr>
+            <a:r>
+              <a:rPr lang="en-CH" sz="800" dirty="0"/>
+              <a:t>Feu</a:t>
+            </a:r>
+          </a:p>
+          <a:p>
+            <a:pPr marL="742950" lvl="1" indent="-285750">
+              <a:buFontTx/>
+              <a:buChar char="-"/>
+            </a:pPr>
+            <a:r>
+              <a:rPr lang="en-CH" sz="800" dirty="0"/>
+              <a:t>Ambiance (cf grotte minecraft)</a:t>
+            </a:r>
+          </a:p>
+          <a:p>
+            <a:pPr marL="742950" lvl="1" indent="-285750">
+              <a:buFontTx/>
+              <a:buChar char="-"/>
+            </a:pPr>
+            <a:r>
+              <a:rPr lang="en-CH" sz="800" dirty="0"/>
+              <a:t>Musiques</a:t>
+            </a:r>
+          </a:p>
+          <a:p>
+            <a:pPr marL="285750" indent="-285750">
+              <a:buFontTx/>
+              <a:buChar char="-"/>
+            </a:pPr>
+            <a:r>
+              <a:rPr lang="en-CH" sz="800" dirty="0"/>
+              <a:t>Tablette TOTAL = 2</a:t>
+            </a:r>
+          </a:p>
+          <a:p>
+            <a:pPr marL="742950" lvl="1" indent="-285750">
+              <a:buFontTx/>
+              <a:buChar char="-"/>
+            </a:pPr>
+            <a:r>
+              <a:rPr lang="en-CH" sz="800" dirty="0"/>
+              <a:t>Yellow</a:t>
+            </a:r>
+          </a:p>
+          <a:p>
+            <a:pPr marL="742950" lvl="1" indent="-285750">
+              <a:buFontTx/>
+              <a:buChar char="-"/>
+            </a:pPr>
+            <a:r>
+              <a:rPr lang="en-CH" sz="800" dirty="0"/>
+              <a:t>Red</a:t>
+            </a:r>
+          </a:p>
+          <a:p>
+            <a:pPr marL="742950" lvl="1" indent="-285750">
+              <a:buFontTx/>
+              <a:buChar char="-"/>
+            </a:pPr>
+            <a:r>
+              <a:rPr lang="en-CH" sz="800" dirty="0"/>
+              <a:t>Blue</a:t>
+            </a:r>
+          </a:p>
+          <a:p>
+            <a:pPr marL="285750" indent="-285750">
+              <a:buFontTx/>
+              <a:buChar char="-"/>
+            </a:pPr>
+            <a:r>
+              <a:rPr lang="en-CH" sz="800" dirty="0"/>
+              <a:t>Assemblage TOTAL = 2</a:t>
+            </a:r>
+          </a:p>
+        </p:txBody>
+      </p:sp>
+      <p:sp>
+        <p:nvSpPr>
+          <p:cNvPr id="5" name="TextBox 4">
+            <a:extLst>
+              <a:ext uri="{FF2B5EF4-FFF2-40B4-BE49-F238E27FC236}">
+                <a16:creationId xmlns:a16="http://schemas.microsoft.com/office/drawing/2014/main" id="{1FA91067-1903-72C9-5AEA-612EF3CE495E}"/>
+              </a:ext>
+            </a:extLst>
+          </p:cNvPr>
+          <p:cNvSpPr txBox="1"/>
+          <p:nvPr/>
+        </p:nvSpPr>
+        <p:spPr>
+          <a:xfrm>
+            <a:off x="6341424" y="468154"/>
+            <a:ext cx="1476686" cy="1077218"/>
+          </a:xfrm>
+          <a:prstGeom prst="rect">
+            <a:avLst/>
+          </a:prstGeom>
+          <a:noFill/>
+        </p:spPr>
+        <p:txBody>
+          <a:bodyPr wrap="none" rtlCol="0">
+            <a:spAutoFit/>
+          </a:bodyPr>
+          <a:lstStyle/>
+          <a:p>
+            <a:r>
+              <a:rPr lang="en-CH" sz="800" dirty="0"/>
+              <a:t>AUTRES</a:t>
+            </a:r>
+          </a:p>
+          <a:p>
+            <a:pPr marL="285750" indent="-285750">
+              <a:buFontTx/>
+              <a:buChar char="-"/>
+            </a:pPr>
+            <a:r>
+              <a:rPr lang="en-CH" sz="800" dirty="0"/>
+              <a:t>Excel miam</a:t>
+            </a:r>
+          </a:p>
+          <a:p>
+            <a:pPr marL="285750" indent="-285750">
+              <a:buFontTx/>
+              <a:buChar char="-"/>
+            </a:pPr>
+            <a:r>
+              <a:rPr lang="en-CH" sz="800" dirty="0"/>
+              <a:t>Abo gare</a:t>
+            </a:r>
+          </a:p>
+          <a:p>
+            <a:pPr marL="285750" indent="-285750">
+              <a:buFontTx/>
+              <a:buChar char="-"/>
+            </a:pPr>
+            <a:r>
+              <a:rPr lang="en-CH" sz="800" dirty="0"/>
+              <a:t>Call banque – carte</a:t>
+            </a:r>
+          </a:p>
+          <a:p>
+            <a:pPr marL="285750" indent="-285750">
+              <a:buFontTx/>
+              <a:buChar char="-"/>
+            </a:pPr>
+            <a:r>
+              <a:rPr lang="en-CH" sz="800" dirty="0"/>
+              <a:t>Call banque – E-banking</a:t>
+            </a:r>
+          </a:p>
+          <a:p>
+            <a:pPr marL="285750" indent="-285750">
+              <a:buFontTx/>
+              <a:buChar char="-"/>
+            </a:pPr>
+            <a:r>
+              <a:rPr lang="en-CH" sz="800" dirty="0"/>
+              <a:t>Impôts</a:t>
+            </a:r>
+          </a:p>
+          <a:p>
+            <a:pPr marL="285750" indent="-285750">
+              <a:buFontTx/>
+              <a:buChar char="-"/>
+            </a:pPr>
+            <a:r>
+              <a:rPr lang="en-CH" sz="800" dirty="0"/>
+              <a:t>Notes wwed pour psy</a:t>
+            </a:r>
+          </a:p>
+          <a:p>
+            <a:pPr marL="285750" indent="-285750">
+              <a:buFontTx/>
+              <a:buChar char="-"/>
+            </a:pPr>
+            <a:endParaRPr lang="en-CH" sz="800" dirty="0"/>
+          </a:p>
+        </p:txBody>
+      </p:sp>
+      <p:sp>
+        <p:nvSpPr>
+          <p:cNvPr id="6" name="TextBox 5">
+            <a:extLst>
+              <a:ext uri="{FF2B5EF4-FFF2-40B4-BE49-F238E27FC236}">
+                <a16:creationId xmlns:a16="http://schemas.microsoft.com/office/drawing/2014/main" id="{3B04AFDD-DE59-BEF0-B01D-62624B365562}"/>
+              </a:ext>
+            </a:extLst>
+          </p:cNvPr>
+          <p:cNvSpPr txBox="1"/>
+          <p:nvPr/>
+        </p:nvSpPr>
+        <p:spPr>
+          <a:xfrm>
+            <a:off x="7666531" y="486889"/>
+            <a:ext cx="2316660" cy="707886"/>
+          </a:xfrm>
+          <a:prstGeom prst="rect">
+            <a:avLst/>
+          </a:prstGeom>
+          <a:noFill/>
+        </p:spPr>
+        <p:txBody>
+          <a:bodyPr wrap="none" rtlCol="0">
+            <a:spAutoFit/>
+          </a:bodyPr>
+          <a:lstStyle/>
+          <a:p>
+            <a:r>
+              <a:rPr lang="en-CH" sz="800" dirty="0"/>
+              <a:t>STAGES</a:t>
+            </a:r>
+          </a:p>
+          <a:p>
+            <a:pPr marL="285750" indent="-285750">
+              <a:buFontTx/>
+              <a:buChar char="-"/>
+            </a:pPr>
+            <a:r>
+              <a:rPr lang="en-CH" sz="800" dirty="0"/>
+              <a:t>Mail Yannick</a:t>
+            </a:r>
+          </a:p>
+          <a:p>
+            <a:pPr marL="742950" lvl="1" indent="-285750">
+              <a:buFontTx/>
+              <a:buChar char="-"/>
+            </a:pPr>
+            <a:r>
+              <a:rPr lang="en-CH" sz="800" dirty="0"/>
+              <a:t>Donner infos sur mes stages</a:t>
+            </a:r>
+          </a:p>
+          <a:p>
+            <a:pPr marL="742950" lvl="1" indent="-285750">
+              <a:buFontTx/>
+              <a:buChar char="-"/>
+            </a:pPr>
+            <a:r>
+              <a:rPr lang="en-CH" sz="800" dirty="0"/>
+              <a:t>Demander infos rapport de stage</a:t>
+            </a:r>
+          </a:p>
+          <a:p>
+            <a:pPr marL="742950" lvl="1" indent="-285750">
+              <a:buFontTx/>
+              <a:buChar char="-"/>
+            </a:pPr>
+            <a:r>
+              <a:rPr lang="en-CH" sz="800" dirty="0"/>
+              <a:t>Vérifier que tout est ok</a:t>
+            </a:r>
+          </a:p>
+        </p:txBody>
+      </p:sp>
+      <p:sp>
+        <p:nvSpPr>
+          <p:cNvPr id="7" name="TextBox 6">
+            <a:extLst>
+              <a:ext uri="{FF2B5EF4-FFF2-40B4-BE49-F238E27FC236}">
+                <a16:creationId xmlns:a16="http://schemas.microsoft.com/office/drawing/2014/main" id="{183D89C7-CFDC-3281-DED7-623E6797CED2}"/>
+              </a:ext>
+            </a:extLst>
+          </p:cNvPr>
+          <p:cNvSpPr txBox="1"/>
+          <p:nvPr/>
+        </p:nvSpPr>
+        <p:spPr>
+          <a:xfrm>
+            <a:off x="9999023" y="581892"/>
+            <a:ext cx="1117614" cy="461665"/>
+          </a:xfrm>
+          <a:prstGeom prst="rect">
+            <a:avLst/>
+          </a:prstGeom>
+          <a:noFill/>
+        </p:spPr>
+        <p:txBody>
+          <a:bodyPr wrap="none" rtlCol="0">
+            <a:spAutoFit/>
+          </a:bodyPr>
+          <a:lstStyle/>
+          <a:p>
+            <a:r>
+              <a:rPr lang="en-CH" sz="800" dirty="0"/>
+              <a:t>WEEKLY</a:t>
+            </a:r>
+          </a:p>
+          <a:p>
+            <a:pPr marL="285750" indent="-285750">
+              <a:buFontTx/>
+              <a:buChar char="-"/>
+            </a:pPr>
+            <a:r>
+              <a:rPr lang="en-CH" sz="800" dirty="0"/>
+              <a:t>Orga parent.e.s</a:t>
+            </a:r>
+          </a:p>
+          <a:p>
+            <a:pPr marL="285750" indent="-285750">
+              <a:buFontTx/>
+              <a:buChar char="-"/>
+            </a:pPr>
+            <a:r>
+              <a:rPr lang="en-CH" sz="800" dirty="0"/>
+              <a:t>Orga potes</a:t>
+            </a:r>
+          </a:p>
+        </p:txBody>
+      </p:sp>
+      <p:sp>
+        <p:nvSpPr>
+          <p:cNvPr id="8" name="TextBox 7">
+            <a:extLst>
+              <a:ext uri="{FF2B5EF4-FFF2-40B4-BE49-F238E27FC236}">
+                <a16:creationId xmlns:a16="http://schemas.microsoft.com/office/drawing/2014/main" id="{51156AC8-7F2B-DD8A-6E01-DCB51EFBF87B}"/>
+              </a:ext>
+            </a:extLst>
+          </p:cNvPr>
+          <p:cNvSpPr txBox="1"/>
+          <p:nvPr/>
+        </p:nvSpPr>
+        <p:spPr>
+          <a:xfrm>
+            <a:off x="2695699" y="1496290"/>
+            <a:ext cx="2624446" cy="1323439"/>
+          </a:xfrm>
+          <a:prstGeom prst="rect">
+            <a:avLst/>
+          </a:prstGeom>
+          <a:noFill/>
+        </p:spPr>
+        <p:txBody>
+          <a:bodyPr wrap="square" rtlCol="0">
+            <a:spAutoFit/>
+          </a:bodyPr>
+          <a:lstStyle/>
+          <a:p>
+            <a:r>
+              <a:rPr lang="en-CH" sz="800" dirty="0"/>
+              <a:t>IJO MUSI – RAPPORT – TOTAL = 12</a:t>
+            </a:r>
+          </a:p>
+          <a:p>
+            <a:pPr marL="285750" indent="-285750">
+              <a:buFontTx/>
+              <a:buChar char="-"/>
+            </a:pPr>
+            <a:r>
+              <a:rPr lang="en-CH" sz="800" dirty="0"/>
+              <a:t>Rassembler mes archives - 0</a:t>
+            </a:r>
+          </a:p>
+          <a:p>
+            <a:pPr marL="285750" indent="-285750">
+              <a:buFontTx/>
+              <a:buChar char="-"/>
+            </a:pPr>
+            <a:r>
+              <a:rPr lang="en-CH" sz="800" dirty="0"/>
+              <a:t>Trouver et lire 2-3 articles recherche-création (se concentrer sur la forme et méthode) (1)</a:t>
+            </a:r>
+          </a:p>
+          <a:p>
+            <a:pPr marL="285750" indent="-285750">
+              <a:buFontTx/>
+              <a:buChar char="-"/>
+            </a:pPr>
+            <a:r>
+              <a:rPr lang="en-CH" sz="800" dirty="0"/>
+              <a:t>Rassembler ludographie (0.5)</a:t>
+            </a:r>
+          </a:p>
+          <a:p>
+            <a:pPr marL="285750" indent="-285750">
+              <a:buFontTx/>
+              <a:buChar char="-"/>
+            </a:pPr>
+            <a:r>
+              <a:rPr lang="en-CH" sz="800" dirty="0"/>
+              <a:t>Rassembler bibliographie (3)</a:t>
+            </a:r>
+          </a:p>
+          <a:p>
+            <a:pPr marL="285750" indent="-285750">
+              <a:buFontTx/>
+              <a:buChar char="-"/>
+            </a:pPr>
+            <a:r>
+              <a:rPr lang="en-CH" sz="800" dirty="0"/>
+              <a:t>Définir structure du rapport (0.5)</a:t>
+            </a:r>
+          </a:p>
+          <a:p>
+            <a:pPr marL="285750" indent="-285750">
+              <a:buFontTx/>
+              <a:buChar char="-"/>
+            </a:pPr>
+            <a:r>
+              <a:rPr lang="en-CH" sz="800" dirty="0"/>
+              <a:t>Écriture (5)</a:t>
+            </a:r>
+          </a:p>
+          <a:p>
+            <a:pPr marL="285750" indent="-285750">
+              <a:buFontTx/>
+              <a:buChar char="-"/>
+            </a:pPr>
+            <a:r>
+              <a:rPr lang="en-CH" sz="800" dirty="0"/>
+              <a:t>Présentation (2)</a:t>
+            </a:r>
+          </a:p>
+          <a:p>
+            <a:endParaRPr lang="en-CH" sz="800" dirty="0"/>
+          </a:p>
+        </p:txBody>
+      </p:sp>
+      <p:sp>
+        <p:nvSpPr>
+          <p:cNvPr id="9" name="TextBox 8">
+            <a:extLst>
+              <a:ext uri="{FF2B5EF4-FFF2-40B4-BE49-F238E27FC236}">
+                <a16:creationId xmlns:a16="http://schemas.microsoft.com/office/drawing/2014/main" id="{4B37C839-BE49-89D9-3829-9A59E7C27625}"/>
+              </a:ext>
+            </a:extLst>
+          </p:cNvPr>
+          <p:cNvSpPr txBox="1"/>
+          <p:nvPr/>
+        </p:nvSpPr>
+        <p:spPr>
+          <a:xfrm>
+            <a:off x="7600209" y="0"/>
+            <a:ext cx="4475777" cy="369332"/>
+          </a:xfrm>
+          <a:prstGeom prst="rect">
+            <a:avLst/>
+          </a:prstGeom>
+          <a:noFill/>
+        </p:spPr>
+        <p:txBody>
+          <a:bodyPr wrap="none" rtlCol="0">
+            <a:spAutoFit/>
+          </a:bodyPr>
+          <a:lstStyle/>
+          <a:p>
+            <a:r>
+              <a:rPr lang="en-CH" dirty="0"/>
+              <a:t>Trucs à mettre sur kanban mais pas à planifier</a:t>
+            </a:r>
+          </a:p>
+        </p:txBody>
+      </p:sp>
+      <p:sp>
+        <p:nvSpPr>
+          <p:cNvPr id="10" name="TextBox 9">
+            <a:extLst>
+              <a:ext uri="{FF2B5EF4-FFF2-40B4-BE49-F238E27FC236}">
+                <a16:creationId xmlns:a16="http://schemas.microsoft.com/office/drawing/2014/main" id="{541BA0F0-A9C9-1EA7-0840-5E5E8F74146F}"/>
+              </a:ext>
+            </a:extLst>
+          </p:cNvPr>
+          <p:cNvSpPr txBox="1"/>
+          <p:nvPr/>
+        </p:nvSpPr>
+        <p:spPr>
+          <a:xfrm>
+            <a:off x="2624446" y="3087584"/>
+            <a:ext cx="4540858" cy="369332"/>
+          </a:xfrm>
+          <a:prstGeom prst="rect">
+            <a:avLst/>
+          </a:prstGeom>
+          <a:noFill/>
+        </p:spPr>
+        <p:txBody>
+          <a:bodyPr wrap="none" rtlCol="0">
+            <a:spAutoFit/>
+          </a:bodyPr>
+          <a:lstStyle/>
+          <a:p>
+            <a:r>
+              <a:rPr lang="en-CH" dirty="0"/>
+              <a:t>VISU – SCATERPLOT UNIQUEMENT – TOTAL = 3</a:t>
+            </a:r>
+          </a:p>
+        </p:txBody>
+      </p:sp>
+      <p:sp>
+        <p:nvSpPr>
+          <p:cNvPr id="11" name="TextBox 10">
+            <a:extLst>
+              <a:ext uri="{FF2B5EF4-FFF2-40B4-BE49-F238E27FC236}">
+                <a16:creationId xmlns:a16="http://schemas.microsoft.com/office/drawing/2014/main" id="{7253A949-CCB5-97BA-857F-C49CA81616F9}"/>
+              </a:ext>
+            </a:extLst>
+          </p:cNvPr>
+          <p:cNvSpPr txBox="1"/>
+          <p:nvPr/>
+        </p:nvSpPr>
+        <p:spPr>
+          <a:xfrm>
+            <a:off x="2743200" y="3633850"/>
+            <a:ext cx="1886478" cy="369332"/>
+          </a:xfrm>
+          <a:prstGeom prst="rect">
+            <a:avLst/>
+          </a:prstGeom>
+          <a:noFill/>
+        </p:spPr>
+        <p:txBody>
+          <a:bodyPr wrap="none" rtlCol="0">
+            <a:spAutoFit/>
+          </a:bodyPr>
+          <a:lstStyle/>
+          <a:p>
+            <a:r>
+              <a:rPr lang="en-CH" dirty="0"/>
+              <a:t>PHILO – TOTAL = 6</a:t>
+            </a:r>
+          </a:p>
+        </p:txBody>
+      </p:sp>
+      <p:sp>
+        <p:nvSpPr>
+          <p:cNvPr id="12" name="TextBox 11">
+            <a:extLst>
+              <a:ext uri="{FF2B5EF4-FFF2-40B4-BE49-F238E27FC236}">
+                <a16:creationId xmlns:a16="http://schemas.microsoft.com/office/drawing/2014/main" id="{9F5350B9-AF69-F0A0-0583-3DBA0C34439E}"/>
+              </a:ext>
+            </a:extLst>
+          </p:cNvPr>
+          <p:cNvSpPr txBox="1"/>
+          <p:nvPr/>
+        </p:nvSpPr>
+        <p:spPr>
+          <a:xfrm>
+            <a:off x="3408218" y="4595750"/>
+            <a:ext cx="3059556" cy="1477328"/>
+          </a:xfrm>
+          <a:prstGeom prst="rect">
+            <a:avLst/>
+          </a:prstGeom>
+          <a:noFill/>
+        </p:spPr>
+        <p:txBody>
+          <a:bodyPr wrap="none" rtlCol="0">
+            <a:spAutoFit/>
+          </a:bodyPr>
+          <a:lstStyle/>
+          <a:p>
+            <a:r>
+              <a:rPr lang="en-CH" dirty="0">
+                <a:solidFill>
+                  <a:schemeClr val="accent6">
+                    <a:lumMod val="75000"/>
+                  </a:schemeClr>
+                </a:solidFill>
+              </a:rPr>
+              <a:t>MÉMOIRE – 1 semestre</a:t>
+            </a:r>
+          </a:p>
+          <a:p>
+            <a:r>
+              <a:rPr lang="en-CH" dirty="0">
+                <a:solidFill>
+                  <a:schemeClr val="accent6">
+                    <a:lumMod val="75000"/>
+                  </a:schemeClr>
+                </a:solidFill>
+              </a:rPr>
+              <a:t>début : 14 septembre 26</a:t>
+            </a:r>
+          </a:p>
+          <a:p>
+            <a:r>
+              <a:rPr lang="en-CH" dirty="0">
+                <a:solidFill>
+                  <a:schemeClr val="accent6">
+                    <a:lumMod val="75000"/>
+                  </a:schemeClr>
+                </a:solidFill>
+              </a:rPr>
+              <a:t>fin des cours : 18 décembre 26</a:t>
+            </a:r>
+          </a:p>
+          <a:p>
+            <a:r>
+              <a:rPr lang="en-CH" dirty="0">
+                <a:solidFill>
+                  <a:schemeClr val="accent6">
+                    <a:lumMod val="75000"/>
+                  </a:schemeClr>
+                </a:solidFill>
+              </a:rPr>
+              <a:t>début examens : 15 janvier 26</a:t>
+            </a:r>
+          </a:p>
+          <a:p>
+            <a:r>
+              <a:rPr lang="en-CH" dirty="0">
+                <a:solidFill>
+                  <a:schemeClr val="accent6">
+                    <a:lumMod val="75000"/>
+                  </a:schemeClr>
+                </a:solidFill>
+              </a:rPr>
+              <a:t> fin examnes : 6 février 26</a:t>
+            </a:r>
+          </a:p>
+        </p:txBody>
+      </p:sp>
+      <p:sp>
+        <p:nvSpPr>
+          <p:cNvPr id="13" name="TextBox 12">
+            <a:extLst>
+              <a:ext uri="{FF2B5EF4-FFF2-40B4-BE49-F238E27FC236}">
+                <a16:creationId xmlns:a16="http://schemas.microsoft.com/office/drawing/2014/main" id="{C313FFE6-3F73-118D-1960-82049E609467}"/>
+              </a:ext>
+            </a:extLst>
+          </p:cNvPr>
+          <p:cNvSpPr txBox="1"/>
+          <p:nvPr/>
+        </p:nvSpPr>
+        <p:spPr>
+          <a:xfrm>
+            <a:off x="8348353" y="2553195"/>
+            <a:ext cx="2510816" cy="369332"/>
+          </a:xfrm>
+          <a:prstGeom prst="rect">
+            <a:avLst/>
+          </a:prstGeom>
+          <a:noFill/>
+        </p:spPr>
+        <p:txBody>
+          <a:bodyPr wrap="none" rtlCol="0">
+            <a:spAutoFit/>
+          </a:bodyPr>
+          <a:lstStyle/>
+          <a:p>
+            <a:r>
+              <a:rPr lang="en-CH" dirty="0"/>
+              <a:t>SPEC – CIRA - TOTAL = 30</a:t>
+            </a:r>
+          </a:p>
+        </p:txBody>
+      </p:sp>
+      <p:sp>
+        <p:nvSpPr>
+          <p:cNvPr id="14" name="TextBox 13">
+            <a:extLst>
+              <a:ext uri="{FF2B5EF4-FFF2-40B4-BE49-F238E27FC236}">
+                <a16:creationId xmlns:a16="http://schemas.microsoft.com/office/drawing/2014/main" id="{79E51229-0B9D-991A-48BB-42DD54AA332F}"/>
+              </a:ext>
+            </a:extLst>
+          </p:cNvPr>
+          <p:cNvSpPr txBox="1"/>
+          <p:nvPr/>
+        </p:nvSpPr>
+        <p:spPr>
+          <a:xfrm>
+            <a:off x="8170224" y="3301340"/>
+            <a:ext cx="3446969" cy="369332"/>
+          </a:xfrm>
+          <a:prstGeom prst="rect">
+            <a:avLst/>
+          </a:prstGeom>
+          <a:noFill/>
+        </p:spPr>
+        <p:txBody>
+          <a:bodyPr wrap="none" rtlCol="0">
+            <a:spAutoFit/>
+          </a:bodyPr>
+          <a:lstStyle/>
+          <a:p>
+            <a:r>
+              <a:rPr lang="en-CH" dirty="0">
+                <a:solidFill>
+                  <a:schemeClr val="accent6">
+                    <a:lumMod val="75000"/>
+                  </a:schemeClr>
+                </a:solidFill>
+              </a:rPr>
+              <a:t>STAGES – DamaDama – TOTAL = 15</a:t>
+            </a:r>
+          </a:p>
+        </p:txBody>
+      </p:sp>
+      <p:sp>
+        <p:nvSpPr>
+          <p:cNvPr id="15" name="TextBox 14">
+            <a:extLst>
+              <a:ext uri="{FF2B5EF4-FFF2-40B4-BE49-F238E27FC236}">
+                <a16:creationId xmlns:a16="http://schemas.microsoft.com/office/drawing/2014/main" id="{831E5750-3A96-13A8-4A01-8C221B068534}"/>
+              </a:ext>
+            </a:extLst>
+          </p:cNvPr>
+          <p:cNvSpPr txBox="1"/>
+          <p:nvPr/>
+        </p:nvSpPr>
+        <p:spPr>
+          <a:xfrm>
+            <a:off x="8156370" y="3928753"/>
+            <a:ext cx="3131563" cy="369332"/>
+          </a:xfrm>
+          <a:prstGeom prst="rect">
+            <a:avLst/>
+          </a:prstGeom>
+          <a:noFill/>
+        </p:spPr>
+        <p:txBody>
+          <a:bodyPr wrap="none" rtlCol="0">
+            <a:spAutoFit/>
+          </a:bodyPr>
+          <a:lstStyle/>
+          <a:p>
+            <a:r>
+              <a:rPr lang="en-CH" dirty="0">
+                <a:solidFill>
+                  <a:schemeClr val="accent6">
+                    <a:lumMod val="75000"/>
+                  </a:schemeClr>
+                </a:solidFill>
+              </a:rPr>
+              <a:t>STAGES – Naraven – TOTAL = 15</a:t>
+            </a:r>
+          </a:p>
+        </p:txBody>
+      </p:sp>
+      <p:sp>
+        <p:nvSpPr>
+          <p:cNvPr id="16" name="TextBox 15">
+            <a:extLst>
+              <a:ext uri="{FF2B5EF4-FFF2-40B4-BE49-F238E27FC236}">
+                <a16:creationId xmlns:a16="http://schemas.microsoft.com/office/drawing/2014/main" id="{9D7B72F6-2CAE-A18F-1EF6-79EB2D94581F}"/>
+              </a:ext>
+            </a:extLst>
+          </p:cNvPr>
+          <p:cNvSpPr txBox="1"/>
+          <p:nvPr/>
+        </p:nvSpPr>
+        <p:spPr>
+          <a:xfrm>
+            <a:off x="8154391" y="4520540"/>
+            <a:ext cx="3424720" cy="369332"/>
+          </a:xfrm>
+          <a:prstGeom prst="rect">
+            <a:avLst/>
+          </a:prstGeom>
+          <a:noFill/>
+        </p:spPr>
+        <p:txBody>
+          <a:bodyPr wrap="none" rtlCol="0">
+            <a:spAutoFit/>
+          </a:bodyPr>
+          <a:lstStyle/>
+          <a:p>
+            <a:r>
+              <a:rPr lang="en-CH" dirty="0">
+                <a:solidFill>
+                  <a:schemeClr val="accent6">
+                    <a:lumMod val="75000"/>
+                  </a:schemeClr>
+                </a:solidFill>
+              </a:rPr>
+              <a:t>STAGES – Sémaphore – TOTAL = 20</a:t>
+            </a:r>
+          </a:p>
+        </p:txBody>
+      </p:sp>
+      <p:sp>
+        <p:nvSpPr>
+          <p:cNvPr id="17" name="TextBox 16">
+            <a:extLst>
+              <a:ext uri="{FF2B5EF4-FFF2-40B4-BE49-F238E27FC236}">
+                <a16:creationId xmlns:a16="http://schemas.microsoft.com/office/drawing/2014/main" id="{D373D3DA-FDCC-C74A-7C9B-685F25ACDD05}"/>
+              </a:ext>
+            </a:extLst>
+          </p:cNvPr>
+          <p:cNvSpPr txBox="1"/>
+          <p:nvPr/>
+        </p:nvSpPr>
+        <p:spPr>
+          <a:xfrm>
+            <a:off x="7872413" y="1843088"/>
+            <a:ext cx="2956194" cy="523220"/>
+          </a:xfrm>
+          <a:prstGeom prst="rect">
+            <a:avLst/>
+          </a:prstGeom>
+          <a:noFill/>
+        </p:spPr>
+        <p:txBody>
+          <a:bodyPr wrap="none" rtlCol="0">
+            <a:spAutoFit/>
+          </a:bodyPr>
+          <a:lstStyle/>
+          <a:p>
+            <a:r>
+              <a:rPr lang="en-CH" dirty="0"/>
+              <a:t>SPEC – “COURS” – TOTAL = 14</a:t>
+            </a:r>
+          </a:p>
+          <a:p>
+            <a:r>
+              <a:rPr lang="en-CH" sz="1000" dirty="0"/>
+              <a:t>	- 55 heures. 4h / jour</a:t>
+            </a:r>
+          </a:p>
+        </p:txBody>
+      </p:sp>
+      <p:sp>
+        <p:nvSpPr>
+          <p:cNvPr id="3" name="TextBox 2">
+            <a:extLst>
+              <a:ext uri="{FF2B5EF4-FFF2-40B4-BE49-F238E27FC236}">
+                <a16:creationId xmlns:a16="http://schemas.microsoft.com/office/drawing/2014/main" id="{90671A90-F7B4-FE99-2E1F-D05D56FA0876}"/>
+              </a:ext>
+            </a:extLst>
+          </p:cNvPr>
+          <p:cNvSpPr txBox="1"/>
+          <p:nvPr/>
+        </p:nvSpPr>
+        <p:spPr>
+          <a:xfrm>
+            <a:off x="9157855" y="5888183"/>
+            <a:ext cx="2459712" cy="369332"/>
+          </a:xfrm>
+          <a:prstGeom prst="rect">
+            <a:avLst/>
+          </a:prstGeom>
+          <a:noFill/>
+        </p:spPr>
+        <p:txBody>
+          <a:bodyPr wrap="none" rtlCol="0">
+            <a:spAutoFit/>
+          </a:bodyPr>
+          <a:lstStyle/>
+          <a:p>
+            <a:r>
+              <a:rPr lang="en-CH" dirty="0"/>
+              <a:t>TOTAL (sans stages) = 87</a:t>
+            </a:r>
+          </a:p>
+        </p:txBody>
+      </p:sp>
+    </p:spTree>
+    <p:extLst>
+      <p:ext uri="{BB962C8B-B14F-4D97-AF65-F5344CB8AC3E}">
+        <p14:creationId xmlns:p14="http://schemas.microsoft.com/office/powerpoint/2010/main" val="1068111879"/>
+      </p:ext>
+    </p:extLst>
+  </p:cSld>
+  <p:clrMapOvr>
+    <a:masterClrMapping/>
+  </p:clrMapOvr>
+</p:sld>
+</file>
+
+<file path=ppt/slides/slide6.xml><?xml version="1.0" encoding="utf-8"?>
+<p:sld xmlns:a="http://schemas.openxmlformats.org/drawingml/2006/main" xmlns:r="http://schemas.openxmlformats.org/officeDocument/2006/relationships" xmlns:p="http://schemas.openxmlformats.org/presentationml/2006/main">
+  <p:cSld>
+    <p:spTree>
+      <p:nvGrpSpPr>
+        <p:cNvPr id="1" name=""/>
+        <p:cNvGrpSpPr/>
+        <p:nvPr/>
+      </p:nvGrpSpPr>
+      <p:grpSpPr>
+        <a:xfrm>
+          <a:off x="0" y="0"/>
+          <a:ext cx="0" cy="0"/>
+          <a:chOff x="0" y="0"/>
+          <a:chExt cx="0" cy="0"/>
+        </a:xfrm>
+      </p:grpSpPr>
+      <p:graphicFrame>
+        <p:nvGraphicFramePr>
+          <p:cNvPr id="4" name="Table 4">
+            <a:extLst>
+              <a:ext uri="{FF2B5EF4-FFF2-40B4-BE49-F238E27FC236}">
+                <a16:creationId xmlns:a16="http://schemas.microsoft.com/office/drawing/2014/main" id="{0CBEBCE2-FDE3-8B49-FE37-6FFC8AD24F62}"/>
+              </a:ext>
+            </a:extLst>
+          </p:cNvPr>
+          <p:cNvGraphicFramePr>
+            <a:graphicFrameLocks noGrp="1"/>
+          </p:cNvGraphicFramePr>
+          <p:nvPr>
+            <p:ph idx="1"/>
+            <p:extLst>
+              <p:ext uri="{D42A27DB-BD31-4B8C-83A1-F6EECF244321}">
+                <p14:modId xmlns:p14="http://schemas.microsoft.com/office/powerpoint/2010/main" val="254344756"/>
+              </p:ext>
+            </p:extLst>
+          </p:nvPr>
+        </p:nvGraphicFramePr>
+        <p:xfrm>
+          <a:off x="128587" y="1868487"/>
+          <a:ext cx="10532536" cy="1483360"/>
+        </p:xfrm>
+        <a:graphic>
+          <a:graphicData uri="http://schemas.openxmlformats.org/drawingml/2006/table">
+            <a:tbl>
+              <a:tblPr firstRow="1" bandRow="1">
+                <a:tableStyleId>{5C22544A-7EE6-4342-B048-85BDC9FD1C3A}</a:tableStyleId>
+              </a:tblPr>
+              <a:tblGrid>
+                <a:gridCol w="1316567">
+                  <a:extLst>
+                    <a:ext uri="{9D8B030D-6E8A-4147-A177-3AD203B41FA5}">
+                      <a16:colId xmlns:a16="http://schemas.microsoft.com/office/drawing/2014/main" val="3886050130"/>
+                    </a:ext>
+                  </a:extLst>
+                </a:gridCol>
+                <a:gridCol w="1316567">
+                  <a:extLst>
+                    <a:ext uri="{9D8B030D-6E8A-4147-A177-3AD203B41FA5}">
+                      <a16:colId xmlns:a16="http://schemas.microsoft.com/office/drawing/2014/main" val="1508651909"/>
+                    </a:ext>
+                  </a:extLst>
+                </a:gridCol>
+                <a:gridCol w="1316567">
+                  <a:extLst>
+                    <a:ext uri="{9D8B030D-6E8A-4147-A177-3AD203B41FA5}">
+                      <a16:colId xmlns:a16="http://schemas.microsoft.com/office/drawing/2014/main" val="2062040089"/>
+                    </a:ext>
+                  </a:extLst>
+                </a:gridCol>
+                <a:gridCol w="1316567">
+                  <a:extLst>
+                    <a:ext uri="{9D8B030D-6E8A-4147-A177-3AD203B41FA5}">
+                      <a16:colId xmlns:a16="http://schemas.microsoft.com/office/drawing/2014/main" val="2737023149"/>
+                    </a:ext>
+                  </a:extLst>
+                </a:gridCol>
+                <a:gridCol w="1316567">
+                  <a:extLst>
+                    <a:ext uri="{9D8B030D-6E8A-4147-A177-3AD203B41FA5}">
+                      <a16:colId xmlns:a16="http://schemas.microsoft.com/office/drawing/2014/main" val="3887682633"/>
+                    </a:ext>
+                  </a:extLst>
+                </a:gridCol>
+                <a:gridCol w="1316567">
+                  <a:extLst>
+                    <a:ext uri="{9D8B030D-6E8A-4147-A177-3AD203B41FA5}">
+                      <a16:colId xmlns:a16="http://schemas.microsoft.com/office/drawing/2014/main" val="5628773"/>
+                    </a:ext>
+                  </a:extLst>
+                </a:gridCol>
+                <a:gridCol w="1316567">
+                  <a:extLst>
+                    <a:ext uri="{9D8B030D-6E8A-4147-A177-3AD203B41FA5}">
+                      <a16:colId xmlns:a16="http://schemas.microsoft.com/office/drawing/2014/main" val="1453961281"/>
+                    </a:ext>
+                  </a:extLst>
+                </a:gridCol>
+                <a:gridCol w="1316567">
+                  <a:extLst>
+                    <a:ext uri="{9D8B030D-6E8A-4147-A177-3AD203B41FA5}">
+                      <a16:colId xmlns:a16="http://schemas.microsoft.com/office/drawing/2014/main" val="1068511216"/>
+                    </a:ext>
+                  </a:extLst>
+                </a:gridCol>
+              </a:tblGrid>
+              <a:tr h="370840">
+                <a:tc>
+                  <a:txBody>
+                    <a:bodyPr/>
+                    <a:lstStyle/>
+                    <a:p>
+                      <a:pPr algn="ctr"/>
+                      <a:r>
+                        <a:rPr lang="en-CH" dirty="0"/>
+                        <a:t>FÉVRIER</a:t>
+                      </a:r>
+                    </a:p>
+                  </a:txBody>
+                  <a:tcPr/>
+                </a:tc>
+                <a:tc>
+                  <a:txBody>
+                    <a:bodyPr/>
+                    <a:lstStyle/>
+                    <a:p>
+                      <a:pPr algn="ctr"/>
+                      <a:r>
+                        <a:rPr lang="en-CH" dirty="0"/>
+                        <a:t>MARS</a:t>
+                      </a:r>
+                    </a:p>
+                  </a:txBody>
+                  <a:tcPr/>
+                </a:tc>
+                <a:tc>
+                  <a:txBody>
+                    <a:bodyPr/>
+                    <a:lstStyle/>
+                    <a:p>
+                      <a:pPr algn="ctr"/>
+                      <a:r>
+                        <a:rPr lang="en-CH" dirty="0"/>
+                        <a:t>AVRIL</a:t>
+                      </a:r>
+                    </a:p>
+                  </a:txBody>
+                  <a:tcPr/>
+                </a:tc>
+                <a:tc>
+                  <a:txBody>
+                    <a:bodyPr/>
+                    <a:lstStyle/>
+                    <a:p>
+                      <a:pPr algn="ctr"/>
+                      <a:r>
+                        <a:rPr lang="en-CH" dirty="0"/>
+                        <a:t>MAI</a:t>
+                      </a:r>
+                    </a:p>
+                  </a:txBody>
+                  <a:tcPr/>
+                </a:tc>
+                <a:tc>
+                  <a:txBody>
+                    <a:bodyPr/>
+                    <a:lstStyle/>
+                    <a:p>
+                      <a:pPr algn="ctr"/>
+                      <a:r>
+                        <a:rPr lang="en-CH" dirty="0"/>
+                        <a:t>JUIN</a:t>
+                      </a:r>
+                    </a:p>
+                  </a:txBody>
+                  <a:tcPr/>
+                </a:tc>
+                <a:tc>
+                  <a:txBody>
+                    <a:bodyPr/>
+                    <a:lstStyle/>
+                    <a:p>
+                      <a:pPr algn="ctr"/>
+                      <a:r>
+                        <a:rPr lang="en-CH" dirty="0"/>
+                        <a:t>JUILLET</a:t>
+                      </a:r>
+                    </a:p>
+                  </a:txBody>
+                  <a:tcPr/>
+                </a:tc>
+                <a:tc>
+                  <a:txBody>
+                    <a:bodyPr/>
+                    <a:lstStyle/>
+                    <a:p>
+                      <a:pPr algn="ctr"/>
+                      <a:r>
+                        <a:rPr lang="en-CH" dirty="0"/>
+                        <a:t>AOÛT</a:t>
+                      </a:r>
+                    </a:p>
+                  </a:txBody>
+                  <a:tcPr/>
+                </a:tc>
+                <a:tc>
+                  <a:txBody>
+                    <a:bodyPr/>
+                    <a:lstStyle/>
+                    <a:p>
+                      <a:pPr algn="ctr"/>
+                      <a:r>
+                        <a:rPr lang="en-CH" dirty="0"/>
+                        <a:t>SEPTEMBRE</a:t>
+                      </a:r>
+                    </a:p>
+                  </a:txBody>
+                  <a:tcPr/>
+                </a:tc>
+                <a:extLst>
+                  <a:ext uri="{0D108BD9-81ED-4DB2-BD59-A6C34878D82A}">
+                    <a16:rowId xmlns:a16="http://schemas.microsoft.com/office/drawing/2014/main" val="1345547146"/>
+                  </a:ext>
+                </a:extLst>
+              </a:tr>
+              <a:tr h="370840">
+                <a:tc>
+                  <a:txBody>
+                    <a:bodyPr/>
+                    <a:lstStyle/>
+                    <a:p>
+                      <a:pPr algn="ctr"/>
+                      <a:r>
+                        <a:rPr lang="en-CH" dirty="0"/>
+                        <a:t>10</a:t>
+                      </a:r>
+                    </a:p>
+                  </a:txBody>
+                  <a:tcPr/>
+                </a:tc>
+                <a:tc>
+                  <a:txBody>
+                    <a:bodyPr/>
+                    <a:lstStyle/>
+                    <a:p>
+                      <a:pPr algn="ctr"/>
+                      <a:r>
+                        <a:rPr lang="en-CH" dirty="0"/>
+                        <a:t>7</a:t>
+                      </a:r>
+                    </a:p>
+                  </a:txBody>
+                  <a:tcPr/>
+                </a:tc>
+                <a:tc>
+                  <a:txBody>
+                    <a:bodyPr/>
+                    <a:lstStyle/>
+                    <a:p>
+                      <a:pPr algn="ctr"/>
+                      <a:r>
+                        <a:rPr lang="en-CH" dirty="0"/>
+                        <a:t>14</a:t>
+                      </a:r>
+                    </a:p>
+                  </a:txBody>
+                  <a:tcPr/>
+                </a:tc>
+                <a:tc>
+                  <a:txBody>
+                    <a:bodyPr/>
+                    <a:lstStyle/>
+                    <a:p>
+                      <a:pPr algn="ctr"/>
+                      <a:r>
+                        <a:rPr lang="en-CH" dirty="0"/>
+                        <a:t>16</a:t>
+                      </a:r>
+                    </a:p>
+                  </a:txBody>
+                  <a:tcPr/>
+                </a:tc>
+                <a:tc>
+                  <a:txBody>
+                    <a:bodyPr/>
+                    <a:lstStyle/>
+                    <a:p>
+                      <a:pPr algn="ctr"/>
+                      <a:r>
+                        <a:rPr lang="en-CH" dirty="0"/>
+                        <a:t>14</a:t>
+                      </a:r>
+                    </a:p>
+                  </a:txBody>
+                  <a:tcPr/>
+                </a:tc>
+                <a:tc>
+                  <a:txBody>
+                    <a:bodyPr/>
+                    <a:lstStyle/>
+                    <a:p>
+                      <a:pPr algn="ctr"/>
+                      <a:r>
+                        <a:rPr lang="en-CH" dirty="0"/>
+                        <a:t>13</a:t>
+                      </a:r>
+                    </a:p>
+                  </a:txBody>
+                  <a:tcPr/>
+                </a:tc>
+                <a:tc>
+                  <a:txBody>
+                    <a:bodyPr/>
+                    <a:lstStyle/>
+                    <a:p>
+                      <a:pPr algn="ctr"/>
+                      <a:r>
+                        <a:rPr lang="en-CH" dirty="0"/>
+                        <a:t>13</a:t>
+                      </a:r>
+                    </a:p>
+                  </a:txBody>
+                  <a:tcPr/>
+                </a:tc>
+                <a:tc>
+                  <a:txBody>
+                    <a:bodyPr/>
+                    <a:lstStyle/>
+                    <a:p>
+                      <a:pPr algn="ctr"/>
+                      <a:r>
+                        <a:rPr lang="en-CH" dirty="0"/>
+                        <a:t>5</a:t>
+                      </a:r>
+                    </a:p>
+                  </a:txBody>
+                  <a:tcPr/>
+                </a:tc>
+                <a:extLst>
+                  <a:ext uri="{0D108BD9-81ED-4DB2-BD59-A6C34878D82A}">
+                    <a16:rowId xmlns:a16="http://schemas.microsoft.com/office/drawing/2014/main" val="1502607584"/>
+                  </a:ext>
+                </a:extLst>
+              </a:tr>
+              <a:tr h="370840">
+                <a:tc>
+                  <a:txBody>
+                    <a:bodyPr/>
+                    <a:lstStyle/>
+                    <a:p>
+                      <a:pPr algn="ctr"/>
+                      <a:endParaRPr lang="en-CH" dirty="0"/>
+                    </a:p>
+                  </a:txBody>
+                  <a:tcPr/>
+                </a:tc>
+                <a:tc>
+                  <a:txBody>
+                    <a:bodyPr/>
+                    <a:lstStyle/>
+                    <a:p>
+                      <a:pPr algn="ctr"/>
+                      <a:endParaRPr lang="en-CH" dirty="0"/>
+                    </a:p>
+                  </a:txBody>
+                  <a:tcPr/>
+                </a:tc>
+                <a:tc>
+                  <a:txBody>
+                    <a:bodyPr/>
+                    <a:lstStyle/>
+                    <a:p>
+                      <a:pPr algn="ctr"/>
+                      <a:endParaRPr lang="en-CH" dirty="0"/>
+                    </a:p>
+                  </a:txBody>
+                  <a:tcPr/>
+                </a:tc>
+                <a:tc>
+                  <a:txBody>
+                    <a:bodyPr/>
+                    <a:lstStyle/>
+                    <a:p>
+                      <a:pPr algn="ctr"/>
+                      <a:endParaRPr lang="en-CH" dirty="0"/>
+                    </a:p>
+                  </a:txBody>
+                  <a:tcPr/>
+                </a:tc>
+                <a:tc>
+                  <a:txBody>
+                    <a:bodyPr/>
+                    <a:lstStyle/>
+                    <a:p>
+                      <a:pPr algn="ctr"/>
+                      <a:endParaRPr lang="en-CH" dirty="0"/>
+                    </a:p>
+                  </a:txBody>
+                  <a:tcPr/>
+                </a:tc>
+                <a:tc>
+                  <a:txBody>
+                    <a:bodyPr/>
+                    <a:lstStyle/>
+                    <a:p>
+                      <a:pPr algn="ctr"/>
+                      <a:endParaRPr lang="en-CH" dirty="0"/>
+                    </a:p>
+                  </a:txBody>
+                  <a:tcPr/>
+                </a:tc>
+                <a:tc>
+                  <a:txBody>
+                    <a:bodyPr/>
+                    <a:lstStyle/>
+                    <a:p>
+                      <a:pPr algn="ctr"/>
+                      <a:endParaRPr lang="en-CH" dirty="0"/>
+                    </a:p>
+                  </a:txBody>
+                  <a:tcPr/>
+                </a:tc>
+                <a:tc>
+                  <a:txBody>
+                    <a:bodyPr/>
+                    <a:lstStyle/>
+                    <a:p>
+                      <a:pPr algn="ctr"/>
+                      <a:endParaRPr lang="en-CH" dirty="0"/>
+                    </a:p>
+                  </a:txBody>
+                  <a:tcPr/>
+                </a:tc>
+                <a:extLst>
+                  <a:ext uri="{0D108BD9-81ED-4DB2-BD59-A6C34878D82A}">
+                    <a16:rowId xmlns:a16="http://schemas.microsoft.com/office/drawing/2014/main" val="577881736"/>
+                  </a:ext>
+                </a:extLst>
+              </a:tr>
+              <a:tr h="370840">
+                <a:tc>
+                  <a:txBody>
+                    <a:bodyPr/>
+                    <a:lstStyle/>
+                    <a:p>
+                      <a:pPr algn="ctr"/>
+                      <a:endParaRPr lang="en-CH" dirty="0"/>
+                    </a:p>
+                  </a:txBody>
+                  <a:tcPr/>
+                </a:tc>
+                <a:tc>
+                  <a:txBody>
+                    <a:bodyPr/>
+                    <a:lstStyle/>
+                    <a:p>
+                      <a:pPr algn="ctr"/>
+                      <a:endParaRPr lang="en-CH" dirty="0"/>
+                    </a:p>
+                  </a:txBody>
+                  <a:tcPr/>
+                </a:tc>
+                <a:tc>
+                  <a:txBody>
+                    <a:bodyPr/>
+                    <a:lstStyle/>
+                    <a:p>
+                      <a:pPr algn="ctr"/>
+                      <a:endParaRPr lang="en-CH" dirty="0"/>
                     </a:p>
                   </a:txBody>
                   <a:tcPr/>
@@ -6508,10 +8723,10 @@
       </p:graphicFrame>
       <p:sp>
         <p:nvSpPr>
-          <p:cNvPr id="6" name="TextBox 5">
-            <a:extLst>
-              <a:ext uri="{FF2B5EF4-FFF2-40B4-BE49-F238E27FC236}">
-                <a16:creationId xmlns:a16="http://schemas.microsoft.com/office/drawing/2014/main" id="{9AEDAF53-4A96-CF91-4D5D-7DD7B9C51327}"/>
+          <p:cNvPr id="2" name="TextBox 1">
+            <a:extLst>
+              <a:ext uri="{FF2B5EF4-FFF2-40B4-BE49-F238E27FC236}">
+                <a16:creationId xmlns:a16="http://schemas.microsoft.com/office/drawing/2014/main" id="{DCBD22D0-EF2A-A119-E03F-35AD144DFAE6}"/>
               </a:ext>
             </a:extLst>
           </p:cNvPr>
@@ -6520,8 +8735,8 @@
         </p:nvSpPr>
         <p:spPr>
           <a:xfrm>
-            <a:off x="4857750" y="771526"/>
-            <a:ext cx="3575851" cy="369332"/>
+            <a:off x="2078182" y="858982"/>
+            <a:ext cx="4809522" cy="369332"/>
           </a:xfrm>
           <a:prstGeom prst="rect">
             <a:avLst/>
@@ -6536,7 +8751,42 @@
           <a:p>
             <a:r>
               <a:rPr lang="en-CH" dirty="0"/>
-              <a:t>Total (stages déjà attrribués) = 132 ?</a:t>
+              <a:t>Total (stages + 1j congé / semaine attribués) = 92 </a:t>
+            </a:r>
+          </a:p>
+        </p:txBody>
+      </p:sp>
+      <p:sp>
+        <p:nvSpPr>
+          <p:cNvPr id="5" name="TextBox 4">
+            <a:extLst>
+              <a:ext uri="{FF2B5EF4-FFF2-40B4-BE49-F238E27FC236}">
+                <a16:creationId xmlns:a16="http://schemas.microsoft.com/office/drawing/2014/main" id="{BC5DDD52-DD57-A31C-20EF-947303B462CD}"/>
+              </a:ext>
+            </a:extLst>
+          </p:cNvPr>
+          <p:cNvSpPr txBox="1"/>
+          <p:nvPr/>
+        </p:nvSpPr>
+        <p:spPr>
+          <a:xfrm>
+            <a:off x="2812473" y="4184073"/>
+            <a:ext cx="1467902" cy="369332"/>
+          </a:xfrm>
+          <a:prstGeom prst="rect">
+            <a:avLst/>
+          </a:prstGeom>
+          <a:noFill/>
+        </p:spPr>
+        <p:txBody>
+          <a:bodyPr wrap="none" rtlCol="0">
+            <a:spAutoFit/>
+          </a:bodyPr>
+          <a:lstStyle/>
+          <a:p>
+            <a:r>
+              <a:rPr lang="en-CH" dirty="0"/>
+              <a:t>5 Jours bonus</a:t>
             </a:r>
           </a:p>
         </p:txBody>
@@ -6544,7 +8794,1973 @@
     </p:spTree>
     <p:extLst>
       <p:ext uri="{BB962C8B-B14F-4D97-AF65-F5344CB8AC3E}">
-        <p14:creationId xmlns:p14="http://schemas.microsoft.com/office/powerpoint/2010/main" val="1947291370"/>
+        <p14:creationId xmlns:p14="http://schemas.microsoft.com/office/powerpoint/2010/main" val="65708410"/>
+      </p:ext>
+    </p:extLst>
+  </p:cSld>
+  <p:clrMapOvr>
+    <a:masterClrMapping/>
+  </p:clrMapOvr>
+</p:sld>
+</file>
+
+<file path=ppt/slides/slide7.xml><?xml version="1.0" encoding="utf-8"?>
+<p:sld xmlns:a="http://schemas.openxmlformats.org/drawingml/2006/main" xmlns:r="http://schemas.openxmlformats.org/officeDocument/2006/relationships" xmlns:p="http://schemas.openxmlformats.org/presentationml/2006/main">
+  <p:cSld>
+    <p:spTree>
+      <p:nvGrpSpPr>
+        <p:cNvPr id="1" name=""/>
+        <p:cNvGrpSpPr/>
+        <p:nvPr/>
+      </p:nvGrpSpPr>
+      <p:grpSpPr>
+        <a:xfrm>
+          <a:off x="0" y="0"/>
+          <a:ext cx="0" cy="0"/>
+          <a:chOff x="0" y="0"/>
+          <a:chExt cx="0" cy="0"/>
+        </a:xfrm>
+      </p:grpSpPr>
+      <p:sp>
+        <p:nvSpPr>
+          <p:cNvPr id="2" name="Title 1">
+            <a:extLst>
+              <a:ext uri="{FF2B5EF4-FFF2-40B4-BE49-F238E27FC236}">
+                <a16:creationId xmlns:a16="http://schemas.microsoft.com/office/drawing/2014/main" id="{18D845CC-924C-66A5-FB8D-9E0D4EF1223C}"/>
+              </a:ext>
+            </a:extLst>
+          </p:cNvPr>
+          <p:cNvSpPr>
+            <a:spLocks noGrp="1"/>
+          </p:cNvSpPr>
+          <p:nvPr>
+            <p:ph type="title"/>
+          </p:nvPr>
+        </p:nvSpPr>
+        <p:spPr>
+          <a:xfrm>
+            <a:off x="-178130" y="0"/>
+            <a:ext cx="3527961" cy="822407"/>
+          </a:xfrm>
+        </p:spPr>
+        <p:txBody>
+          <a:bodyPr>
+            <a:normAutofit/>
+          </a:bodyPr>
+          <a:lstStyle/>
+          <a:p>
+            <a:pPr algn="ctr"/>
+            <a:r>
+              <a:rPr lang="en-CH" sz="2000" dirty="0"/>
+              <a:t>Reprise kanban 02/03/26</a:t>
+            </a:r>
+          </a:p>
+        </p:txBody>
+      </p:sp>
+      <p:sp>
+        <p:nvSpPr>
+          <p:cNvPr id="4" name="TextBox 3">
+            <a:extLst>
+              <a:ext uri="{FF2B5EF4-FFF2-40B4-BE49-F238E27FC236}">
+                <a16:creationId xmlns:a16="http://schemas.microsoft.com/office/drawing/2014/main" id="{CFF6B6CC-B0D2-D82B-EFD7-D2A880EF3856}"/>
+              </a:ext>
+            </a:extLst>
+          </p:cNvPr>
+          <p:cNvSpPr txBox="1"/>
+          <p:nvPr/>
+        </p:nvSpPr>
+        <p:spPr>
+          <a:xfrm>
+            <a:off x="665019" y="1496291"/>
+            <a:ext cx="2218877" cy="4893647"/>
+          </a:xfrm>
+          <a:prstGeom prst="rect">
+            <a:avLst/>
+          </a:prstGeom>
+          <a:noFill/>
+        </p:spPr>
+        <p:txBody>
+          <a:bodyPr wrap="none" rtlCol="0">
+            <a:spAutoFit/>
+          </a:bodyPr>
+          <a:lstStyle/>
+          <a:p>
+            <a:r>
+              <a:rPr lang="en-CH" sz="800" dirty="0"/>
+              <a:t>IJO MUSI – JEU – TOTAL = 22</a:t>
+            </a:r>
+          </a:p>
+          <a:p>
+            <a:pPr marL="285750" indent="-285750">
+              <a:buFontTx/>
+              <a:buChar char="-"/>
+            </a:pPr>
+            <a:r>
+              <a:rPr lang="en-CH" sz="800" dirty="0"/>
+              <a:t>Assets TOTAL =  11</a:t>
+            </a:r>
+          </a:p>
+          <a:p>
+            <a:pPr marL="742950" lvl="1" indent="-285750">
+              <a:buFontTx/>
+              <a:buChar char="-"/>
+            </a:pPr>
+            <a:r>
+              <a:rPr lang="en-CH" sz="800" dirty="0"/>
+              <a:t>Squelette : 1</a:t>
+            </a:r>
+          </a:p>
+          <a:p>
+            <a:pPr marL="742950" lvl="1" indent="-285750">
+              <a:buFontTx/>
+              <a:buChar char="-"/>
+            </a:pPr>
+            <a:r>
+              <a:rPr lang="en-CH" sz="800" dirty="0">
+                <a:solidFill>
+                  <a:schemeClr val="bg2">
+                    <a:lumMod val="75000"/>
+                  </a:schemeClr>
+                </a:solidFill>
+              </a:rPr>
+              <a:t>Crafting Room : 2</a:t>
+            </a:r>
+          </a:p>
+          <a:p>
+            <a:pPr marL="742950" lvl="1" indent="-285750">
+              <a:buFontTx/>
+              <a:buChar char="-"/>
+            </a:pPr>
+            <a:r>
+              <a:rPr lang="en-CH" sz="800" dirty="0"/>
+              <a:t>Pond : 1</a:t>
+            </a:r>
+          </a:p>
+          <a:p>
+            <a:pPr marL="742950" lvl="1" indent="-285750">
+              <a:buFontTx/>
+              <a:buChar char="-"/>
+            </a:pPr>
+            <a:r>
+              <a:rPr lang="en-CH" sz="800" dirty="0"/>
+              <a:t>Balcony : 2</a:t>
+            </a:r>
+          </a:p>
+          <a:p>
+            <a:pPr marL="742950" lvl="1" indent="-285750">
+              <a:buFontTx/>
+              <a:buChar char="-"/>
+            </a:pPr>
+            <a:r>
+              <a:rPr lang="en-CH" sz="800" dirty="0"/>
+              <a:t>Water &amp; Waterfall : 2</a:t>
+            </a:r>
+          </a:p>
+          <a:p>
+            <a:pPr marL="742950" lvl="1" indent="-285750">
+              <a:buFontTx/>
+              <a:buChar char="-"/>
+            </a:pPr>
+            <a:r>
+              <a:rPr lang="en-CH" sz="800" dirty="0"/>
+              <a:t>Stairs : 2</a:t>
+            </a:r>
+          </a:p>
+          <a:p>
+            <a:pPr marL="742950" lvl="1" indent="-285750">
+              <a:buFontTx/>
+              <a:buChar char="-"/>
+            </a:pPr>
+            <a:r>
+              <a:rPr lang="en-CH" sz="800" dirty="0"/>
+              <a:t>Textures : 1</a:t>
+            </a:r>
+          </a:p>
+          <a:p>
+            <a:pPr marL="285750" indent="-285750">
+              <a:buFontTx/>
+              <a:buChar char="-"/>
+            </a:pPr>
+            <a:r>
+              <a:rPr lang="en-CH" sz="800" dirty="0"/>
+              <a:t>Écriture TOTAL = 1</a:t>
+            </a:r>
+          </a:p>
+          <a:p>
+            <a:pPr marL="742950" lvl="1" indent="-285750">
+              <a:buFontTx/>
+              <a:buChar char="-"/>
+            </a:pPr>
+            <a:r>
+              <a:rPr lang="en-CH" sz="800" strike="sngStrike" dirty="0"/>
+              <a:t>awakening</a:t>
+            </a:r>
+          </a:p>
+          <a:p>
+            <a:pPr marL="742950" lvl="1" indent="-285750">
+              <a:buFontTx/>
+              <a:buChar char="-"/>
+            </a:pPr>
+            <a:r>
+              <a:rPr lang="en-CH" sz="800" dirty="0"/>
+              <a:t>blame</a:t>
+            </a:r>
+          </a:p>
+          <a:p>
+            <a:pPr marL="742950" lvl="1" indent="-285750">
+              <a:buFontTx/>
+              <a:buChar char="-"/>
+            </a:pPr>
+            <a:r>
+              <a:rPr lang="en-CH" sz="800" strike="sngStrike" dirty="0"/>
+              <a:t>confession</a:t>
+            </a:r>
+          </a:p>
+          <a:p>
+            <a:pPr marL="742950" lvl="1" indent="-285750">
+              <a:buFontTx/>
+              <a:buChar char="-"/>
+            </a:pPr>
+            <a:r>
+              <a:rPr lang="en-CH" sz="800" strike="sngStrike" dirty="0"/>
+              <a:t>last moments</a:t>
+            </a:r>
+          </a:p>
+          <a:p>
+            <a:pPr marL="742950" lvl="1" indent="-285750">
+              <a:buFontTx/>
+              <a:buChar char="-"/>
+            </a:pPr>
+            <a:r>
+              <a:rPr lang="en-CH" sz="800" dirty="0"/>
+              <a:t>playing</a:t>
+            </a:r>
+          </a:p>
+          <a:p>
+            <a:pPr marL="742950" lvl="1" indent="-285750">
+              <a:buFontTx/>
+              <a:buChar char="-"/>
+            </a:pPr>
+            <a:r>
+              <a:rPr lang="en-CH" sz="800" dirty="0"/>
+              <a:t>plants</a:t>
+            </a:r>
+          </a:p>
+          <a:p>
+            <a:pPr marL="742950" lvl="1" indent="-285750">
+              <a:buFontTx/>
+              <a:buChar char="-"/>
+            </a:pPr>
+            <a:r>
+              <a:rPr lang="en-CH" sz="800" strike="sngStrike" dirty="0"/>
+              <a:t>death</a:t>
+            </a:r>
+          </a:p>
+          <a:p>
+            <a:pPr marL="742950" lvl="1" indent="-285750">
+              <a:buFontTx/>
+              <a:buChar char="-"/>
+            </a:pPr>
+            <a:r>
+              <a:rPr lang="en-CH" sz="800" dirty="0"/>
+              <a:t>mural</a:t>
+            </a:r>
+          </a:p>
+          <a:p>
+            <a:pPr marL="285750" indent="-285750">
+              <a:buFontTx/>
+              <a:buChar char="-"/>
+            </a:pPr>
+            <a:r>
+              <a:rPr lang="en-CH" sz="800" dirty="0">
+                <a:solidFill>
+                  <a:schemeClr val="bg2">
+                    <a:lumMod val="75000"/>
+                  </a:schemeClr>
+                </a:solidFill>
+              </a:rPr>
+              <a:t>Voix TOTAL = 4</a:t>
+            </a:r>
+          </a:p>
+          <a:p>
+            <a:pPr marL="742950" lvl="1" indent="-285750">
+              <a:buFontTx/>
+              <a:buChar char="-"/>
+            </a:pPr>
+            <a:r>
+              <a:rPr lang="en-CH" sz="800" dirty="0">
+                <a:solidFill>
+                  <a:schemeClr val="bg2">
+                    <a:lumMod val="75000"/>
+                  </a:schemeClr>
+                </a:solidFill>
+              </a:rPr>
+              <a:t>awakening</a:t>
+            </a:r>
+          </a:p>
+          <a:p>
+            <a:pPr marL="742950" lvl="1" indent="-285750">
+              <a:buFontTx/>
+              <a:buChar char="-"/>
+            </a:pPr>
+            <a:r>
+              <a:rPr lang="en-CH" sz="800" dirty="0">
+                <a:solidFill>
+                  <a:schemeClr val="bg2">
+                    <a:lumMod val="75000"/>
+                  </a:schemeClr>
+                </a:solidFill>
+              </a:rPr>
+              <a:t>blame</a:t>
+            </a:r>
+          </a:p>
+          <a:p>
+            <a:pPr marL="742950" lvl="1" indent="-285750">
+              <a:buFontTx/>
+              <a:buChar char="-"/>
+            </a:pPr>
+            <a:r>
+              <a:rPr lang="en-CH" sz="800" dirty="0">
+                <a:solidFill>
+                  <a:schemeClr val="bg2">
+                    <a:lumMod val="75000"/>
+                  </a:schemeClr>
+                </a:solidFill>
+              </a:rPr>
+              <a:t>confession</a:t>
+            </a:r>
+          </a:p>
+          <a:p>
+            <a:pPr marL="742950" lvl="1" indent="-285750">
+              <a:buFontTx/>
+              <a:buChar char="-"/>
+            </a:pPr>
+            <a:r>
+              <a:rPr lang="en-CH" sz="800" dirty="0">
+                <a:solidFill>
+                  <a:schemeClr val="bg2">
+                    <a:lumMod val="75000"/>
+                  </a:schemeClr>
+                </a:solidFill>
+              </a:rPr>
+              <a:t>last moments</a:t>
+            </a:r>
+          </a:p>
+          <a:p>
+            <a:pPr marL="742950" lvl="1" indent="-285750">
+              <a:buFontTx/>
+              <a:buChar char="-"/>
+            </a:pPr>
+            <a:r>
+              <a:rPr lang="en-CH" sz="800" dirty="0">
+                <a:solidFill>
+                  <a:schemeClr val="bg2">
+                    <a:lumMod val="75000"/>
+                  </a:schemeClr>
+                </a:solidFill>
+              </a:rPr>
+              <a:t>playing</a:t>
+            </a:r>
+          </a:p>
+          <a:p>
+            <a:pPr marL="742950" lvl="1" indent="-285750">
+              <a:buFontTx/>
+              <a:buChar char="-"/>
+            </a:pPr>
+            <a:r>
+              <a:rPr lang="en-CH" sz="800" dirty="0">
+                <a:solidFill>
+                  <a:schemeClr val="bg2">
+                    <a:lumMod val="75000"/>
+                  </a:schemeClr>
+                </a:solidFill>
+              </a:rPr>
+              <a:t>plants</a:t>
+            </a:r>
+          </a:p>
+          <a:p>
+            <a:pPr marL="742950" lvl="1" indent="-285750">
+              <a:buFontTx/>
+              <a:buChar char="-"/>
+            </a:pPr>
+            <a:r>
+              <a:rPr lang="en-CH" sz="800" dirty="0">
+                <a:solidFill>
+                  <a:schemeClr val="bg2">
+                    <a:lumMod val="75000"/>
+                  </a:schemeClr>
+                </a:solidFill>
+              </a:rPr>
+              <a:t>death</a:t>
+            </a:r>
+          </a:p>
+          <a:p>
+            <a:pPr marL="742950" lvl="1" indent="-285750">
+              <a:buFontTx/>
+              <a:buChar char="-"/>
+            </a:pPr>
+            <a:r>
+              <a:rPr lang="en-CH" sz="800" dirty="0">
+                <a:solidFill>
+                  <a:schemeClr val="bg2">
+                    <a:lumMod val="75000"/>
+                  </a:schemeClr>
+                </a:solidFill>
+              </a:rPr>
+              <a:t>mural</a:t>
+            </a:r>
+          </a:p>
+          <a:p>
+            <a:pPr marL="285750" indent="-285750">
+              <a:buFontTx/>
+              <a:buChar char="-"/>
+            </a:pPr>
+            <a:r>
+              <a:rPr lang="en-CH" sz="800" dirty="0">
+                <a:solidFill>
+                  <a:schemeClr val="bg2">
+                    <a:lumMod val="75000"/>
+                  </a:schemeClr>
+                </a:solidFill>
+              </a:rPr>
+              <a:t>Sons TOTAL = 2</a:t>
+            </a:r>
+          </a:p>
+          <a:p>
+            <a:pPr marL="742950" lvl="1" indent="-285750">
+              <a:buFontTx/>
+              <a:buChar char="-"/>
+            </a:pPr>
+            <a:r>
+              <a:rPr lang="en-CH" sz="800" dirty="0">
+                <a:solidFill>
+                  <a:schemeClr val="bg2">
+                    <a:lumMod val="75000"/>
+                  </a:schemeClr>
+                </a:solidFill>
+              </a:rPr>
+              <a:t>Pas</a:t>
+            </a:r>
+          </a:p>
+          <a:p>
+            <a:pPr marL="742950" lvl="1" indent="-285750">
+              <a:buFontTx/>
+              <a:buChar char="-"/>
+            </a:pPr>
+            <a:r>
+              <a:rPr lang="en-CH" sz="800" dirty="0">
+                <a:solidFill>
+                  <a:schemeClr val="bg2">
+                    <a:lumMod val="75000"/>
+                  </a:schemeClr>
+                </a:solidFill>
+              </a:rPr>
+              <a:t>Eau</a:t>
+            </a:r>
+          </a:p>
+          <a:p>
+            <a:pPr marL="742950" lvl="1" indent="-285750">
+              <a:buFontTx/>
+              <a:buChar char="-"/>
+            </a:pPr>
+            <a:r>
+              <a:rPr lang="en-CH" sz="800" dirty="0">
+                <a:solidFill>
+                  <a:schemeClr val="bg2">
+                    <a:lumMod val="75000"/>
+                  </a:schemeClr>
+                </a:solidFill>
+              </a:rPr>
+              <a:t>Toggle tablette</a:t>
+            </a:r>
+          </a:p>
+          <a:p>
+            <a:pPr marL="742950" lvl="1" indent="-285750">
+              <a:buFontTx/>
+              <a:buChar char="-"/>
+            </a:pPr>
+            <a:r>
+              <a:rPr lang="en-CH" sz="800" dirty="0">
+                <a:solidFill>
+                  <a:schemeClr val="bg2">
+                    <a:lumMod val="75000"/>
+                  </a:schemeClr>
+                </a:solidFill>
+              </a:rPr>
+              <a:t>Feu</a:t>
+            </a:r>
+          </a:p>
+          <a:p>
+            <a:pPr marL="742950" lvl="1" indent="-285750">
+              <a:buFontTx/>
+              <a:buChar char="-"/>
+            </a:pPr>
+            <a:r>
+              <a:rPr lang="en-CH" sz="800" dirty="0">
+                <a:solidFill>
+                  <a:schemeClr val="bg2">
+                    <a:lumMod val="75000"/>
+                  </a:schemeClr>
+                </a:solidFill>
+              </a:rPr>
+              <a:t>Ambiance (cf grotte minecraft)</a:t>
+            </a:r>
+          </a:p>
+          <a:p>
+            <a:pPr marL="742950" lvl="1" indent="-285750">
+              <a:buFontTx/>
+              <a:buChar char="-"/>
+            </a:pPr>
+            <a:r>
+              <a:rPr lang="en-CH" sz="800" dirty="0"/>
+              <a:t>Musiques</a:t>
+            </a:r>
+          </a:p>
+          <a:p>
+            <a:pPr marL="285750" indent="-285750">
+              <a:buFontTx/>
+              <a:buChar char="-"/>
+            </a:pPr>
+            <a:r>
+              <a:rPr lang="en-CH" sz="800" dirty="0"/>
+              <a:t>Tablette TOTAL = 2</a:t>
+            </a:r>
+          </a:p>
+          <a:p>
+            <a:pPr marL="742950" lvl="1" indent="-285750">
+              <a:buFontTx/>
+              <a:buChar char="-"/>
+            </a:pPr>
+            <a:r>
+              <a:rPr lang="en-CH" sz="800" dirty="0"/>
+              <a:t>Yellow</a:t>
+            </a:r>
+          </a:p>
+          <a:p>
+            <a:pPr marL="742950" lvl="1" indent="-285750">
+              <a:buFontTx/>
+              <a:buChar char="-"/>
+            </a:pPr>
+            <a:r>
+              <a:rPr lang="en-CH" sz="800" dirty="0"/>
+              <a:t>Red</a:t>
+            </a:r>
+          </a:p>
+          <a:p>
+            <a:pPr marL="742950" lvl="1" indent="-285750">
+              <a:buFontTx/>
+              <a:buChar char="-"/>
+            </a:pPr>
+            <a:r>
+              <a:rPr lang="en-CH" sz="800" dirty="0"/>
+              <a:t>Blue</a:t>
+            </a:r>
+          </a:p>
+          <a:p>
+            <a:pPr marL="285750" indent="-285750">
+              <a:buFontTx/>
+              <a:buChar char="-"/>
+            </a:pPr>
+            <a:r>
+              <a:rPr lang="en-CH" sz="800" dirty="0"/>
+              <a:t>Assemblage TOTAL = 2</a:t>
+            </a:r>
+          </a:p>
+        </p:txBody>
+      </p:sp>
+      <p:sp>
+        <p:nvSpPr>
+          <p:cNvPr id="5" name="TextBox 4">
+            <a:extLst>
+              <a:ext uri="{FF2B5EF4-FFF2-40B4-BE49-F238E27FC236}">
+                <a16:creationId xmlns:a16="http://schemas.microsoft.com/office/drawing/2014/main" id="{1FA91067-1903-72C9-5AEA-612EF3CE495E}"/>
+              </a:ext>
+            </a:extLst>
+          </p:cNvPr>
+          <p:cNvSpPr txBox="1"/>
+          <p:nvPr/>
+        </p:nvSpPr>
+        <p:spPr>
+          <a:xfrm>
+            <a:off x="6341424" y="468154"/>
+            <a:ext cx="1476686" cy="1077218"/>
+          </a:xfrm>
+          <a:prstGeom prst="rect">
+            <a:avLst/>
+          </a:prstGeom>
+          <a:noFill/>
+        </p:spPr>
+        <p:txBody>
+          <a:bodyPr wrap="none" rtlCol="0">
+            <a:spAutoFit/>
+          </a:bodyPr>
+          <a:lstStyle/>
+          <a:p>
+            <a:r>
+              <a:rPr lang="en-CH" sz="800" dirty="0"/>
+              <a:t>AUTRES</a:t>
+            </a:r>
+          </a:p>
+          <a:p>
+            <a:pPr marL="285750" indent="-285750">
+              <a:buFontTx/>
+              <a:buChar char="-"/>
+            </a:pPr>
+            <a:r>
+              <a:rPr lang="en-CH" sz="800" dirty="0"/>
+              <a:t>Excel miam</a:t>
+            </a:r>
+          </a:p>
+          <a:p>
+            <a:pPr marL="285750" indent="-285750">
+              <a:buFontTx/>
+              <a:buChar char="-"/>
+            </a:pPr>
+            <a:r>
+              <a:rPr lang="en-CH" sz="800" dirty="0"/>
+              <a:t>Abo gare</a:t>
+            </a:r>
+          </a:p>
+          <a:p>
+            <a:pPr marL="285750" indent="-285750">
+              <a:buFontTx/>
+              <a:buChar char="-"/>
+            </a:pPr>
+            <a:r>
+              <a:rPr lang="en-CH" sz="800" dirty="0"/>
+              <a:t>Call banque – carte</a:t>
+            </a:r>
+          </a:p>
+          <a:p>
+            <a:pPr marL="285750" indent="-285750">
+              <a:buFontTx/>
+              <a:buChar char="-"/>
+            </a:pPr>
+            <a:r>
+              <a:rPr lang="en-CH" sz="800" dirty="0"/>
+              <a:t>Call banque – E-banking</a:t>
+            </a:r>
+          </a:p>
+          <a:p>
+            <a:pPr marL="285750" indent="-285750">
+              <a:buFontTx/>
+              <a:buChar char="-"/>
+            </a:pPr>
+            <a:r>
+              <a:rPr lang="en-CH" sz="800" dirty="0"/>
+              <a:t>Impôts</a:t>
+            </a:r>
+          </a:p>
+          <a:p>
+            <a:pPr marL="285750" indent="-285750">
+              <a:buFontTx/>
+              <a:buChar char="-"/>
+            </a:pPr>
+            <a:r>
+              <a:rPr lang="en-CH" sz="800" dirty="0"/>
+              <a:t>Notes wwed pour psy</a:t>
+            </a:r>
+          </a:p>
+          <a:p>
+            <a:pPr marL="285750" indent="-285750">
+              <a:buFontTx/>
+              <a:buChar char="-"/>
+            </a:pPr>
+            <a:endParaRPr lang="en-CH" sz="800" dirty="0"/>
+          </a:p>
+        </p:txBody>
+      </p:sp>
+      <p:sp>
+        <p:nvSpPr>
+          <p:cNvPr id="6" name="TextBox 5">
+            <a:extLst>
+              <a:ext uri="{FF2B5EF4-FFF2-40B4-BE49-F238E27FC236}">
+                <a16:creationId xmlns:a16="http://schemas.microsoft.com/office/drawing/2014/main" id="{3B04AFDD-DE59-BEF0-B01D-62624B365562}"/>
+              </a:ext>
+            </a:extLst>
+          </p:cNvPr>
+          <p:cNvSpPr txBox="1"/>
+          <p:nvPr/>
+        </p:nvSpPr>
+        <p:spPr>
+          <a:xfrm>
+            <a:off x="7666531" y="486889"/>
+            <a:ext cx="2316660" cy="707886"/>
+          </a:xfrm>
+          <a:prstGeom prst="rect">
+            <a:avLst/>
+          </a:prstGeom>
+          <a:noFill/>
+        </p:spPr>
+        <p:txBody>
+          <a:bodyPr wrap="none" rtlCol="0">
+            <a:spAutoFit/>
+          </a:bodyPr>
+          <a:lstStyle/>
+          <a:p>
+            <a:r>
+              <a:rPr lang="en-CH" sz="800" dirty="0"/>
+              <a:t>STAGES</a:t>
+            </a:r>
+          </a:p>
+          <a:p>
+            <a:pPr marL="285750" indent="-285750">
+              <a:buFontTx/>
+              <a:buChar char="-"/>
+            </a:pPr>
+            <a:r>
+              <a:rPr lang="en-CH" sz="800" dirty="0"/>
+              <a:t>Mail Yannick</a:t>
+            </a:r>
+          </a:p>
+          <a:p>
+            <a:pPr marL="742950" lvl="1" indent="-285750">
+              <a:buFontTx/>
+              <a:buChar char="-"/>
+            </a:pPr>
+            <a:r>
+              <a:rPr lang="en-CH" sz="800" dirty="0"/>
+              <a:t>Donner infos sur mes stages</a:t>
+            </a:r>
+          </a:p>
+          <a:p>
+            <a:pPr marL="742950" lvl="1" indent="-285750">
+              <a:buFontTx/>
+              <a:buChar char="-"/>
+            </a:pPr>
+            <a:r>
+              <a:rPr lang="en-CH" sz="800" dirty="0"/>
+              <a:t>Demander infos rapport de stage</a:t>
+            </a:r>
+          </a:p>
+          <a:p>
+            <a:pPr marL="742950" lvl="1" indent="-285750">
+              <a:buFontTx/>
+              <a:buChar char="-"/>
+            </a:pPr>
+            <a:r>
+              <a:rPr lang="en-CH" sz="800" dirty="0"/>
+              <a:t>Vérifier que tout est ok</a:t>
+            </a:r>
+          </a:p>
+        </p:txBody>
+      </p:sp>
+      <p:sp>
+        <p:nvSpPr>
+          <p:cNvPr id="7" name="TextBox 6">
+            <a:extLst>
+              <a:ext uri="{FF2B5EF4-FFF2-40B4-BE49-F238E27FC236}">
+                <a16:creationId xmlns:a16="http://schemas.microsoft.com/office/drawing/2014/main" id="{183D89C7-CFDC-3281-DED7-623E6797CED2}"/>
+              </a:ext>
+            </a:extLst>
+          </p:cNvPr>
+          <p:cNvSpPr txBox="1"/>
+          <p:nvPr/>
+        </p:nvSpPr>
+        <p:spPr>
+          <a:xfrm>
+            <a:off x="9999023" y="581892"/>
+            <a:ext cx="1117614" cy="461665"/>
+          </a:xfrm>
+          <a:prstGeom prst="rect">
+            <a:avLst/>
+          </a:prstGeom>
+          <a:noFill/>
+        </p:spPr>
+        <p:txBody>
+          <a:bodyPr wrap="none" rtlCol="0">
+            <a:spAutoFit/>
+          </a:bodyPr>
+          <a:lstStyle/>
+          <a:p>
+            <a:r>
+              <a:rPr lang="en-CH" sz="800" dirty="0"/>
+              <a:t>WEEKLY</a:t>
+            </a:r>
+          </a:p>
+          <a:p>
+            <a:pPr marL="285750" indent="-285750">
+              <a:buFontTx/>
+              <a:buChar char="-"/>
+            </a:pPr>
+            <a:r>
+              <a:rPr lang="en-CH" sz="800" dirty="0"/>
+              <a:t>Orga parent.e.s</a:t>
+            </a:r>
+          </a:p>
+          <a:p>
+            <a:pPr marL="285750" indent="-285750">
+              <a:buFontTx/>
+              <a:buChar char="-"/>
+            </a:pPr>
+            <a:r>
+              <a:rPr lang="en-CH" sz="800" dirty="0"/>
+              <a:t>Orga potes</a:t>
+            </a:r>
+          </a:p>
+        </p:txBody>
+      </p:sp>
+      <p:sp>
+        <p:nvSpPr>
+          <p:cNvPr id="8" name="TextBox 7">
+            <a:extLst>
+              <a:ext uri="{FF2B5EF4-FFF2-40B4-BE49-F238E27FC236}">
+                <a16:creationId xmlns:a16="http://schemas.microsoft.com/office/drawing/2014/main" id="{51156AC8-7F2B-DD8A-6E01-DCB51EFBF87B}"/>
+              </a:ext>
+            </a:extLst>
+          </p:cNvPr>
+          <p:cNvSpPr txBox="1"/>
+          <p:nvPr/>
+        </p:nvSpPr>
+        <p:spPr>
+          <a:xfrm>
+            <a:off x="2695699" y="1496290"/>
+            <a:ext cx="2624446" cy="1323439"/>
+          </a:xfrm>
+          <a:prstGeom prst="rect">
+            <a:avLst/>
+          </a:prstGeom>
+          <a:noFill/>
+        </p:spPr>
+        <p:txBody>
+          <a:bodyPr wrap="square" rtlCol="0">
+            <a:spAutoFit/>
+          </a:bodyPr>
+          <a:lstStyle/>
+          <a:p>
+            <a:r>
+              <a:rPr lang="en-CH" sz="800" dirty="0"/>
+              <a:t>IJO MUSI – RAPPORT – TOTAL = 12</a:t>
+            </a:r>
+          </a:p>
+          <a:p>
+            <a:pPr marL="285750" indent="-285750">
+              <a:buFontTx/>
+              <a:buChar char="-"/>
+            </a:pPr>
+            <a:r>
+              <a:rPr lang="en-CH" sz="800" dirty="0"/>
+              <a:t>Rassembler mes archives - 0</a:t>
+            </a:r>
+          </a:p>
+          <a:p>
+            <a:pPr marL="285750" indent="-285750">
+              <a:buFontTx/>
+              <a:buChar char="-"/>
+            </a:pPr>
+            <a:r>
+              <a:rPr lang="en-CH" sz="800" dirty="0"/>
+              <a:t>Trouver et lire 2-3 articles recherche-création (se concentrer sur la forme et méthode) (1)</a:t>
+            </a:r>
+          </a:p>
+          <a:p>
+            <a:pPr marL="285750" indent="-285750">
+              <a:buFontTx/>
+              <a:buChar char="-"/>
+            </a:pPr>
+            <a:r>
+              <a:rPr lang="en-CH" sz="800" dirty="0"/>
+              <a:t>Rassembler ludographie (0.5)</a:t>
+            </a:r>
+          </a:p>
+          <a:p>
+            <a:pPr marL="285750" indent="-285750">
+              <a:buFontTx/>
+              <a:buChar char="-"/>
+            </a:pPr>
+            <a:r>
+              <a:rPr lang="en-CH" sz="800" dirty="0"/>
+              <a:t>Rassembler bibliographie (3)</a:t>
+            </a:r>
+          </a:p>
+          <a:p>
+            <a:pPr marL="285750" indent="-285750">
+              <a:buFontTx/>
+              <a:buChar char="-"/>
+            </a:pPr>
+            <a:r>
+              <a:rPr lang="en-CH" sz="800" dirty="0"/>
+              <a:t>Définir structure du rapport (0.5)</a:t>
+            </a:r>
+          </a:p>
+          <a:p>
+            <a:pPr marL="285750" indent="-285750">
+              <a:buFontTx/>
+              <a:buChar char="-"/>
+            </a:pPr>
+            <a:r>
+              <a:rPr lang="en-CH" sz="800" dirty="0"/>
+              <a:t>Écriture (5)</a:t>
+            </a:r>
+          </a:p>
+          <a:p>
+            <a:pPr marL="285750" indent="-285750">
+              <a:buFontTx/>
+              <a:buChar char="-"/>
+            </a:pPr>
+            <a:r>
+              <a:rPr lang="en-CH" sz="800" dirty="0"/>
+              <a:t>Présentation (2)</a:t>
+            </a:r>
+          </a:p>
+          <a:p>
+            <a:endParaRPr lang="en-CH" sz="800" dirty="0"/>
+          </a:p>
+        </p:txBody>
+      </p:sp>
+      <p:sp>
+        <p:nvSpPr>
+          <p:cNvPr id="9" name="TextBox 8">
+            <a:extLst>
+              <a:ext uri="{FF2B5EF4-FFF2-40B4-BE49-F238E27FC236}">
+                <a16:creationId xmlns:a16="http://schemas.microsoft.com/office/drawing/2014/main" id="{4B37C839-BE49-89D9-3829-9A59E7C27625}"/>
+              </a:ext>
+            </a:extLst>
+          </p:cNvPr>
+          <p:cNvSpPr txBox="1"/>
+          <p:nvPr/>
+        </p:nvSpPr>
+        <p:spPr>
+          <a:xfrm>
+            <a:off x="7600209" y="0"/>
+            <a:ext cx="4475777" cy="369332"/>
+          </a:xfrm>
+          <a:prstGeom prst="rect">
+            <a:avLst/>
+          </a:prstGeom>
+          <a:noFill/>
+        </p:spPr>
+        <p:txBody>
+          <a:bodyPr wrap="none" rtlCol="0">
+            <a:spAutoFit/>
+          </a:bodyPr>
+          <a:lstStyle/>
+          <a:p>
+            <a:r>
+              <a:rPr lang="en-CH" dirty="0"/>
+              <a:t>Trucs à mettre sur kanban mais pas à planifier</a:t>
+            </a:r>
+          </a:p>
+        </p:txBody>
+      </p:sp>
+      <p:sp>
+        <p:nvSpPr>
+          <p:cNvPr id="10" name="TextBox 9">
+            <a:extLst>
+              <a:ext uri="{FF2B5EF4-FFF2-40B4-BE49-F238E27FC236}">
+                <a16:creationId xmlns:a16="http://schemas.microsoft.com/office/drawing/2014/main" id="{541BA0F0-A9C9-1EA7-0840-5E5E8F74146F}"/>
+              </a:ext>
+            </a:extLst>
+          </p:cNvPr>
+          <p:cNvSpPr txBox="1"/>
+          <p:nvPr/>
+        </p:nvSpPr>
+        <p:spPr>
+          <a:xfrm>
+            <a:off x="2624446" y="3087584"/>
+            <a:ext cx="4540858" cy="369332"/>
+          </a:xfrm>
+          <a:prstGeom prst="rect">
+            <a:avLst/>
+          </a:prstGeom>
+          <a:noFill/>
+        </p:spPr>
+        <p:txBody>
+          <a:bodyPr wrap="none" rtlCol="0">
+            <a:spAutoFit/>
+          </a:bodyPr>
+          <a:lstStyle/>
+          <a:p>
+            <a:r>
+              <a:rPr lang="en-CH" dirty="0"/>
+              <a:t>VISU – SCATERPLOT UNIQUEMENT – TOTAL = 3</a:t>
+            </a:r>
+          </a:p>
+        </p:txBody>
+      </p:sp>
+      <p:sp>
+        <p:nvSpPr>
+          <p:cNvPr id="11" name="TextBox 10">
+            <a:extLst>
+              <a:ext uri="{FF2B5EF4-FFF2-40B4-BE49-F238E27FC236}">
+                <a16:creationId xmlns:a16="http://schemas.microsoft.com/office/drawing/2014/main" id="{7253A949-CCB5-97BA-857F-C49CA81616F9}"/>
+              </a:ext>
+            </a:extLst>
+          </p:cNvPr>
+          <p:cNvSpPr txBox="1"/>
+          <p:nvPr/>
+        </p:nvSpPr>
+        <p:spPr>
+          <a:xfrm>
+            <a:off x="2743200" y="3633850"/>
+            <a:ext cx="1886478" cy="369332"/>
+          </a:xfrm>
+          <a:prstGeom prst="rect">
+            <a:avLst/>
+          </a:prstGeom>
+          <a:noFill/>
+        </p:spPr>
+        <p:txBody>
+          <a:bodyPr wrap="none" rtlCol="0">
+            <a:spAutoFit/>
+          </a:bodyPr>
+          <a:lstStyle/>
+          <a:p>
+            <a:r>
+              <a:rPr lang="en-CH" dirty="0"/>
+              <a:t>PHILO – TOTAL = 6</a:t>
+            </a:r>
+          </a:p>
+        </p:txBody>
+      </p:sp>
+      <p:sp>
+        <p:nvSpPr>
+          <p:cNvPr id="12" name="TextBox 11">
+            <a:extLst>
+              <a:ext uri="{FF2B5EF4-FFF2-40B4-BE49-F238E27FC236}">
+                <a16:creationId xmlns:a16="http://schemas.microsoft.com/office/drawing/2014/main" id="{9F5350B9-AF69-F0A0-0583-3DBA0C34439E}"/>
+              </a:ext>
+            </a:extLst>
+          </p:cNvPr>
+          <p:cNvSpPr txBox="1"/>
+          <p:nvPr/>
+        </p:nvSpPr>
+        <p:spPr>
+          <a:xfrm>
+            <a:off x="3408218" y="4595750"/>
+            <a:ext cx="3059556" cy="1477328"/>
+          </a:xfrm>
+          <a:prstGeom prst="rect">
+            <a:avLst/>
+          </a:prstGeom>
+          <a:noFill/>
+        </p:spPr>
+        <p:txBody>
+          <a:bodyPr wrap="none" rtlCol="0">
+            <a:spAutoFit/>
+          </a:bodyPr>
+          <a:lstStyle/>
+          <a:p>
+            <a:r>
+              <a:rPr lang="en-CH" dirty="0">
+                <a:solidFill>
+                  <a:schemeClr val="accent6">
+                    <a:lumMod val="75000"/>
+                  </a:schemeClr>
+                </a:solidFill>
+              </a:rPr>
+              <a:t>MÉMOIRE – 1 semestre</a:t>
+            </a:r>
+          </a:p>
+          <a:p>
+            <a:r>
+              <a:rPr lang="en-CH" dirty="0">
+                <a:solidFill>
+                  <a:schemeClr val="accent6">
+                    <a:lumMod val="75000"/>
+                  </a:schemeClr>
+                </a:solidFill>
+              </a:rPr>
+              <a:t>début : 14 septembre 26</a:t>
+            </a:r>
+          </a:p>
+          <a:p>
+            <a:r>
+              <a:rPr lang="en-CH" dirty="0">
+                <a:solidFill>
+                  <a:schemeClr val="accent6">
+                    <a:lumMod val="75000"/>
+                  </a:schemeClr>
+                </a:solidFill>
+              </a:rPr>
+              <a:t>fin des cours : 18 décembre 26</a:t>
+            </a:r>
+          </a:p>
+          <a:p>
+            <a:r>
+              <a:rPr lang="en-CH" dirty="0">
+                <a:solidFill>
+                  <a:schemeClr val="accent6">
+                    <a:lumMod val="75000"/>
+                  </a:schemeClr>
+                </a:solidFill>
+              </a:rPr>
+              <a:t>début examens : 15 janvier 26</a:t>
+            </a:r>
+          </a:p>
+          <a:p>
+            <a:r>
+              <a:rPr lang="en-CH" dirty="0">
+                <a:solidFill>
+                  <a:schemeClr val="accent6">
+                    <a:lumMod val="75000"/>
+                  </a:schemeClr>
+                </a:solidFill>
+              </a:rPr>
+              <a:t> fin examnes : 6 février 26</a:t>
+            </a:r>
+          </a:p>
+        </p:txBody>
+      </p:sp>
+      <p:sp>
+        <p:nvSpPr>
+          <p:cNvPr id="13" name="TextBox 12">
+            <a:extLst>
+              <a:ext uri="{FF2B5EF4-FFF2-40B4-BE49-F238E27FC236}">
+                <a16:creationId xmlns:a16="http://schemas.microsoft.com/office/drawing/2014/main" id="{C313FFE6-3F73-118D-1960-82049E609467}"/>
+              </a:ext>
+            </a:extLst>
+          </p:cNvPr>
+          <p:cNvSpPr txBox="1"/>
+          <p:nvPr/>
+        </p:nvSpPr>
+        <p:spPr>
+          <a:xfrm>
+            <a:off x="8348353" y="2553195"/>
+            <a:ext cx="2510816" cy="369332"/>
+          </a:xfrm>
+          <a:prstGeom prst="rect">
+            <a:avLst/>
+          </a:prstGeom>
+          <a:noFill/>
+        </p:spPr>
+        <p:txBody>
+          <a:bodyPr wrap="none" rtlCol="0">
+            <a:spAutoFit/>
+          </a:bodyPr>
+          <a:lstStyle/>
+          <a:p>
+            <a:r>
+              <a:rPr lang="en-CH" dirty="0"/>
+              <a:t>SPEC – CIRA - TOTAL = 30</a:t>
+            </a:r>
+          </a:p>
+        </p:txBody>
+      </p:sp>
+      <p:sp>
+        <p:nvSpPr>
+          <p:cNvPr id="14" name="TextBox 13">
+            <a:extLst>
+              <a:ext uri="{FF2B5EF4-FFF2-40B4-BE49-F238E27FC236}">
+                <a16:creationId xmlns:a16="http://schemas.microsoft.com/office/drawing/2014/main" id="{79E51229-0B9D-991A-48BB-42DD54AA332F}"/>
+              </a:ext>
+            </a:extLst>
+          </p:cNvPr>
+          <p:cNvSpPr txBox="1"/>
+          <p:nvPr/>
+        </p:nvSpPr>
+        <p:spPr>
+          <a:xfrm>
+            <a:off x="8170224" y="3301340"/>
+            <a:ext cx="3446969" cy="369332"/>
+          </a:xfrm>
+          <a:prstGeom prst="rect">
+            <a:avLst/>
+          </a:prstGeom>
+          <a:noFill/>
+        </p:spPr>
+        <p:txBody>
+          <a:bodyPr wrap="none" rtlCol="0">
+            <a:spAutoFit/>
+          </a:bodyPr>
+          <a:lstStyle/>
+          <a:p>
+            <a:r>
+              <a:rPr lang="en-CH" dirty="0">
+                <a:solidFill>
+                  <a:schemeClr val="accent6">
+                    <a:lumMod val="75000"/>
+                  </a:schemeClr>
+                </a:solidFill>
+              </a:rPr>
+              <a:t>STAGES – DamaDama – TOTAL = 15</a:t>
+            </a:r>
+          </a:p>
+        </p:txBody>
+      </p:sp>
+      <p:sp>
+        <p:nvSpPr>
+          <p:cNvPr id="15" name="TextBox 14">
+            <a:extLst>
+              <a:ext uri="{FF2B5EF4-FFF2-40B4-BE49-F238E27FC236}">
+                <a16:creationId xmlns:a16="http://schemas.microsoft.com/office/drawing/2014/main" id="{831E5750-3A96-13A8-4A01-8C221B068534}"/>
+              </a:ext>
+            </a:extLst>
+          </p:cNvPr>
+          <p:cNvSpPr txBox="1"/>
+          <p:nvPr/>
+        </p:nvSpPr>
+        <p:spPr>
+          <a:xfrm>
+            <a:off x="8156370" y="3928753"/>
+            <a:ext cx="3131563" cy="369332"/>
+          </a:xfrm>
+          <a:prstGeom prst="rect">
+            <a:avLst/>
+          </a:prstGeom>
+          <a:noFill/>
+        </p:spPr>
+        <p:txBody>
+          <a:bodyPr wrap="none" rtlCol="0">
+            <a:spAutoFit/>
+          </a:bodyPr>
+          <a:lstStyle/>
+          <a:p>
+            <a:r>
+              <a:rPr lang="en-CH" dirty="0">
+                <a:solidFill>
+                  <a:schemeClr val="accent6">
+                    <a:lumMod val="75000"/>
+                  </a:schemeClr>
+                </a:solidFill>
+              </a:rPr>
+              <a:t>STAGES – Naraven – TOTAL = 15</a:t>
+            </a:r>
+          </a:p>
+        </p:txBody>
+      </p:sp>
+      <p:sp>
+        <p:nvSpPr>
+          <p:cNvPr id="16" name="TextBox 15">
+            <a:extLst>
+              <a:ext uri="{FF2B5EF4-FFF2-40B4-BE49-F238E27FC236}">
+                <a16:creationId xmlns:a16="http://schemas.microsoft.com/office/drawing/2014/main" id="{9D7B72F6-2CAE-A18F-1EF6-79EB2D94581F}"/>
+              </a:ext>
+            </a:extLst>
+          </p:cNvPr>
+          <p:cNvSpPr txBox="1"/>
+          <p:nvPr/>
+        </p:nvSpPr>
+        <p:spPr>
+          <a:xfrm>
+            <a:off x="8154391" y="4520540"/>
+            <a:ext cx="3424720" cy="369332"/>
+          </a:xfrm>
+          <a:prstGeom prst="rect">
+            <a:avLst/>
+          </a:prstGeom>
+          <a:noFill/>
+        </p:spPr>
+        <p:txBody>
+          <a:bodyPr wrap="none" rtlCol="0">
+            <a:spAutoFit/>
+          </a:bodyPr>
+          <a:lstStyle/>
+          <a:p>
+            <a:r>
+              <a:rPr lang="en-CH" dirty="0">
+                <a:solidFill>
+                  <a:schemeClr val="accent6">
+                    <a:lumMod val="75000"/>
+                  </a:schemeClr>
+                </a:solidFill>
+              </a:rPr>
+              <a:t>STAGES – Sémaphore – TOTAL = 20</a:t>
+            </a:r>
+          </a:p>
+        </p:txBody>
+      </p:sp>
+      <p:sp>
+        <p:nvSpPr>
+          <p:cNvPr id="17" name="TextBox 16">
+            <a:extLst>
+              <a:ext uri="{FF2B5EF4-FFF2-40B4-BE49-F238E27FC236}">
+                <a16:creationId xmlns:a16="http://schemas.microsoft.com/office/drawing/2014/main" id="{D373D3DA-FDCC-C74A-7C9B-685F25ACDD05}"/>
+              </a:ext>
+            </a:extLst>
+          </p:cNvPr>
+          <p:cNvSpPr txBox="1"/>
+          <p:nvPr/>
+        </p:nvSpPr>
+        <p:spPr>
+          <a:xfrm>
+            <a:off x="7872413" y="1843088"/>
+            <a:ext cx="2956194" cy="523220"/>
+          </a:xfrm>
+          <a:prstGeom prst="rect">
+            <a:avLst/>
+          </a:prstGeom>
+          <a:noFill/>
+        </p:spPr>
+        <p:txBody>
+          <a:bodyPr wrap="none" rtlCol="0">
+            <a:spAutoFit/>
+          </a:bodyPr>
+          <a:lstStyle/>
+          <a:p>
+            <a:r>
+              <a:rPr lang="en-CH" dirty="0"/>
+              <a:t>SPEC – “COURS” – TOTAL = 10</a:t>
+            </a:r>
+          </a:p>
+          <a:p>
+            <a:r>
+              <a:rPr lang="en-CH" sz="1000" dirty="0"/>
+              <a:t>	- 55 heures. 4h / jour</a:t>
+            </a:r>
+          </a:p>
+        </p:txBody>
+      </p:sp>
+      <p:sp>
+        <p:nvSpPr>
+          <p:cNvPr id="3" name="TextBox 2">
+            <a:extLst>
+              <a:ext uri="{FF2B5EF4-FFF2-40B4-BE49-F238E27FC236}">
+                <a16:creationId xmlns:a16="http://schemas.microsoft.com/office/drawing/2014/main" id="{90671A90-F7B4-FE99-2E1F-D05D56FA0876}"/>
+              </a:ext>
+            </a:extLst>
+          </p:cNvPr>
+          <p:cNvSpPr txBox="1"/>
+          <p:nvPr/>
+        </p:nvSpPr>
+        <p:spPr>
+          <a:xfrm>
+            <a:off x="9157855" y="5888183"/>
+            <a:ext cx="2459712" cy="369332"/>
+          </a:xfrm>
+          <a:prstGeom prst="rect">
+            <a:avLst/>
+          </a:prstGeom>
+          <a:noFill/>
+        </p:spPr>
+        <p:txBody>
+          <a:bodyPr wrap="none" rtlCol="0">
+            <a:spAutoFit/>
+          </a:bodyPr>
+          <a:lstStyle/>
+          <a:p>
+            <a:r>
+              <a:rPr lang="en-CH" dirty="0"/>
+              <a:t>TOTAL (sans stages) = 87</a:t>
+            </a:r>
+          </a:p>
+        </p:txBody>
+      </p:sp>
+    </p:spTree>
+    <p:extLst>
+      <p:ext uri="{BB962C8B-B14F-4D97-AF65-F5344CB8AC3E}">
+        <p14:creationId xmlns:p14="http://schemas.microsoft.com/office/powerpoint/2010/main" val="3320411626"/>
+      </p:ext>
+    </p:extLst>
+  </p:cSld>
+  <p:clrMapOvr>
+    <a:masterClrMapping/>
+  </p:clrMapOvr>
+</p:sld>
+</file>
+
+<file path=ppt/slides/slide8.xml><?xml version="1.0" encoding="utf-8"?>
+<p:sld xmlns:a="http://schemas.openxmlformats.org/drawingml/2006/main" xmlns:r="http://schemas.openxmlformats.org/officeDocument/2006/relationships" xmlns:p="http://schemas.openxmlformats.org/presentationml/2006/main">
+  <p:cSld>
+    <p:spTree>
+      <p:nvGrpSpPr>
+        <p:cNvPr id="1" name=""/>
+        <p:cNvGrpSpPr/>
+        <p:nvPr/>
+      </p:nvGrpSpPr>
+      <p:grpSpPr>
+        <a:xfrm>
+          <a:off x="0" y="0"/>
+          <a:ext cx="0" cy="0"/>
+          <a:chOff x="0" y="0"/>
+          <a:chExt cx="0" cy="0"/>
+        </a:xfrm>
+      </p:grpSpPr>
+      <p:graphicFrame>
+        <p:nvGraphicFramePr>
+          <p:cNvPr id="4" name="Table 4">
+            <a:extLst>
+              <a:ext uri="{FF2B5EF4-FFF2-40B4-BE49-F238E27FC236}">
+                <a16:creationId xmlns:a16="http://schemas.microsoft.com/office/drawing/2014/main" id="{0CBEBCE2-FDE3-8B49-FE37-6FFC8AD24F62}"/>
+              </a:ext>
+            </a:extLst>
+          </p:cNvPr>
+          <p:cNvGraphicFramePr>
+            <a:graphicFrameLocks noGrp="1"/>
+          </p:cNvGraphicFramePr>
+          <p:nvPr>
+            <p:ph idx="1"/>
+            <p:extLst>
+              <p:ext uri="{D42A27DB-BD31-4B8C-83A1-F6EECF244321}">
+                <p14:modId xmlns:p14="http://schemas.microsoft.com/office/powerpoint/2010/main" val="1754374545"/>
+              </p:ext>
+            </p:extLst>
+          </p:nvPr>
+        </p:nvGraphicFramePr>
+        <p:xfrm>
+          <a:off x="128587" y="1868487"/>
+          <a:ext cx="10532536" cy="1483360"/>
+        </p:xfrm>
+        <a:graphic>
+          <a:graphicData uri="http://schemas.openxmlformats.org/drawingml/2006/table">
+            <a:tbl>
+              <a:tblPr firstRow="1" bandRow="1">
+                <a:tableStyleId>{5C22544A-7EE6-4342-B048-85BDC9FD1C3A}</a:tableStyleId>
+              </a:tblPr>
+              <a:tblGrid>
+                <a:gridCol w="1316567">
+                  <a:extLst>
+                    <a:ext uri="{9D8B030D-6E8A-4147-A177-3AD203B41FA5}">
+                      <a16:colId xmlns:a16="http://schemas.microsoft.com/office/drawing/2014/main" val="3886050130"/>
+                    </a:ext>
+                  </a:extLst>
+                </a:gridCol>
+                <a:gridCol w="1316567">
+                  <a:extLst>
+                    <a:ext uri="{9D8B030D-6E8A-4147-A177-3AD203B41FA5}">
+                      <a16:colId xmlns:a16="http://schemas.microsoft.com/office/drawing/2014/main" val="1508651909"/>
+                    </a:ext>
+                  </a:extLst>
+                </a:gridCol>
+                <a:gridCol w="1316567">
+                  <a:extLst>
+                    <a:ext uri="{9D8B030D-6E8A-4147-A177-3AD203B41FA5}">
+                      <a16:colId xmlns:a16="http://schemas.microsoft.com/office/drawing/2014/main" val="2062040089"/>
+                    </a:ext>
+                  </a:extLst>
+                </a:gridCol>
+                <a:gridCol w="1316567">
+                  <a:extLst>
+                    <a:ext uri="{9D8B030D-6E8A-4147-A177-3AD203B41FA5}">
+                      <a16:colId xmlns:a16="http://schemas.microsoft.com/office/drawing/2014/main" val="2737023149"/>
+                    </a:ext>
+                  </a:extLst>
+                </a:gridCol>
+                <a:gridCol w="1316567">
+                  <a:extLst>
+                    <a:ext uri="{9D8B030D-6E8A-4147-A177-3AD203B41FA5}">
+                      <a16:colId xmlns:a16="http://schemas.microsoft.com/office/drawing/2014/main" val="3887682633"/>
+                    </a:ext>
+                  </a:extLst>
+                </a:gridCol>
+                <a:gridCol w="1316567">
+                  <a:extLst>
+                    <a:ext uri="{9D8B030D-6E8A-4147-A177-3AD203B41FA5}">
+                      <a16:colId xmlns:a16="http://schemas.microsoft.com/office/drawing/2014/main" val="5628773"/>
+                    </a:ext>
+                  </a:extLst>
+                </a:gridCol>
+                <a:gridCol w="1316567">
+                  <a:extLst>
+                    <a:ext uri="{9D8B030D-6E8A-4147-A177-3AD203B41FA5}">
+                      <a16:colId xmlns:a16="http://schemas.microsoft.com/office/drawing/2014/main" val="1453961281"/>
+                    </a:ext>
+                  </a:extLst>
+                </a:gridCol>
+                <a:gridCol w="1316567">
+                  <a:extLst>
+                    <a:ext uri="{9D8B030D-6E8A-4147-A177-3AD203B41FA5}">
+                      <a16:colId xmlns:a16="http://schemas.microsoft.com/office/drawing/2014/main" val="1068511216"/>
+                    </a:ext>
+                  </a:extLst>
+                </a:gridCol>
+              </a:tblGrid>
+              <a:tr h="370840">
+                <a:tc>
+                  <a:txBody>
+                    <a:bodyPr/>
+                    <a:lstStyle/>
+                    <a:p>
+                      <a:pPr algn="ctr"/>
+                      <a:r>
+                        <a:rPr lang="en-CH" dirty="0"/>
+                        <a:t>FÉVRIER</a:t>
+                      </a:r>
+                    </a:p>
+                  </a:txBody>
+                  <a:tcPr/>
+                </a:tc>
+                <a:tc>
+                  <a:txBody>
+                    <a:bodyPr/>
+                    <a:lstStyle/>
+                    <a:p>
+                      <a:pPr algn="ctr"/>
+                      <a:r>
+                        <a:rPr lang="en-CH" dirty="0"/>
+                        <a:t>MARS</a:t>
+                      </a:r>
+                    </a:p>
+                  </a:txBody>
+                  <a:tcPr/>
+                </a:tc>
+                <a:tc>
+                  <a:txBody>
+                    <a:bodyPr/>
+                    <a:lstStyle/>
+                    <a:p>
+                      <a:pPr algn="ctr"/>
+                      <a:r>
+                        <a:rPr lang="en-CH" dirty="0"/>
+                        <a:t>AVRIL</a:t>
+                      </a:r>
+                    </a:p>
+                  </a:txBody>
+                  <a:tcPr/>
+                </a:tc>
+                <a:tc>
+                  <a:txBody>
+                    <a:bodyPr/>
+                    <a:lstStyle/>
+                    <a:p>
+                      <a:pPr algn="ctr"/>
+                      <a:r>
+                        <a:rPr lang="en-CH" dirty="0"/>
+                        <a:t>MAI</a:t>
+                      </a:r>
+                    </a:p>
+                  </a:txBody>
+                  <a:tcPr/>
+                </a:tc>
+                <a:tc>
+                  <a:txBody>
+                    <a:bodyPr/>
+                    <a:lstStyle/>
+                    <a:p>
+                      <a:pPr algn="ctr"/>
+                      <a:r>
+                        <a:rPr lang="en-CH" dirty="0"/>
+                        <a:t>JUIN</a:t>
+                      </a:r>
+                    </a:p>
+                  </a:txBody>
+                  <a:tcPr/>
+                </a:tc>
+                <a:tc>
+                  <a:txBody>
+                    <a:bodyPr/>
+                    <a:lstStyle/>
+                    <a:p>
+                      <a:pPr algn="ctr"/>
+                      <a:r>
+                        <a:rPr lang="en-CH" dirty="0"/>
+                        <a:t>JUILLET</a:t>
+                      </a:r>
+                    </a:p>
+                  </a:txBody>
+                  <a:tcPr/>
+                </a:tc>
+                <a:tc>
+                  <a:txBody>
+                    <a:bodyPr/>
+                    <a:lstStyle/>
+                    <a:p>
+                      <a:pPr algn="ctr"/>
+                      <a:r>
+                        <a:rPr lang="en-CH" dirty="0"/>
+                        <a:t>AOÛT</a:t>
+                      </a:r>
+                    </a:p>
+                  </a:txBody>
+                  <a:tcPr/>
+                </a:tc>
+                <a:tc>
+                  <a:txBody>
+                    <a:bodyPr/>
+                    <a:lstStyle/>
+                    <a:p>
+                      <a:pPr algn="ctr"/>
+                      <a:r>
+                        <a:rPr lang="en-CH" dirty="0"/>
+                        <a:t>SEPTEMBRE</a:t>
+                      </a:r>
+                    </a:p>
+                  </a:txBody>
+                  <a:tcPr/>
+                </a:tc>
+                <a:extLst>
+                  <a:ext uri="{0D108BD9-81ED-4DB2-BD59-A6C34878D82A}">
+                    <a16:rowId xmlns:a16="http://schemas.microsoft.com/office/drawing/2014/main" val="1345547146"/>
+                  </a:ext>
+                </a:extLst>
+              </a:tr>
+              <a:tr h="370840">
+                <a:tc>
+                  <a:txBody>
+                    <a:bodyPr/>
+                    <a:lstStyle/>
+                    <a:p>
+                      <a:pPr algn="ctr"/>
+                      <a:r>
+                        <a:rPr lang="en-CH" dirty="0"/>
+                        <a:t>0</a:t>
+                      </a:r>
+                    </a:p>
+                  </a:txBody>
+                  <a:tcPr/>
+                </a:tc>
+                <a:tc>
+                  <a:txBody>
+                    <a:bodyPr/>
+                    <a:lstStyle/>
+                    <a:p>
+                      <a:pPr algn="ctr"/>
+                      <a:r>
+                        <a:rPr lang="en-CH" dirty="0"/>
+                        <a:t>7</a:t>
+                      </a:r>
+                    </a:p>
+                  </a:txBody>
+                  <a:tcPr/>
+                </a:tc>
+                <a:tc>
+                  <a:txBody>
+                    <a:bodyPr/>
+                    <a:lstStyle/>
+                    <a:p>
+                      <a:pPr algn="ctr"/>
+                      <a:r>
+                        <a:rPr lang="en-CH" dirty="0"/>
+                        <a:t>14</a:t>
+                      </a:r>
+                    </a:p>
+                  </a:txBody>
+                  <a:tcPr/>
+                </a:tc>
+                <a:tc>
+                  <a:txBody>
+                    <a:bodyPr/>
+                    <a:lstStyle/>
+                    <a:p>
+                      <a:pPr algn="ctr"/>
+                      <a:r>
+                        <a:rPr lang="en-CH" dirty="0"/>
+                        <a:t>16</a:t>
+                      </a:r>
+                    </a:p>
+                  </a:txBody>
+                  <a:tcPr/>
+                </a:tc>
+                <a:tc>
+                  <a:txBody>
+                    <a:bodyPr/>
+                    <a:lstStyle/>
+                    <a:p>
+                      <a:pPr algn="ctr"/>
+                      <a:r>
+                        <a:rPr lang="en-CH" dirty="0"/>
+                        <a:t>14</a:t>
+                      </a:r>
+                    </a:p>
+                  </a:txBody>
+                  <a:tcPr/>
+                </a:tc>
+                <a:tc>
+                  <a:txBody>
+                    <a:bodyPr/>
+                    <a:lstStyle/>
+                    <a:p>
+                      <a:pPr algn="ctr"/>
+                      <a:r>
+                        <a:rPr lang="en-CH" dirty="0"/>
+                        <a:t>13</a:t>
+                      </a:r>
+                    </a:p>
+                  </a:txBody>
+                  <a:tcPr/>
+                </a:tc>
+                <a:tc>
+                  <a:txBody>
+                    <a:bodyPr/>
+                    <a:lstStyle/>
+                    <a:p>
+                      <a:pPr algn="ctr"/>
+                      <a:r>
+                        <a:rPr lang="en-CH" dirty="0"/>
+                        <a:t>13</a:t>
+                      </a:r>
+                    </a:p>
+                  </a:txBody>
+                  <a:tcPr/>
+                </a:tc>
+                <a:tc>
+                  <a:txBody>
+                    <a:bodyPr/>
+                    <a:lstStyle/>
+                    <a:p>
+                      <a:pPr algn="ctr"/>
+                      <a:r>
+                        <a:rPr lang="en-CH" dirty="0"/>
+                        <a:t>5</a:t>
+                      </a:r>
+                    </a:p>
+                  </a:txBody>
+                  <a:tcPr/>
+                </a:tc>
+                <a:extLst>
+                  <a:ext uri="{0D108BD9-81ED-4DB2-BD59-A6C34878D82A}">
+                    <a16:rowId xmlns:a16="http://schemas.microsoft.com/office/drawing/2014/main" val="1502607584"/>
+                  </a:ext>
+                </a:extLst>
+              </a:tr>
+              <a:tr h="370840">
+                <a:tc>
+                  <a:txBody>
+                    <a:bodyPr/>
+                    <a:lstStyle/>
+                    <a:p>
+                      <a:pPr algn="ctr"/>
+                      <a:endParaRPr lang="en-CH" dirty="0"/>
+                    </a:p>
+                  </a:txBody>
+                  <a:tcPr/>
+                </a:tc>
+                <a:tc>
+                  <a:txBody>
+                    <a:bodyPr/>
+                    <a:lstStyle/>
+                    <a:p>
+                      <a:pPr algn="ctr"/>
+                      <a:endParaRPr lang="en-CH" dirty="0"/>
+                    </a:p>
+                  </a:txBody>
+                  <a:tcPr/>
+                </a:tc>
+                <a:tc>
+                  <a:txBody>
+                    <a:bodyPr/>
+                    <a:lstStyle/>
+                    <a:p>
+                      <a:pPr algn="ctr"/>
+                      <a:endParaRPr lang="en-CH" dirty="0"/>
+                    </a:p>
+                  </a:txBody>
+                  <a:tcPr/>
+                </a:tc>
+                <a:tc>
+                  <a:txBody>
+                    <a:bodyPr/>
+                    <a:lstStyle/>
+                    <a:p>
+                      <a:pPr algn="ctr"/>
+                      <a:endParaRPr lang="en-CH" dirty="0"/>
+                    </a:p>
+                  </a:txBody>
+                  <a:tcPr/>
+                </a:tc>
+                <a:tc>
+                  <a:txBody>
+                    <a:bodyPr/>
+                    <a:lstStyle/>
+                    <a:p>
+                      <a:pPr algn="ctr"/>
+                      <a:endParaRPr lang="en-CH" dirty="0"/>
+                    </a:p>
+                  </a:txBody>
+                  <a:tcPr/>
+                </a:tc>
+                <a:tc>
+                  <a:txBody>
+                    <a:bodyPr/>
+                    <a:lstStyle/>
+                    <a:p>
+                      <a:pPr algn="ctr"/>
+                      <a:endParaRPr lang="en-CH" dirty="0"/>
+                    </a:p>
+                  </a:txBody>
+                  <a:tcPr/>
+                </a:tc>
+                <a:tc>
+                  <a:txBody>
+                    <a:bodyPr/>
+                    <a:lstStyle/>
+                    <a:p>
+                      <a:pPr algn="ctr"/>
+                      <a:endParaRPr lang="en-CH" dirty="0"/>
+                    </a:p>
+                  </a:txBody>
+                  <a:tcPr/>
+                </a:tc>
+                <a:tc>
+                  <a:txBody>
+                    <a:bodyPr/>
+                    <a:lstStyle/>
+                    <a:p>
+                      <a:pPr algn="ctr"/>
+                      <a:endParaRPr lang="en-CH" dirty="0"/>
+                    </a:p>
+                  </a:txBody>
+                  <a:tcPr/>
+                </a:tc>
+                <a:extLst>
+                  <a:ext uri="{0D108BD9-81ED-4DB2-BD59-A6C34878D82A}">
+                    <a16:rowId xmlns:a16="http://schemas.microsoft.com/office/drawing/2014/main" val="577881736"/>
+                  </a:ext>
+                </a:extLst>
+              </a:tr>
+              <a:tr h="370840">
+                <a:tc>
+                  <a:txBody>
+                    <a:bodyPr/>
+                    <a:lstStyle/>
+                    <a:p>
+                      <a:pPr algn="ctr"/>
+                      <a:endParaRPr lang="en-CH" dirty="0"/>
+                    </a:p>
+                  </a:txBody>
+                  <a:tcPr/>
+                </a:tc>
+                <a:tc>
+                  <a:txBody>
+                    <a:bodyPr/>
+                    <a:lstStyle/>
+                    <a:p>
+                      <a:pPr algn="ctr"/>
+                      <a:endParaRPr lang="en-CH" dirty="0"/>
+                    </a:p>
+                  </a:txBody>
+                  <a:tcPr/>
+                </a:tc>
+                <a:tc>
+                  <a:txBody>
+                    <a:bodyPr/>
+                    <a:lstStyle/>
+                    <a:p>
+                      <a:pPr algn="ctr"/>
+                      <a:endParaRPr lang="en-CH" dirty="0"/>
+                    </a:p>
+                  </a:txBody>
+                  <a:tcPr/>
+                </a:tc>
+                <a:tc>
+                  <a:txBody>
+                    <a:bodyPr/>
+                    <a:lstStyle/>
+                    <a:p>
+                      <a:pPr algn="ctr"/>
+                      <a:endParaRPr lang="en-CH" dirty="0"/>
+                    </a:p>
+                  </a:txBody>
+                  <a:tcPr/>
+                </a:tc>
+                <a:tc>
+                  <a:txBody>
+                    <a:bodyPr/>
+                    <a:lstStyle/>
+                    <a:p>
+                      <a:pPr algn="ctr"/>
+                      <a:endParaRPr lang="en-CH" dirty="0"/>
+                    </a:p>
+                  </a:txBody>
+                  <a:tcPr/>
+                </a:tc>
+                <a:tc>
+                  <a:txBody>
+                    <a:bodyPr/>
+                    <a:lstStyle/>
+                    <a:p>
+                      <a:pPr algn="ctr"/>
+                      <a:endParaRPr lang="en-CH" dirty="0"/>
+                    </a:p>
+                  </a:txBody>
+                  <a:tcPr/>
+                </a:tc>
+                <a:tc>
+                  <a:txBody>
+                    <a:bodyPr/>
+                    <a:lstStyle/>
+                    <a:p>
+                      <a:pPr algn="ctr"/>
+                      <a:endParaRPr lang="en-CH" dirty="0"/>
+                    </a:p>
+                  </a:txBody>
+                  <a:tcPr/>
+                </a:tc>
+                <a:tc>
+                  <a:txBody>
+                    <a:bodyPr/>
+                    <a:lstStyle/>
+                    <a:p>
+                      <a:pPr algn="ctr"/>
+                      <a:endParaRPr lang="en-CH" dirty="0"/>
+                    </a:p>
+                  </a:txBody>
+                  <a:tcPr/>
+                </a:tc>
+                <a:extLst>
+                  <a:ext uri="{0D108BD9-81ED-4DB2-BD59-A6C34878D82A}">
+                    <a16:rowId xmlns:a16="http://schemas.microsoft.com/office/drawing/2014/main" val="2217367681"/>
+                  </a:ext>
+                </a:extLst>
+              </a:tr>
+            </a:tbl>
+          </a:graphicData>
+        </a:graphic>
+      </p:graphicFrame>
+      <p:sp>
+        <p:nvSpPr>
+          <p:cNvPr id="2" name="TextBox 1">
+            <a:extLst>
+              <a:ext uri="{FF2B5EF4-FFF2-40B4-BE49-F238E27FC236}">
+                <a16:creationId xmlns:a16="http://schemas.microsoft.com/office/drawing/2014/main" id="{DCBD22D0-EF2A-A119-E03F-35AD144DFAE6}"/>
+              </a:ext>
+            </a:extLst>
+          </p:cNvPr>
+          <p:cNvSpPr txBox="1"/>
+          <p:nvPr/>
+        </p:nvSpPr>
+        <p:spPr>
+          <a:xfrm>
+            <a:off x="2078182" y="858982"/>
+            <a:ext cx="4809522" cy="369332"/>
+          </a:xfrm>
+          <a:prstGeom prst="rect">
+            <a:avLst/>
+          </a:prstGeom>
+          <a:noFill/>
+        </p:spPr>
+        <p:txBody>
+          <a:bodyPr wrap="none" rtlCol="0">
+            <a:spAutoFit/>
+          </a:bodyPr>
+          <a:lstStyle/>
+          <a:p>
+            <a:r>
+              <a:rPr lang="en-CH" dirty="0"/>
+              <a:t>Total (stages + 1j congé / semaine attribués) = 82 </a:t>
+            </a:r>
+          </a:p>
+        </p:txBody>
+      </p:sp>
+      <p:sp>
+        <p:nvSpPr>
+          <p:cNvPr id="3" name="TextBox 2">
+            <a:extLst>
+              <a:ext uri="{FF2B5EF4-FFF2-40B4-BE49-F238E27FC236}">
+                <a16:creationId xmlns:a16="http://schemas.microsoft.com/office/drawing/2014/main" id="{DBFBE358-88DD-737F-C761-027E85BF503E}"/>
+              </a:ext>
+            </a:extLst>
+          </p:cNvPr>
+          <p:cNvSpPr txBox="1"/>
+          <p:nvPr/>
+        </p:nvSpPr>
+        <p:spPr>
+          <a:xfrm>
+            <a:off x="1937288" y="4262034"/>
+            <a:ext cx="1636217" cy="369332"/>
+          </a:xfrm>
+          <a:prstGeom prst="rect">
+            <a:avLst/>
+          </a:prstGeom>
+          <a:noFill/>
+        </p:spPr>
+        <p:txBody>
+          <a:bodyPr wrap="none" rtlCol="0">
+            <a:spAutoFit/>
+          </a:bodyPr>
+          <a:lstStyle/>
+          <a:p>
+            <a:r>
+              <a:rPr lang="en-CH" dirty="0"/>
+              <a:t>Jours bonus = 0</a:t>
+            </a:r>
+          </a:p>
+        </p:txBody>
+      </p:sp>
+    </p:spTree>
+    <p:extLst>
+      <p:ext uri="{BB962C8B-B14F-4D97-AF65-F5344CB8AC3E}">
+        <p14:creationId xmlns:p14="http://schemas.microsoft.com/office/powerpoint/2010/main" val="2537118191"/>
       </p:ext>
     </p:extLst>
   </p:cSld>
